--- a/livrables/drone_mbse_EN.pptx
+++ b/livrables/drone_mbse_EN.pptx
@@ -592,7 +592,7 @@
           <a:p>
             <a:r>
               <a:rPr lang="en-US" dirty="0"/>
-              <a:t>F0 is the mission. 8 level-1 functions and 42 level-2 sub-functions. Every function starts with an action verb and names no technology.</a:t>
+              <a:t>The root is the system of interest (delivery drone). 8 level-1 functions and 42 level-2 sub-functions. Every function starts with an action verb and names no technology.</a:t>
             </a:r>
             <a:endParaRPr lang="en-US" dirty="0"/>
           </a:p>
@@ -1100,8 +1100,8 @@
         </p:nvSpPr>
         <p:spPr>
           <a:xfrm>
-            <a:off x="8503920" y="274320"/>
-            <a:ext cx="3227832" cy="365760"/>
+            <a:off x="457200" y="685800"/>
+            <a:ext cx="8229600" cy="274320"/>
           </a:xfrm>
           <a:prstGeom prst="rect">
             <a:avLst/>
@@ -1113,6 +1113,45 @@
           <a:bodyPr wrap="square" lIns="0" tIns="0" rIns="0" bIns="0" rtlCol="0" anchor="ctr"/>
           <a:lstStyle/>
           <a:p>
+            <a:pPr indent="0" marL="0">
+              <a:buNone/>
+            </a:pPr>
+            <a:r>
+              <a:rPr lang="en-US" sz="1400" dirty="0">
+                <a:solidFill>
+                  <a:srgbClr val="15202A"/>
+                </a:solidFill>
+                <a:latin typeface="Calibri" pitchFamily="34" charset="0"/>
+                <a:ea typeface="Calibri" pitchFamily="34" charset="-122"/>
+                <a:cs typeface="Calibri" pitchFamily="34" charset="-120"/>
+              </a:rPr>
+              <a:t>Environment diagram</a:t>
+            </a:r>
+            <a:endParaRPr lang="en-US" sz="1400" dirty="0"/>
+          </a:p>
+        </p:txBody>
+      </p:sp>
+      <p:sp>
+        <p:nvSpPr>
+          <p:cNvPr id="4" name="Text 2"/>
+          <p:cNvSpPr txBox="1"/>
+          <p:nvPr/>
+        </p:nvSpPr>
+        <p:spPr>
+          <a:xfrm>
+            <a:off x="8503920" y="274320"/>
+            <a:ext cx="3227832" cy="365760"/>
+          </a:xfrm>
+          <a:prstGeom prst="rect">
+            <a:avLst/>
+          </a:prstGeom>
+          <a:noFill/>
+          <a:ln/>
+        </p:spPr>
+        <p:txBody>
+          <a:bodyPr wrap="square" lIns="0" tIns="0" rIns="0" bIns="0" rtlCol="0" anchor="ctr"/>
+          <a:lstStyle/>
+          <a:p>
             <a:pPr algn="r" indent="0" marL="0">
               <a:buNone/>
             </a:pPr>
@@ -1125,7 +1164,7 @@
                 <a:ea typeface="Calibri" pitchFamily="34" charset="-122"/>
                 <a:cs typeface="Calibri" pitchFamily="34" charset="-120"/>
               </a:rPr>
-              <a:t>Operational view · Environment diagram</a:t>
+              <a:t>Operational view · Environment analysis</a:t>
             </a:r>
             <a:endParaRPr lang="en-US" sz="1200" dirty="0"/>
           </a:p>
@@ -1133,14 +1172,14 @@
       </p:sp>
       <p:sp>
         <p:nvSpPr>
-          <p:cNvPr id="4" name="Shape 2"/>
-          <p:cNvSpPr/>
-          <p:nvPr/>
-        </p:nvSpPr>
-        <p:spPr>
-          <a:xfrm>
-            <a:off x="2778431" y="1652108"/>
-            <a:ext cx="2420713" cy="1607866"/>
+          <p:cNvPr id="5" name="Shape 3"/>
+          <p:cNvSpPr/>
+          <p:nvPr/>
+        </p:nvSpPr>
+        <p:spPr>
+          <a:xfrm>
+            <a:off x="2778431" y="1814484"/>
+            <a:ext cx="2420713" cy="1570182"/>
           </a:xfrm>
           <a:prstGeom prst="line">
             <a:avLst/>
@@ -1157,14 +1196,14 @@
       </p:sp>
       <p:sp>
         <p:nvSpPr>
-          <p:cNvPr id="5" name="Shape 3"/>
-          <p:cNvSpPr/>
-          <p:nvPr/>
-        </p:nvSpPr>
-        <p:spPr>
-          <a:xfrm>
-            <a:off x="4104849" y="1652108"/>
-            <a:ext cx="1452428" cy="1607866"/>
+          <p:cNvPr id="6" name="Shape 4"/>
+          <p:cNvSpPr/>
+          <p:nvPr/>
+        </p:nvSpPr>
+        <p:spPr>
+          <a:xfrm>
+            <a:off x="4104849" y="1814484"/>
+            <a:ext cx="1452428" cy="1570182"/>
           </a:xfrm>
           <a:prstGeom prst="line">
             <a:avLst/>
@@ -1182,14 +1221,14 @@
       </p:sp>
       <p:sp>
         <p:nvSpPr>
-          <p:cNvPr id="6" name="Shape 4"/>
-          <p:cNvSpPr/>
-          <p:nvPr/>
-        </p:nvSpPr>
-        <p:spPr>
-          <a:xfrm>
-            <a:off x="5431267" y="1652108"/>
-            <a:ext cx="484143" cy="1607866"/>
+          <p:cNvPr id="7" name="Shape 5"/>
+          <p:cNvSpPr/>
+          <p:nvPr/>
+        </p:nvSpPr>
+        <p:spPr>
+          <a:xfrm>
+            <a:off x="5431267" y="1814484"/>
+            <a:ext cx="484143" cy="1570182"/>
           </a:xfrm>
           <a:prstGeom prst="line">
             <a:avLst/>
@@ -1206,14 +1245,14 @@
       </p:sp>
       <p:sp>
         <p:nvSpPr>
-          <p:cNvPr id="7" name="Shape 5"/>
+          <p:cNvPr id="8" name="Shape 6"/>
           <p:cNvSpPr/>
           <p:nvPr/>
         </p:nvSpPr>
         <p:spPr>
           <a:xfrm flipH="1">
-            <a:off x="6273542" y="1652108"/>
-            <a:ext cx="484143" cy="1607866"/>
+            <a:off x="6273542" y="1814484"/>
+            <a:ext cx="484143" cy="1570182"/>
           </a:xfrm>
           <a:prstGeom prst="line">
             <a:avLst/>
@@ -1230,14 +1269,14 @@
       </p:sp>
       <p:sp>
         <p:nvSpPr>
-          <p:cNvPr id="8" name="Shape 6"/>
+          <p:cNvPr id="9" name="Shape 7"/>
           <p:cNvSpPr/>
           <p:nvPr/>
         </p:nvSpPr>
         <p:spPr>
           <a:xfrm flipH="1">
-            <a:off x="6631675" y="1652108"/>
-            <a:ext cx="1452428" cy="1607866"/>
+            <a:off x="6631675" y="1814484"/>
+            <a:ext cx="1452428" cy="1570182"/>
           </a:xfrm>
           <a:prstGeom prst="line">
             <a:avLst/>
@@ -1255,14 +1294,14 @@
       </p:sp>
       <p:sp>
         <p:nvSpPr>
-          <p:cNvPr id="9" name="Shape 7"/>
+          <p:cNvPr id="10" name="Shape 8"/>
           <p:cNvSpPr/>
           <p:nvPr/>
         </p:nvSpPr>
         <p:spPr>
           <a:xfrm flipV="1">
-            <a:off x="6989808" y="1652108"/>
-            <a:ext cx="2420713" cy="1607866"/>
+            <a:off x="6989808" y="1814484"/>
+            <a:ext cx="2420713" cy="1570182"/>
           </a:xfrm>
           <a:prstGeom prst="line">
             <a:avLst/>
@@ -1279,14 +1318,14 @@
       </p:sp>
       <p:sp>
         <p:nvSpPr>
-          <p:cNvPr id="10" name="Shape 8"/>
+          <p:cNvPr id="11" name="Shape 9"/>
           <p:cNvSpPr/>
           <p:nvPr/>
         </p:nvSpPr>
         <p:spPr>
           <a:xfrm flipV="1">
-            <a:off x="2778431" y="4087553"/>
-            <a:ext cx="2420713" cy="1489641"/>
+            <a:off x="2778431" y="4192847"/>
+            <a:ext cx="2420713" cy="1454727"/>
           </a:xfrm>
           <a:prstGeom prst="line">
             <a:avLst/>
@@ -1303,14 +1342,14 @@
       </p:sp>
       <p:sp>
         <p:nvSpPr>
-          <p:cNvPr id="11" name="Shape 9"/>
+          <p:cNvPr id="12" name="Shape 10"/>
           <p:cNvSpPr/>
           <p:nvPr/>
         </p:nvSpPr>
         <p:spPr>
           <a:xfrm flipV="1">
-            <a:off x="4104849" y="4087553"/>
-            <a:ext cx="1452428" cy="1489641"/>
+            <a:off x="4104849" y="4192847"/>
+            <a:ext cx="1452428" cy="1454727"/>
           </a:xfrm>
           <a:prstGeom prst="line">
             <a:avLst/>
@@ -1327,14 +1366,14 @@
       </p:sp>
       <p:sp>
         <p:nvSpPr>
-          <p:cNvPr id="12" name="Shape 10"/>
+          <p:cNvPr id="13" name="Shape 11"/>
           <p:cNvSpPr/>
           <p:nvPr/>
         </p:nvSpPr>
         <p:spPr>
           <a:xfrm flipV="1">
-            <a:off x="5431267" y="4087553"/>
-            <a:ext cx="484143" cy="1489641"/>
+            <a:off x="5431267" y="4192847"/>
+            <a:ext cx="484143" cy="1454727"/>
           </a:xfrm>
           <a:prstGeom prst="line">
             <a:avLst/>
@@ -1352,14 +1391,14 @@
       </p:sp>
       <p:sp>
         <p:nvSpPr>
-          <p:cNvPr id="13" name="Shape 11"/>
+          <p:cNvPr id="14" name="Shape 12"/>
           <p:cNvSpPr/>
           <p:nvPr/>
         </p:nvSpPr>
         <p:spPr>
           <a:xfrm flipH="1" flipV="1">
-            <a:off x="6273542" y="4087553"/>
-            <a:ext cx="484143" cy="1489641"/>
+            <a:off x="6273542" y="4192847"/>
+            <a:ext cx="484143" cy="1454727"/>
           </a:xfrm>
           <a:prstGeom prst="line">
             <a:avLst/>
@@ -1377,14 +1416,14 @@
       </p:sp>
       <p:sp>
         <p:nvSpPr>
-          <p:cNvPr id="14" name="Shape 12"/>
+          <p:cNvPr id="15" name="Shape 13"/>
           <p:cNvSpPr/>
           <p:nvPr/>
         </p:nvSpPr>
         <p:spPr>
           <a:xfrm flipH="1" flipV="1">
-            <a:off x="6631675" y="4087553"/>
-            <a:ext cx="1452428" cy="1489641"/>
+            <a:off x="6631675" y="4192847"/>
+            <a:ext cx="1452428" cy="1454727"/>
           </a:xfrm>
           <a:prstGeom prst="line">
             <a:avLst/>
@@ -1402,14 +1441,14 @@
       </p:sp>
       <p:sp>
         <p:nvSpPr>
-          <p:cNvPr id="15" name="Shape 13"/>
+          <p:cNvPr id="16" name="Shape 14"/>
           <p:cNvSpPr/>
           <p:nvPr/>
         </p:nvSpPr>
         <p:spPr>
           <a:xfrm flipH="1" flipV="1">
-            <a:off x="6989808" y="4087553"/>
-            <a:ext cx="2420713" cy="1489641"/>
+            <a:off x="6989808" y="4192847"/>
+            <a:ext cx="2420713" cy="1454727"/>
           </a:xfrm>
           <a:prstGeom prst="line">
             <a:avLst/>
@@ -1426,14 +1465,14 @@
       </p:sp>
       <p:sp>
         <p:nvSpPr>
-          <p:cNvPr id="16" name="Shape 14"/>
+          <p:cNvPr id="17" name="Shape 15"/>
           <p:cNvSpPr/>
           <p:nvPr/>
         </p:nvSpPr>
         <p:spPr>
           <a:xfrm flipV="1">
-            <a:off x="2778431" y="5908225"/>
-            <a:ext cx="0" cy="342854"/>
+            <a:off x="2778431" y="5970847"/>
+            <a:ext cx="0" cy="334818"/>
           </a:xfrm>
           <a:prstGeom prst="line">
             <a:avLst/>
@@ -1450,14 +1489,14 @@
       </p:sp>
       <p:sp>
         <p:nvSpPr>
-          <p:cNvPr id="17" name="Shape 15"/>
-          <p:cNvSpPr/>
-          <p:nvPr/>
-        </p:nvSpPr>
-        <p:spPr>
-          <a:xfrm>
-            <a:off x="3872726" y="3319087"/>
-            <a:ext cx="1160616" cy="147782"/>
+          <p:cNvPr id="18" name="Shape 16"/>
+          <p:cNvSpPr/>
+          <p:nvPr/>
+        </p:nvSpPr>
+        <p:spPr>
+          <a:xfrm>
+            <a:off x="3872726" y="3442393"/>
+            <a:ext cx="1160616" cy="144318"/>
           </a:xfrm>
           <a:prstGeom prst="line">
             <a:avLst/>
@@ -1475,14 +1514,14 @@
       </p:sp>
       <p:sp>
         <p:nvSpPr>
-          <p:cNvPr id="18" name="Shape 16"/>
+          <p:cNvPr id="19" name="Shape 17"/>
           <p:cNvSpPr/>
           <p:nvPr/>
         </p:nvSpPr>
         <p:spPr>
           <a:xfrm flipV="1">
-            <a:off x="3872726" y="3880658"/>
-            <a:ext cx="1160616" cy="147782"/>
+            <a:off x="3872726" y="3990802"/>
+            <a:ext cx="1160616" cy="144318"/>
           </a:xfrm>
           <a:prstGeom prst="line">
             <a:avLst/>
@@ -1500,13 +1539,13 @@
       </p:sp>
       <p:sp>
         <p:nvSpPr>
-          <p:cNvPr id="19" name="Shape 17"/>
-          <p:cNvSpPr/>
-          <p:nvPr/>
-        </p:nvSpPr>
-        <p:spPr>
-          <a:xfrm>
-            <a:off x="1916260" y="4028440"/>
+          <p:cNvPr id="20" name="Shape 18"/>
+          <p:cNvSpPr/>
+          <p:nvPr/>
+        </p:nvSpPr>
+        <p:spPr>
+          <a:xfrm>
+            <a:off x="1916260" y="4135120"/>
             <a:ext cx="696369" cy="0"/>
           </a:xfrm>
           <a:prstGeom prst="line">
@@ -1524,14 +1563,14 @@
       </p:sp>
       <p:sp>
         <p:nvSpPr>
-          <p:cNvPr id="20" name="Shape 18"/>
+          <p:cNvPr id="21" name="Shape 19"/>
           <p:cNvSpPr/>
           <p:nvPr/>
         </p:nvSpPr>
         <p:spPr>
           <a:xfrm flipV="1">
-            <a:off x="7155610" y="3319087"/>
-            <a:ext cx="1160616" cy="147782"/>
+            <a:off x="7155610" y="3442393"/>
+            <a:ext cx="1160616" cy="144318"/>
           </a:xfrm>
           <a:prstGeom prst="line">
             <a:avLst/>
@@ -1549,14 +1588,14 @@
       </p:sp>
       <p:sp>
         <p:nvSpPr>
-          <p:cNvPr id="21" name="Shape 19"/>
-          <p:cNvSpPr/>
-          <p:nvPr/>
-        </p:nvSpPr>
-        <p:spPr>
-          <a:xfrm>
-            <a:off x="7155610" y="3880658"/>
-            <a:ext cx="1160616" cy="147782"/>
+          <p:cNvPr id="22" name="Shape 20"/>
+          <p:cNvSpPr/>
+          <p:nvPr/>
+        </p:nvSpPr>
+        <p:spPr>
+          <a:xfrm>
+            <a:off x="7155610" y="3990802"/>
+            <a:ext cx="1160616" cy="144318"/>
           </a:xfrm>
           <a:prstGeom prst="line">
             <a:avLst/>
@@ -1574,14 +1613,14 @@
       </p:sp>
       <p:sp>
         <p:nvSpPr>
-          <p:cNvPr id="22" name="Shape 20"/>
-          <p:cNvSpPr/>
-          <p:nvPr/>
-        </p:nvSpPr>
-        <p:spPr>
-          <a:xfrm>
-            <a:off x="8946274" y="3484603"/>
-            <a:ext cx="0" cy="378321"/>
+          <p:cNvPr id="23" name="Shape 21"/>
+          <p:cNvSpPr/>
+          <p:nvPr/>
+        </p:nvSpPr>
+        <p:spPr>
+          <a:xfrm>
+            <a:off x="8946274" y="3604029"/>
+            <a:ext cx="0" cy="369455"/>
           </a:xfrm>
           <a:prstGeom prst="line">
             <a:avLst/>
@@ -1597,18 +1636,18 @@
       </p:sp>
       <p:sp>
         <p:nvSpPr>
-          <p:cNvPr id="23" name="Text 21"/>
-          <p:cNvSpPr/>
-          <p:nvPr/>
-        </p:nvSpPr>
-        <p:spPr>
-          <a:xfrm>
-            <a:off x="5033342" y="3259975"/>
-            <a:ext cx="2122269" cy="827578"/>
+          <p:cNvPr id="24" name="Text 22"/>
+          <p:cNvSpPr/>
+          <p:nvPr/>
+        </p:nvSpPr>
+        <p:spPr>
+          <a:xfrm>
+            <a:off x="5033342" y="3384665"/>
+            <a:ext cx="2122269" cy="808182"/>
           </a:xfrm>
           <a:prstGeom prst="roundRect">
             <a:avLst>
-              <a:gd name="adj" fmla="val 6629"/>
+              <a:gd name="adj" fmla="val 6789"/>
             </a:avLst>
           </a:prstGeom>
           <a:solidFill>
@@ -1661,18 +1700,18 @@
       </p:sp>
       <p:sp>
         <p:nvSpPr>
-          <p:cNvPr id="24" name="Text 22"/>
-          <p:cNvSpPr/>
-          <p:nvPr/>
-        </p:nvSpPr>
-        <p:spPr>
-          <a:xfrm>
-            <a:off x="2181543" y="1321077"/>
-            <a:ext cx="1193776" cy="331031"/>
+          <p:cNvPr id="25" name="Text 23"/>
+          <p:cNvSpPr/>
+          <p:nvPr/>
+        </p:nvSpPr>
+        <p:spPr>
+          <a:xfrm>
+            <a:off x="2181543" y="1491211"/>
+            <a:ext cx="1193776" cy="323273"/>
           </a:xfrm>
           <a:prstGeom prst="roundRect">
             <a:avLst>
-              <a:gd name="adj" fmla="val 16574"/>
+              <a:gd name="adj" fmla="val 16971"/>
             </a:avLst>
           </a:prstGeom>
           <a:solidFill>
@@ -1725,18 +1764,18 @@
       </p:sp>
       <p:sp>
         <p:nvSpPr>
-          <p:cNvPr id="25" name="Text 23"/>
-          <p:cNvSpPr/>
-          <p:nvPr/>
-        </p:nvSpPr>
-        <p:spPr>
-          <a:xfrm>
-            <a:off x="3507961" y="1321077"/>
-            <a:ext cx="1193776" cy="331031"/>
+          <p:cNvPr id="26" name="Text 24"/>
+          <p:cNvSpPr/>
+          <p:nvPr/>
+        </p:nvSpPr>
+        <p:spPr>
+          <a:xfrm>
+            <a:off x="3507961" y="1491211"/>
+            <a:ext cx="1193776" cy="323273"/>
           </a:xfrm>
           <a:prstGeom prst="roundRect">
             <a:avLst>
-              <a:gd name="adj" fmla="val 16574"/>
+              <a:gd name="adj" fmla="val 16971"/>
             </a:avLst>
           </a:prstGeom>
           <a:solidFill>
@@ -1789,18 +1828,18 @@
       </p:sp>
       <p:sp>
         <p:nvSpPr>
-          <p:cNvPr id="26" name="Text 24"/>
-          <p:cNvSpPr/>
-          <p:nvPr/>
-        </p:nvSpPr>
-        <p:spPr>
-          <a:xfrm>
-            <a:off x="4834379" y="1321077"/>
-            <a:ext cx="1193776" cy="331031"/>
+          <p:cNvPr id="27" name="Text 25"/>
+          <p:cNvSpPr/>
+          <p:nvPr/>
+        </p:nvSpPr>
+        <p:spPr>
+          <a:xfrm>
+            <a:off x="4834379" y="1491211"/>
+            <a:ext cx="1193776" cy="323273"/>
           </a:xfrm>
           <a:prstGeom prst="roundRect">
             <a:avLst>
-              <a:gd name="adj" fmla="val 16574"/>
+              <a:gd name="adj" fmla="val 16971"/>
             </a:avLst>
           </a:prstGeom>
           <a:solidFill>
@@ -1836,18 +1875,18 @@
       </p:sp>
       <p:sp>
         <p:nvSpPr>
-          <p:cNvPr id="27" name="Text 25"/>
-          <p:cNvSpPr/>
-          <p:nvPr/>
-        </p:nvSpPr>
-        <p:spPr>
-          <a:xfrm>
-            <a:off x="6160797" y="1321077"/>
-            <a:ext cx="1193776" cy="331031"/>
+          <p:cNvPr id="28" name="Text 26"/>
+          <p:cNvSpPr/>
+          <p:nvPr/>
+        </p:nvSpPr>
+        <p:spPr>
+          <a:xfrm>
+            <a:off x="6160797" y="1491211"/>
+            <a:ext cx="1193776" cy="323273"/>
           </a:xfrm>
           <a:prstGeom prst="roundRect">
             <a:avLst>
-              <a:gd name="adj" fmla="val 16574"/>
+              <a:gd name="adj" fmla="val 16971"/>
             </a:avLst>
           </a:prstGeom>
           <a:solidFill>
@@ -1883,18 +1922,18 @@
       </p:sp>
       <p:sp>
         <p:nvSpPr>
-          <p:cNvPr id="28" name="Text 26"/>
-          <p:cNvSpPr/>
-          <p:nvPr/>
-        </p:nvSpPr>
-        <p:spPr>
-          <a:xfrm>
-            <a:off x="7487215" y="1321077"/>
-            <a:ext cx="1193776" cy="331031"/>
+          <p:cNvPr id="29" name="Text 27"/>
+          <p:cNvSpPr/>
+          <p:nvPr/>
+        </p:nvSpPr>
+        <p:spPr>
+          <a:xfrm>
+            <a:off x="7487215" y="1491211"/>
+            <a:ext cx="1193776" cy="323273"/>
           </a:xfrm>
           <a:prstGeom prst="roundRect">
             <a:avLst>
-              <a:gd name="adj" fmla="val 16574"/>
+              <a:gd name="adj" fmla="val 16971"/>
             </a:avLst>
           </a:prstGeom>
           <a:solidFill>
@@ -1947,18 +1986,18 @@
       </p:sp>
       <p:sp>
         <p:nvSpPr>
-          <p:cNvPr id="29" name="Text 27"/>
-          <p:cNvSpPr/>
-          <p:nvPr/>
-        </p:nvSpPr>
-        <p:spPr>
-          <a:xfrm>
-            <a:off x="8813633" y="1321077"/>
-            <a:ext cx="1193776" cy="331031"/>
+          <p:cNvPr id="30" name="Text 28"/>
+          <p:cNvSpPr/>
+          <p:nvPr/>
+        </p:nvSpPr>
+        <p:spPr>
+          <a:xfrm>
+            <a:off x="8813633" y="1491211"/>
+            <a:ext cx="1193776" cy="323273"/>
           </a:xfrm>
           <a:prstGeom prst="roundRect">
             <a:avLst>
-              <a:gd name="adj" fmla="val 16574"/>
+              <a:gd name="adj" fmla="val 16971"/>
             </a:avLst>
           </a:prstGeom>
           <a:solidFill>
@@ -2011,18 +2050,18 @@
       </p:sp>
       <p:sp>
         <p:nvSpPr>
-          <p:cNvPr id="30" name="Text 28"/>
-          <p:cNvSpPr/>
-          <p:nvPr/>
-        </p:nvSpPr>
-        <p:spPr>
-          <a:xfrm>
-            <a:off x="2181543" y="5577193"/>
-            <a:ext cx="1193776" cy="331031"/>
+          <p:cNvPr id="31" name="Text 29"/>
+          <p:cNvSpPr/>
+          <p:nvPr/>
+        </p:nvSpPr>
+        <p:spPr>
+          <a:xfrm>
+            <a:off x="2181543" y="5647575"/>
+            <a:ext cx="1193776" cy="323273"/>
           </a:xfrm>
           <a:prstGeom prst="roundRect">
             <a:avLst>
-              <a:gd name="adj" fmla="val 16574"/>
+              <a:gd name="adj" fmla="val 16971"/>
             </a:avLst>
           </a:prstGeom>
           <a:solidFill>
@@ -2058,18 +2097,18 @@
       </p:sp>
       <p:sp>
         <p:nvSpPr>
-          <p:cNvPr id="31" name="Text 29"/>
-          <p:cNvSpPr/>
-          <p:nvPr/>
-        </p:nvSpPr>
-        <p:spPr>
-          <a:xfrm>
-            <a:off x="3507961" y="5577193"/>
-            <a:ext cx="1193776" cy="331031"/>
+          <p:cNvPr id="32" name="Text 30"/>
+          <p:cNvSpPr/>
+          <p:nvPr/>
+        </p:nvSpPr>
+        <p:spPr>
+          <a:xfrm>
+            <a:off x="3507961" y="5647575"/>
+            <a:ext cx="1193776" cy="323273"/>
           </a:xfrm>
           <a:prstGeom prst="roundRect">
             <a:avLst>
-              <a:gd name="adj" fmla="val 16574"/>
+              <a:gd name="adj" fmla="val 16971"/>
             </a:avLst>
           </a:prstGeom>
           <a:solidFill>
@@ -2122,18 +2161,18 @@
       </p:sp>
       <p:sp>
         <p:nvSpPr>
-          <p:cNvPr id="32" name="Text 30"/>
-          <p:cNvSpPr/>
-          <p:nvPr/>
-        </p:nvSpPr>
-        <p:spPr>
-          <a:xfrm>
-            <a:off x="4834379" y="5577193"/>
-            <a:ext cx="1193776" cy="331031"/>
+          <p:cNvPr id="33" name="Text 31"/>
+          <p:cNvSpPr/>
+          <p:nvPr/>
+        </p:nvSpPr>
+        <p:spPr>
+          <a:xfrm>
+            <a:off x="4834379" y="5647575"/>
+            <a:ext cx="1193776" cy="323273"/>
           </a:xfrm>
           <a:prstGeom prst="roundRect">
             <a:avLst>
-              <a:gd name="adj" fmla="val 16574"/>
+              <a:gd name="adj" fmla="val 16971"/>
             </a:avLst>
           </a:prstGeom>
           <a:solidFill>
@@ -2169,18 +2208,18 @@
       </p:sp>
       <p:sp>
         <p:nvSpPr>
-          <p:cNvPr id="33" name="Text 31"/>
-          <p:cNvSpPr/>
-          <p:nvPr/>
-        </p:nvSpPr>
-        <p:spPr>
-          <a:xfrm>
-            <a:off x="6160797" y="5577193"/>
-            <a:ext cx="1193776" cy="331031"/>
+          <p:cNvPr id="34" name="Text 32"/>
+          <p:cNvSpPr/>
+          <p:nvPr/>
+        </p:nvSpPr>
+        <p:spPr>
+          <a:xfrm>
+            <a:off x="6160797" y="5647575"/>
+            <a:ext cx="1193776" cy="323273"/>
           </a:xfrm>
           <a:prstGeom prst="roundRect">
             <a:avLst>
-              <a:gd name="adj" fmla="val 16574"/>
+              <a:gd name="adj" fmla="val 16971"/>
             </a:avLst>
           </a:prstGeom>
           <a:solidFill>
@@ -2233,18 +2272,18 @@
       </p:sp>
       <p:sp>
         <p:nvSpPr>
-          <p:cNvPr id="34" name="Text 32"/>
-          <p:cNvSpPr/>
-          <p:nvPr/>
-        </p:nvSpPr>
-        <p:spPr>
-          <a:xfrm>
-            <a:off x="7487215" y="5577193"/>
-            <a:ext cx="1193776" cy="331031"/>
+          <p:cNvPr id="35" name="Text 33"/>
+          <p:cNvSpPr/>
+          <p:nvPr/>
+        </p:nvSpPr>
+        <p:spPr>
+          <a:xfrm>
+            <a:off x="7487215" y="5647575"/>
+            <a:ext cx="1193776" cy="323273"/>
           </a:xfrm>
           <a:prstGeom prst="roundRect">
             <a:avLst>
-              <a:gd name="adj" fmla="val 16574"/>
+              <a:gd name="adj" fmla="val 16971"/>
             </a:avLst>
           </a:prstGeom>
           <a:solidFill>
@@ -2280,18 +2319,18 @@
       </p:sp>
       <p:sp>
         <p:nvSpPr>
-          <p:cNvPr id="35" name="Text 33"/>
-          <p:cNvSpPr/>
-          <p:nvPr/>
-        </p:nvSpPr>
-        <p:spPr>
-          <a:xfrm>
-            <a:off x="8813633" y="5577193"/>
-            <a:ext cx="1193776" cy="331031"/>
+          <p:cNvPr id="36" name="Text 34"/>
+          <p:cNvSpPr/>
+          <p:nvPr/>
+        </p:nvSpPr>
+        <p:spPr>
+          <a:xfrm>
+            <a:off x="8813633" y="5647575"/>
+            <a:ext cx="1193776" cy="323273"/>
           </a:xfrm>
           <a:prstGeom prst="roundRect">
             <a:avLst>
-              <a:gd name="adj" fmla="val 16574"/>
+              <a:gd name="adj" fmla="val 16971"/>
             </a:avLst>
           </a:prstGeom>
           <a:solidFill>
@@ -2344,18 +2383,18 @@
       </p:sp>
       <p:sp>
         <p:nvSpPr>
-          <p:cNvPr id="36" name="Text 34"/>
-          <p:cNvSpPr/>
-          <p:nvPr/>
-        </p:nvSpPr>
-        <p:spPr>
-          <a:xfrm>
-            <a:off x="2181543" y="6251079"/>
-            <a:ext cx="1193776" cy="283741"/>
+          <p:cNvPr id="37" name="Text 35"/>
+          <p:cNvSpPr/>
+          <p:nvPr/>
+        </p:nvSpPr>
+        <p:spPr>
+          <a:xfrm>
+            <a:off x="2181543" y="6305665"/>
+            <a:ext cx="1193776" cy="277091"/>
           </a:xfrm>
           <a:prstGeom prst="roundRect">
             <a:avLst>
-              <a:gd name="adj" fmla="val 19336"/>
+              <a:gd name="adj" fmla="val 19800"/>
             </a:avLst>
           </a:prstGeom>
           <a:solidFill>
@@ -2392,18 +2431,18 @@
       </p:sp>
       <p:sp>
         <p:nvSpPr>
-          <p:cNvPr id="37" name="Text 35"/>
-          <p:cNvSpPr/>
-          <p:nvPr/>
-        </p:nvSpPr>
-        <p:spPr>
-          <a:xfrm>
-            <a:off x="2612629" y="3153572"/>
-            <a:ext cx="1260097" cy="331031"/>
+          <p:cNvPr id="38" name="Text 36"/>
+          <p:cNvSpPr/>
+          <p:nvPr/>
+        </p:nvSpPr>
+        <p:spPr>
+          <a:xfrm>
+            <a:off x="2612629" y="3280756"/>
+            <a:ext cx="1260097" cy="323273"/>
           </a:xfrm>
           <a:prstGeom prst="roundRect">
             <a:avLst>
-              <a:gd name="adj" fmla="val 16574"/>
+              <a:gd name="adj" fmla="val 16971"/>
             </a:avLst>
           </a:prstGeom>
           <a:solidFill>
@@ -2456,18 +2495,18 @@
       </p:sp>
       <p:sp>
         <p:nvSpPr>
-          <p:cNvPr id="38" name="Text 36"/>
-          <p:cNvSpPr/>
-          <p:nvPr/>
-        </p:nvSpPr>
-        <p:spPr>
-          <a:xfrm>
-            <a:off x="2612629" y="3862924"/>
-            <a:ext cx="1260097" cy="331031"/>
+          <p:cNvPr id="39" name="Text 37"/>
+          <p:cNvSpPr/>
+          <p:nvPr/>
+        </p:nvSpPr>
+        <p:spPr>
+          <a:xfrm>
+            <a:off x="2612629" y="3973484"/>
+            <a:ext cx="1260097" cy="323273"/>
           </a:xfrm>
           <a:prstGeom prst="roundRect">
             <a:avLst>
-              <a:gd name="adj" fmla="val 16574"/>
+              <a:gd name="adj" fmla="val 16971"/>
             </a:avLst>
           </a:prstGeom>
           <a:solidFill>
@@ -2520,18 +2559,18 @@
       </p:sp>
       <p:sp>
         <p:nvSpPr>
-          <p:cNvPr id="39" name="Text 37"/>
-          <p:cNvSpPr/>
-          <p:nvPr/>
-        </p:nvSpPr>
-        <p:spPr>
-          <a:xfrm>
-            <a:off x="722484" y="3886569"/>
-            <a:ext cx="1193776" cy="283741"/>
+          <p:cNvPr id="40" name="Text 38"/>
+          <p:cNvSpPr/>
+          <p:nvPr/>
+        </p:nvSpPr>
+        <p:spPr>
+          <a:xfrm>
+            <a:off x="722484" y="3996575"/>
+            <a:ext cx="1193776" cy="277091"/>
           </a:xfrm>
           <a:prstGeom prst="roundRect">
             <a:avLst>
-              <a:gd name="adj" fmla="val 19336"/>
+              <a:gd name="adj" fmla="val 19800"/>
             </a:avLst>
           </a:prstGeom>
           <a:solidFill>
@@ -2568,18 +2607,18 @@
       </p:sp>
       <p:sp>
         <p:nvSpPr>
-          <p:cNvPr id="40" name="Text 38"/>
-          <p:cNvSpPr/>
-          <p:nvPr/>
-        </p:nvSpPr>
-        <p:spPr>
-          <a:xfrm>
-            <a:off x="8316226" y="3153572"/>
-            <a:ext cx="1260097" cy="331031"/>
+          <p:cNvPr id="41" name="Text 39"/>
+          <p:cNvSpPr/>
+          <p:nvPr/>
+        </p:nvSpPr>
+        <p:spPr>
+          <a:xfrm>
+            <a:off x="8316226" y="3280756"/>
+            <a:ext cx="1260097" cy="323273"/>
           </a:xfrm>
           <a:prstGeom prst="roundRect">
             <a:avLst>
-              <a:gd name="adj" fmla="val 16574"/>
+              <a:gd name="adj" fmla="val 16971"/>
             </a:avLst>
           </a:prstGeom>
           <a:solidFill>
@@ -2615,18 +2654,18 @@
       </p:sp>
       <p:sp>
         <p:nvSpPr>
-          <p:cNvPr id="41" name="Text 39"/>
-          <p:cNvSpPr/>
-          <p:nvPr/>
-        </p:nvSpPr>
-        <p:spPr>
-          <a:xfrm>
-            <a:off x="8316226" y="3862924"/>
-            <a:ext cx="1260097" cy="331031"/>
+          <p:cNvPr id="42" name="Text 40"/>
+          <p:cNvSpPr/>
+          <p:nvPr/>
+        </p:nvSpPr>
+        <p:spPr>
+          <a:xfrm>
+            <a:off x="8316226" y="3973484"/>
+            <a:ext cx="1260097" cy="323273"/>
           </a:xfrm>
           <a:prstGeom prst="roundRect">
             <a:avLst>
-              <a:gd name="adj" fmla="val 16574"/>
+              <a:gd name="adj" fmla="val 16971"/>
             </a:avLst>
           </a:prstGeom>
           <a:solidFill>
@@ -2679,13 +2718,13 @@
       </p:sp>
       <p:sp>
         <p:nvSpPr>
-          <p:cNvPr id="42" name="Text 40"/>
+          <p:cNvPr id="43" name="Text 41"/>
           <p:cNvSpPr txBox="1"/>
           <p:nvPr/>
         </p:nvSpPr>
         <p:spPr>
           <a:xfrm>
-            <a:off x="3092669" y="2084139"/>
+            <a:off x="3092669" y="2233353"/>
             <a:ext cx="1069340" cy="259080"/>
           </a:xfrm>
           <a:prstGeom prst="rect">
@@ -2737,13 +2776,13 @@
       </p:sp>
       <p:sp>
         <p:nvSpPr>
-          <p:cNvPr id="43" name="Text 41"/>
+          <p:cNvPr id="44" name="Text 42"/>
           <p:cNvSpPr txBox="1"/>
           <p:nvPr/>
         </p:nvSpPr>
         <p:spPr>
           <a:xfrm>
-            <a:off x="4080850" y="2084139"/>
+            <a:off x="4080850" y="2233353"/>
             <a:ext cx="1069340" cy="259080"/>
           </a:xfrm>
           <a:prstGeom prst="rect">
@@ -2795,13 +2834,13 @@
       </p:sp>
       <p:sp>
         <p:nvSpPr>
-          <p:cNvPr id="44" name="Text 42"/>
+          <p:cNvPr id="45" name="Text 43"/>
           <p:cNvSpPr txBox="1"/>
           <p:nvPr/>
         </p:nvSpPr>
         <p:spPr>
           <a:xfrm>
-            <a:off x="5091256" y="2084139"/>
+            <a:off x="5091256" y="2233353"/>
             <a:ext cx="1024890" cy="259080"/>
           </a:xfrm>
           <a:prstGeom prst="rect">
@@ -2853,13 +2892,13 @@
       </p:sp>
       <p:sp>
         <p:nvSpPr>
-          <p:cNvPr id="45" name="Text 43"/>
+          <p:cNvPr id="46" name="Text 44"/>
           <p:cNvSpPr txBox="1"/>
           <p:nvPr/>
         </p:nvSpPr>
         <p:spPr>
           <a:xfrm>
-            <a:off x="6072806" y="2084139"/>
+            <a:off x="6072806" y="2233353"/>
             <a:ext cx="1024890" cy="259080"/>
           </a:xfrm>
           <a:prstGeom prst="rect">
@@ -2911,13 +2950,13 @@
       </p:sp>
       <p:sp>
         <p:nvSpPr>
-          <p:cNvPr id="46" name="Text 44"/>
+          <p:cNvPr id="47" name="Text 45"/>
           <p:cNvSpPr txBox="1"/>
           <p:nvPr/>
         </p:nvSpPr>
         <p:spPr>
           <a:xfrm>
-            <a:off x="7194337" y="2084139"/>
+            <a:off x="7194337" y="2233353"/>
             <a:ext cx="758190" cy="259080"/>
           </a:xfrm>
           <a:prstGeom prst="rect">
@@ -2969,13 +3008,13 @@
       </p:sp>
       <p:sp>
         <p:nvSpPr>
-          <p:cNvPr id="47" name="Text 45"/>
+          <p:cNvPr id="48" name="Text 46"/>
           <p:cNvSpPr txBox="1"/>
           <p:nvPr/>
         </p:nvSpPr>
         <p:spPr>
           <a:xfrm>
-            <a:off x="8138068" y="2084139"/>
+            <a:off x="8138068" y="2233353"/>
             <a:ext cx="847090" cy="259080"/>
           </a:xfrm>
           <a:prstGeom prst="rect">
@@ -3027,13 +3066,13 @@
       </p:sp>
       <p:sp>
         <p:nvSpPr>
-          <p:cNvPr id="48" name="Text 46"/>
+          <p:cNvPr id="49" name="Text 47"/>
           <p:cNvSpPr txBox="1"/>
           <p:nvPr/>
         </p:nvSpPr>
         <p:spPr>
           <a:xfrm>
-            <a:off x="3337144" y="4980801"/>
+            <a:off x="3337144" y="5063375"/>
             <a:ext cx="580390" cy="152400"/>
           </a:xfrm>
           <a:prstGeom prst="rect">
@@ -3068,13 +3107,13 @@
       </p:sp>
       <p:sp>
         <p:nvSpPr>
-          <p:cNvPr id="49" name="Text 47"/>
+          <p:cNvPr id="50" name="Text 48"/>
           <p:cNvSpPr txBox="1"/>
           <p:nvPr/>
         </p:nvSpPr>
         <p:spPr>
           <a:xfrm>
-            <a:off x="4169750" y="4980801"/>
+            <a:off x="4169750" y="5063375"/>
             <a:ext cx="891540" cy="152400"/>
           </a:xfrm>
           <a:prstGeom prst="rect">
@@ -3109,13 +3148,13 @@
       </p:sp>
       <p:sp>
         <p:nvSpPr>
-          <p:cNvPr id="50" name="Text 48"/>
+          <p:cNvPr id="51" name="Text 49"/>
           <p:cNvSpPr txBox="1"/>
           <p:nvPr/>
         </p:nvSpPr>
         <p:spPr>
           <a:xfrm>
-            <a:off x="5202381" y="4927461"/>
+            <a:off x="5202381" y="5010035"/>
             <a:ext cx="802640" cy="259080"/>
           </a:xfrm>
           <a:prstGeom prst="rect">
@@ -3167,13 +3206,13 @@
       </p:sp>
       <p:sp>
         <p:nvSpPr>
-          <p:cNvPr id="51" name="Text 49"/>
+          <p:cNvPr id="52" name="Text 50"/>
           <p:cNvSpPr txBox="1"/>
           <p:nvPr/>
         </p:nvSpPr>
         <p:spPr>
           <a:xfrm>
-            <a:off x="6161706" y="4927461"/>
+            <a:off x="6161706" y="5010035"/>
             <a:ext cx="847090" cy="259080"/>
           </a:xfrm>
           <a:prstGeom prst="rect">
@@ -3225,13 +3264,13 @@
       </p:sp>
       <p:sp>
         <p:nvSpPr>
-          <p:cNvPr id="52" name="Text 50"/>
+          <p:cNvPr id="53" name="Text 51"/>
           <p:cNvSpPr txBox="1"/>
           <p:nvPr/>
         </p:nvSpPr>
         <p:spPr>
           <a:xfrm>
-            <a:off x="7016537" y="4927461"/>
+            <a:off x="7016537" y="5010035"/>
             <a:ext cx="1113790" cy="259080"/>
           </a:xfrm>
           <a:prstGeom prst="rect">
@@ -3283,13 +3322,13 @@
       </p:sp>
       <p:sp>
         <p:nvSpPr>
-          <p:cNvPr id="53" name="Text 51"/>
+          <p:cNvPr id="54" name="Text 52"/>
           <p:cNvSpPr txBox="1"/>
           <p:nvPr/>
         </p:nvSpPr>
         <p:spPr>
           <a:xfrm>
-            <a:off x="8249193" y="4927461"/>
+            <a:off x="8249193" y="5010035"/>
             <a:ext cx="624840" cy="259080"/>
           </a:xfrm>
           <a:prstGeom prst="rect">
@@ -3341,13 +3380,13 @@
       </p:sp>
       <p:sp>
         <p:nvSpPr>
-          <p:cNvPr id="54" name="Text 52"/>
+          <p:cNvPr id="55" name="Text 53"/>
           <p:cNvSpPr txBox="1"/>
           <p:nvPr/>
         </p:nvSpPr>
         <p:spPr>
           <a:xfrm>
-            <a:off x="2488236" y="6003452"/>
+            <a:off x="2488236" y="6062056"/>
             <a:ext cx="580390" cy="152400"/>
           </a:xfrm>
           <a:prstGeom prst="rect">
@@ -3382,13 +3421,13 @@
       </p:sp>
       <p:sp>
         <p:nvSpPr>
-          <p:cNvPr id="55" name="Text 53"/>
+          <p:cNvPr id="56" name="Text 54"/>
           <p:cNvSpPr txBox="1"/>
           <p:nvPr/>
         </p:nvSpPr>
         <p:spPr>
           <a:xfrm>
-            <a:off x="4007264" y="3263438"/>
+            <a:off x="4007264" y="3385012"/>
             <a:ext cx="891540" cy="259080"/>
           </a:xfrm>
           <a:prstGeom prst="rect">
@@ -3440,13 +3479,13 @@
       </p:sp>
       <p:sp>
         <p:nvSpPr>
-          <p:cNvPr id="56" name="Text 54"/>
+          <p:cNvPr id="57" name="Text 55"/>
           <p:cNvSpPr txBox="1"/>
           <p:nvPr/>
         </p:nvSpPr>
         <p:spPr>
           <a:xfrm>
-            <a:off x="4051714" y="3825009"/>
+            <a:off x="4051714" y="3933421"/>
             <a:ext cx="802640" cy="259080"/>
           </a:xfrm>
           <a:prstGeom prst="rect">
@@ -3498,13 +3537,13 @@
       </p:sp>
       <p:sp>
         <p:nvSpPr>
-          <p:cNvPr id="57" name="Text 55"/>
+          <p:cNvPr id="58" name="Text 56"/>
           <p:cNvSpPr txBox="1"/>
           <p:nvPr/>
         </p:nvSpPr>
         <p:spPr>
           <a:xfrm>
-            <a:off x="2085374" y="3898900"/>
+            <a:off x="2085374" y="4005580"/>
             <a:ext cx="358140" cy="259080"/>
           </a:xfrm>
           <a:prstGeom prst="rect">
@@ -3556,13 +3595,13 @@
       </p:sp>
       <p:sp>
         <p:nvSpPr>
-          <p:cNvPr id="58" name="Text 56"/>
+          <p:cNvPr id="59" name="Text 57"/>
           <p:cNvSpPr txBox="1"/>
           <p:nvPr/>
         </p:nvSpPr>
         <p:spPr>
           <a:xfrm>
-            <a:off x="7290148" y="3263438"/>
+            <a:off x="7290148" y="3385012"/>
             <a:ext cx="891540" cy="259080"/>
           </a:xfrm>
           <a:prstGeom prst="rect">
@@ -3614,13 +3653,13 @@
       </p:sp>
       <p:sp>
         <p:nvSpPr>
-          <p:cNvPr id="59" name="Text 57"/>
+          <p:cNvPr id="60" name="Text 58"/>
           <p:cNvSpPr txBox="1"/>
           <p:nvPr/>
         </p:nvSpPr>
         <p:spPr>
           <a:xfrm>
-            <a:off x="7179023" y="3825009"/>
+            <a:off x="7179023" y="3933421"/>
             <a:ext cx="1113790" cy="259080"/>
           </a:xfrm>
           <a:prstGeom prst="rect">
@@ -3672,13 +3711,13 @@
       </p:sp>
       <p:sp>
         <p:nvSpPr>
-          <p:cNvPr id="60" name="Text 58"/>
+          <p:cNvPr id="61" name="Text 59"/>
           <p:cNvSpPr txBox="1"/>
           <p:nvPr/>
         </p:nvSpPr>
         <p:spPr>
           <a:xfrm>
-            <a:off x="8811654" y="3597564"/>
+            <a:off x="8811654" y="3712556"/>
             <a:ext cx="269240" cy="152400"/>
           </a:xfrm>
           <a:prstGeom prst="rect">
@@ -3713,13 +3752,13 @@
       </p:sp>
       <p:sp>
         <p:nvSpPr>
-          <p:cNvPr id="61" name="Text 59"/>
+          <p:cNvPr id="62" name="Text 60"/>
           <p:cNvSpPr txBox="1"/>
           <p:nvPr/>
         </p:nvSpPr>
         <p:spPr>
           <a:xfrm>
-            <a:off x="4722876" y="900176"/>
+            <a:off x="4722876" y="1076960"/>
             <a:ext cx="2743200" cy="274320"/>
           </a:xfrm>
           <a:prstGeom prst="rect">
@@ -3752,13 +3791,13 @@
       </p:sp>
       <p:sp>
         <p:nvSpPr>
-          <p:cNvPr id="62" name="Text 60"/>
+          <p:cNvPr id="63" name="Text 61"/>
           <p:cNvSpPr txBox="1"/>
           <p:nvPr/>
         </p:nvSpPr>
         <p:spPr>
           <a:xfrm>
-            <a:off x="1871078" y="2856807"/>
+            <a:off x="1871078" y="2987733"/>
             <a:ext cx="2743200" cy="274320"/>
           </a:xfrm>
           <a:prstGeom prst="rect">
@@ -3791,13 +3830,13 @@
       </p:sp>
       <p:sp>
         <p:nvSpPr>
-          <p:cNvPr id="63" name="Text 61"/>
+          <p:cNvPr id="64" name="Text 62"/>
           <p:cNvSpPr txBox="1"/>
           <p:nvPr/>
         </p:nvSpPr>
         <p:spPr>
           <a:xfrm>
-            <a:off x="7574674" y="2856807"/>
+            <a:off x="7574674" y="2987733"/>
             <a:ext cx="2743200" cy="274320"/>
           </a:xfrm>
           <a:prstGeom prst="rect">
@@ -3830,13 +3869,13 @@
       </p:sp>
       <p:sp>
         <p:nvSpPr>
-          <p:cNvPr id="64" name="Text 62"/>
+          <p:cNvPr id="65" name="Text 63"/>
           <p:cNvSpPr txBox="1"/>
           <p:nvPr/>
         </p:nvSpPr>
         <p:spPr>
           <a:xfrm>
-            <a:off x="4722876" y="5989782"/>
+            <a:off x="4722876" y="6047278"/>
             <a:ext cx="2743200" cy="274320"/>
           </a:xfrm>
           <a:prstGeom prst="rect">
@@ -3869,13 +3908,13 @@
       </p:sp>
       <p:sp>
         <p:nvSpPr>
-          <p:cNvPr id="65" name="Shape 63"/>
-          <p:cNvSpPr/>
-          <p:nvPr/>
-        </p:nvSpPr>
-        <p:spPr>
-          <a:xfrm>
-            <a:off x="6625043" y="6481618"/>
+          <p:cNvPr id="66" name="Shape 64"/>
+          <p:cNvSpPr/>
+          <p:nvPr/>
+        </p:nvSpPr>
+        <p:spPr>
+          <a:xfrm>
+            <a:off x="6625043" y="6530802"/>
             <a:ext cx="185699" cy="0"/>
           </a:xfrm>
           <a:prstGeom prst="line">
@@ -3893,13 +3932,13 @@
       </p:sp>
       <p:sp>
         <p:nvSpPr>
-          <p:cNvPr id="66" name="Text 64"/>
+          <p:cNvPr id="67" name="Text 65"/>
           <p:cNvSpPr txBox="1"/>
           <p:nvPr/>
         </p:nvSpPr>
         <p:spPr>
           <a:xfrm>
-            <a:off x="6850534" y="6390178"/>
+            <a:off x="6850534" y="6439362"/>
             <a:ext cx="1280160" cy="182880"/>
           </a:xfrm>
           <a:prstGeom prst="rect">
@@ -3932,13 +3971,13 @@
       </p:sp>
       <p:sp>
         <p:nvSpPr>
-          <p:cNvPr id="67" name="Shape 65"/>
-          <p:cNvSpPr/>
-          <p:nvPr/>
-        </p:nvSpPr>
-        <p:spPr>
-          <a:xfrm>
-            <a:off x="7744540" y="6481618"/>
+          <p:cNvPr id="68" name="Shape 66"/>
+          <p:cNvSpPr/>
+          <p:nvPr/>
+        </p:nvSpPr>
+        <p:spPr>
+          <a:xfrm>
+            <a:off x="7744540" y="6530802"/>
             <a:ext cx="185699" cy="0"/>
           </a:xfrm>
           <a:prstGeom prst="line">
@@ -3956,13 +3995,13 @@
       </p:sp>
       <p:sp>
         <p:nvSpPr>
-          <p:cNvPr id="68" name="Text 66"/>
+          <p:cNvPr id="69" name="Text 67"/>
           <p:cNvSpPr txBox="1"/>
           <p:nvPr/>
         </p:nvSpPr>
         <p:spPr>
           <a:xfrm>
-            <a:off x="7970031" y="6390178"/>
+            <a:off x="7970031" y="6439362"/>
             <a:ext cx="1280160" cy="182880"/>
           </a:xfrm>
           <a:prstGeom prst="rect">
@@ -3995,13 +4034,13 @@
       </p:sp>
       <p:sp>
         <p:nvSpPr>
-          <p:cNvPr id="69" name="Shape 67"/>
-          <p:cNvSpPr/>
-          <p:nvPr/>
-        </p:nvSpPr>
-        <p:spPr>
-          <a:xfrm>
-            <a:off x="8907808" y="6481618"/>
+          <p:cNvPr id="70" name="Shape 68"/>
+          <p:cNvSpPr/>
+          <p:nvPr/>
+        </p:nvSpPr>
+        <p:spPr>
+          <a:xfrm>
+            <a:off x="8907808" y="6530802"/>
             <a:ext cx="185699" cy="0"/>
           </a:xfrm>
           <a:prstGeom prst="line">
@@ -4019,13 +4058,13 @@
       </p:sp>
       <p:sp>
         <p:nvSpPr>
-          <p:cNvPr id="70" name="Text 68"/>
+          <p:cNvPr id="71" name="Text 69"/>
           <p:cNvSpPr txBox="1"/>
           <p:nvPr/>
         </p:nvSpPr>
         <p:spPr>
           <a:xfrm>
-            <a:off x="9133299" y="6390178"/>
+            <a:off x="9133299" y="6439362"/>
             <a:ext cx="1280160" cy="182880"/>
           </a:xfrm>
           <a:prstGeom prst="rect">
@@ -4058,13 +4097,13 @@
       </p:sp>
       <p:sp>
         <p:nvSpPr>
-          <p:cNvPr id="71" name="Shape 69"/>
-          <p:cNvSpPr/>
-          <p:nvPr/>
-        </p:nvSpPr>
-        <p:spPr>
-          <a:xfrm>
-            <a:off x="9633359" y="6481618"/>
+          <p:cNvPr id="72" name="Shape 70"/>
+          <p:cNvSpPr/>
+          <p:nvPr/>
+        </p:nvSpPr>
+        <p:spPr>
+          <a:xfrm>
+            <a:off x="9633359" y="6530802"/>
             <a:ext cx="185699" cy="0"/>
           </a:xfrm>
           <a:prstGeom prst="line">
@@ -4082,13 +4121,13 @@
       </p:sp>
       <p:sp>
         <p:nvSpPr>
-          <p:cNvPr id="72" name="Text 70"/>
+          <p:cNvPr id="73" name="Text 71"/>
           <p:cNvSpPr txBox="1"/>
           <p:nvPr/>
         </p:nvSpPr>
         <p:spPr>
           <a:xfrm>
-            <a:off x="9858850" y="6390178"/>
+            <a:off x="9858850" y="6439362"/>
             <a:ext cx="1280160" cy="182880"/>
           </a:xfrm>
           <a:prstGeom prst="rect">
@@ -4121,13 +4160,13 @@
       </p:sp>
       <p:sp>
         <p:nvSpPr>
-          <p:cNvPr id="73" name="Shape 71"/>
-          <p:cNvSpPr/>
-          <p:nvPr/>
-        </p:nvSpPr>
-        <p:spPr>
-          <a:xfrm>
-            <a:off x="10446453" y="6481618"/>
+          <p:cNvPr id="74" name="Shape 72"/>
+          <p:cNvSpPr/>
+          <p:nvPr/>
+        </p:nvSpPr>
+        <p:spPr>
+          <a:xfrm>
+            <a:off x="10446453" y="6530802"/>
             <a:ext cx="185699" cy="0"/>
           </a:xfrm>
           <a:prstGeom prst="line">
@@ -4145,13 +4184,13 @@
       </p:sp>
       <p:sp>
         <p:nvSpPr>
-          <p:cNvPr id="74" name="Text 72"/>
+          <p:cNvPr id="75" name="Text 73"/>
           <p:cNvSpPr txBox="1"/>
           <p:nvPr/>
         </p:nvSpPr>
         <p:spPr>
           <a:xfrm>
-            <a:off x="10671944" y="6390178"/>
+            <a:off x="10671944" y="6439362"/>
             <a:ext cx="1280160" cy="182880"/>
           </a:xfrm>
           <a:prstGeom prst="rect">
@@ -4247,7 +4286,7 @@
                 <a:ea typeface="Calibri" pitchFamily="34" charset="-122"/>
                 <a:cs typeface="Calibri" pitchFamily="34" charset="-120"/>
               </a:rPr>
-              <a:t>Functional breakdown structure</a:t>
+              <a:t>Functional analysis</a:t>
             </a:r>
             <a:endParaRPr lang="en-US" sz="2600" dirty="0"/>
           </a:p>
@@ -4261,8 +4300,8 @@
         </p:nvSpPr>
         <p:spPr>
           <a:xfrm>
-            <a:off x="8503920" y="274320"/>
-            <a:ext cx="3227832" cy="365760"/>
+            <a:off x="457200" y="685800"/>
+            <a:ext cx="8229600" cy="274320"/>
           </a:xfrm>
           <a:prstGeom prst="rect">
             <a:avLst/>
@@ -4274,6 +4313,45 @@
           <a:bodyPr wrap="square" lIns="0" tIns="0" rIns="0" bIns="0" rtlCol="0" anchor="ctr"/>
           <a:lstStyle/>
           <a:p>
+            <a:pPr indent="0" marL="0">
+              <a:buNone/>
+            </a:pPr>
+            <a:r>
+              <a:rPr lang="en-US" sz="1400" dirty="0">
+                <a:solidFill>
+                  <a:srgbClr val="15202A"/>
+                </a:solidFill>
+                <a:latin typeface="Calibri" pitchFamily="34" charset="0"/>
+                <a:ea typeface="Calibri" pitchFamily="34" charset="-122"/>
+                <a:cs typeface="Calibri" pitchFamily="34" charset="-120"/>
+              </a:rPr>
+              <a:t>Functional breakdown structure</a:t>
+            </a:r>
+            <a:endParaRPr lang="en-US" sz="1400" dirty="0"/>
+          </a:p>
+        </p:txBody>
+      </p:sp>
+      <p:sp>
+        <p:nvSpPr>
+          <p:cNvPr id="4" name="Text 2"/>
+          <p:cNvSpPr txBox="1"/>
+          <p:nvPr/>
+        </p:nvSpPr>
+        <p:spPr>
+          <a:xfrm>
+            <a:off x="8503920" y="274320"/>
+            <a:ext cx="3227832" cy="365760"/>
+          </a:xfrm>
+          <a:prstGeom prst="rect">
+            <a:avLst/>
+          </a:prstGeom>
+          <a:noFill/>
+          <a:ln/>
+        </p:spPr>
+        <p:txBody>
+          <a:bodyPr wrap="square" lIns="0" tIns="0" rIns="0" bIns="0" rtlCol="0" anchor="ctr"/>
+          <a:lstStyle/>
+          <a:p>
             <a:pPr algn="r" indent="0" marL="0">
               <a:buNone/>
             </a:pPr>
@@ -4294,14 +4372,14 @@
       </p:sp>
       <p:sp>
         <p:nvSpPr>
-          <p:cNvPr id="4" name="Shape 2"/>
-          <p:cNvSpPr/>
-          <p:nvPr/>
-        </p:nvSpPr>
-        <p:spPr>
-          <a:xfrm>
-            <a:off x="6094476" y="1559770"/>
-            <a:ext cx="0" cy="331905"/>
+          <p:cNvPr id="5" name="Shape 3"/>
+          <p:cNvSpPr/>
+          <p:nvPr/>
+        </p:nvSpPr>
+        <p:spPr>
+          <a:xfrm>
+            <a:off x="6094476" y="1732070"/>
+            <a:ext cx="0" cy="326463"/>
           </a:xfrm>
           <a:prstGeom prst="line">
             <a:avLst/>
@@ -4309,7 +4387,7 @@
           <a:noFill/>
           <a:ln w="12700">
             <a:solidFill>
-              <a:srgbClr val="9AA6AD"/>
+              <a:srgbClr val="1F6FA3"/>
             </a:solidFill>
             <a:prstDash val="solid"/>
           </a:ln>
@@ -4317,13 +4395,13 @@
       </p:sp>
       <p:sp>
         <p:nvSpPr>
-          <p:cNvPr id="5" name="Shape 3"/>
+          <p:cNvPr id="6" name="Shape 4"/>
           <p:cNvSpPr/>
           <p:nvPr/>
         </p:nvSpPr>
         <p:spPr>
           <a:xfrm flipH="1">
-            <a:off x="1257710" y="1891674"/>
+            <a:off x="1257710" y="2058534"/>
             <a:ext cx="4836766" cy="0"/>
           </a:xfrm>
           <a:prstGeom prst="line">
@@ -4332,7 +4410,7 @@
           <a:noFill/>
           <a:ln w="12700">
             <a:solidFill>
-              <a:srgbClr val="9AA6AD"/>
+              <a:srgbClr val="1F6FA3"/>
             </a:solidFill>
             <a:prstDash val="solid"/>
           </a:ln>
@@ -4340,14 +4418,14 @@
       </p:sp>
       <p:sp>
         <p:nvSpPr>
-          <p:cNvPr id="6" name="Shape 4"/>
-          <p:cNvSpPr/>
-          <p:nvPr/>
-        </p:nvSpPr>
-        <p:spPr>
-          <a:xfrm>
-            <a:off x="1257710" y="1891674"/>
-            <a:ext cx="0" cy="258148"/>
+          <p:cNvPr id="7" name="Shape 5"/>
+          <p:cNvSpPr/>
+          <p:nvPr/>
+        </p:nvSpPr>
+        <p:spPr>
+          <a:xfrm>
+            <a:off x="1257710" y="2058534"/>
+            <a:ext cx="0" cy="253916"/>
           </a:xfrm>
           <a:prstGeom prst="line">
             <a:avLst/>
@@ -4355,7 +4433,7 @@
           <a:noFill/>
           <a:ln w="12700">
             <a:solidFill>
-              <a:srgbClr val="9AA6AD"/>
+              <a:srgbClr val="1F6FA3"/>
             </a:solidFill>
             <a:prstDash val="solid"/>
           </a:ln>
@@ -4363,14 +4441,14 @@
       </p:sp>
       <p:sp>
         <p:nvSpPr>
-          <p:cNvPr id="7" name="Shape 5"/>
-          <p:cNvSpPr/>
-          <p:nvPr/>
-        </p:nvSpPr>
-        <p:spPr>
-          <a:xfrm>
-            <a:off x="701566" y="2629240"/>
-            <a:ext cx="0" cy="460979"/>
+          <p:cNvPr id="8" name="Shape 6"/>
+          <p:cNvSpPr/>
+          <p:nvPr/>
+        </p:nvSpPr>
+        <p:spPr>
+          <a:xfrm>
+            <a:off x="701566" y="2784008"/>
+            <a:ext cx="0" cy="453421"/>
           </a:xfrm>
           <a:prstGeom prst="line">
             <a:avLst/>
@@ -4378,7 +4456,7 @@
           <a:noFill/>
           <a:ln w="12700">
             <a:solidFill>
-              <a:srgbClr val="9AA6AD"/>
+              <a:srgbClr val="1F6FA3"/>
             </a:solidFill>
             <a:prstDash val="solid"/>
           </a:ln>
@@ -4386,13 +4464,13 @@
       </p:sp>
       <p:sp>
         <p:nvSpPr>
-          <p:cNvPr id="8" name="Shape 6"/>
-          <p:cNvSpPr/>
-          <p:nvPr/>
-        </p:nvSpPr>
-        <p:spPr>
-          <a:xfrm>
-            <a:off x="701566" y="3090219"/>
+          <p:cNvPr id="9" name="Shape 7"/>
+          <p:cNvSpPr/>
+          <p:nvPr/>
+        </p:nvSpPr>
+        <p:spPr>
+          <a:xfrm>
+            <a:off x="701566" y="3237429"/>
             <a:ext cx="92691" cy="0"/>
           </a:xfrm>
           <a:prstGeom prst="line">
@@ -4401,7 +4479,7 @@
           <a:noFill/>
           <a:ln w="12700">
             <a:solidFill>
-              <a:srgbClr val="9AA6AD"/>
+              <a:srgbClr val="1F6FA3"/>
             </a:solidFill>
             <a:prstDash val="solid"/>
           </a:ln>
@@ -4409,14 +4487,14 @@
       </p:sp>
       <p:sp>
         <p:nvSpPr>
-          <p:cNvPr id="9" name="Shape 7"/>
-          <p:cNvSpPr/>
-          <p:nvPr/>
-        </p:nvSpPr>
-        <p:spPr>
-          <a:xfrm>
-            <a:off x="701566" y="2629240"/>
-            <a:ext cx="0" cy="958835"/>
+          <p:cNvPr id="10" name="Shape 8"/>
+          <p:cNvSpPr/>
+          <p:nvPr/>
+        </p:nvSpPr>
+        <p:spPr>
+          <a:xfrm>
+            <a:off x="701566" y="2784008"/>
+            <a:ext cx="0" cy="943117"/>
           </a:xfrm>
           <a:prstGeom prst="line">
             <a:avLst/>
@@ -4424,7 +4502,7 @@
           <a:noFill/>
           <a:ln w="12700">
             <a:solidFill>
-              <a:srgbClr val="9AA6AD"/>
+              <a:srgbClr val="1F6FA3"/>
             </a:solidFill>
             <a:prstDash val="solid"/>
           </a:ln>
@@ -4432,13 +4510,13 @@
       </p:sp>
       <p:sp>
         <p:nvSpPr>
-          <p:cNvPr id="10" name="Shape 8"/>
-          <p:cNvSpPr/>
-          <p:nvPr/>
-        </p:nvSpPr>
-        <p:spPr>
-          <a:xfrm>
-            <a:off x="701566" y="3588075"/>
+          <p:cNvPr id="11" name="Shape 9"/>
+          <p:cNvSpPr/>
+          <p:nvPr/>
+        </p:nvSpPr>
+        <p:spPr>
+          <a:xfrm>
+            <a:off x="701566" y="3727125"/>
             <a:ext cx="92691" cy="0"/>
           </a:xfrm>
           <a:prstGeom prst="line">
@@ -4447,7 +4525,7 @@
           <a:noFill/>
           <a:ln w="12700">
             <a:solidFill>
-              <a:srgbClr val="9AA6AD"/>
+              <a:srgbClr val="1F6FA3"/>
             </a:solidFill>
             <a:prstDash val="solid"/>
           </a:ln>
@@ -4455,14 +4533,14 @@
       </p:sp>
       <p:sp>
         <p:nvSpPr>
-          <p:cNvPr id="11" name="Shape 9"/>
-          <p:cNvSpPr/>
-          <p:nvPr/>
-        </p:nvSpPr>
-        <p:spPr>
-          <a:xfrm>
-            <a:off x="701566" y="2629240"/>
-            <a:ext cx="0" cy="1456692"/>
+          <p:cNvPr id="12" name="Shape 10"/>
+          <p:cNvSpPr/>
+          <p:nvPr/>
+        </p:nvSpPr>
+        <p:spPr>
+          <a:xfrm>
+            <a:off x="701566" y="2784008"/>
+            <a:ext cx="0" cy="1432812"/>
           </a:xfrm>
           <a:prstGeom prst="line">
             <a:avLst/>
@@ -4470,7 +4548,7 @@
           <a:noFill/>
           <a:ln w="12700">
             <a:solidFill>
-              <a:srgbClr val="9AA6AD"/>
+              <a:srgbClr val="1F6FA3"/>
             </a:solidFill>
             <a:prstDash val="solid"/>
           </a:ln>
@@ -4478,13 +4556,13 @@
       </p:sp>
       <p:sp>
         <p:nvSpPr>
-          <p:cNvPr id="12" name="Shape 10"/>
-          <p:cNvSpPr/>
-          <p:nvPr/>
-        </p:nvSpPr>
-        <p:spPr>
-          <a:xfrm>
-            <a:off x="701566" y="4085932"/>
+          <p:cNvPr id="13" name="Shape 11"/>
+          <p:cNvSpPr/>
+          <p:nvPr/>
+        </p:nvSpPr>
+        <p:spPr>
+          <a:xfrm>
+            <a:off x="701566" y="4216820"/>
             <a:ext cx="92691" cy="0"/>
           </a:xfrm>
           <a:prstGeom prst="line">
@@ -4493,7 +4571,7 @@
           <a:noFill/>
           <a:ln w="12700">
             <a:solidFill>
-              <a:srgbClr val="9AA6AD"/>
+              <a:srgbClr val="1F6FA3"/>
             </a:solidFill>
             <a:prstDash val="solid"/>
           </a:ln>
@@ -4501,14 +4579,14 @@
       </p:sp>
       <p:sp>
         <p:nvSpPr>
-          <p:cNvPr id="13" name="Shape 11"/>
-          <p:cNvSpPr/>
-          <p:nvPr/>
-        </p:nvSpPr>
-        <p:spPr>
-          <a:xfrm>
-            <a:off x="701566" y="2629240"/>
-            <a:ext cx="0" cy="1954549"/>
+          <p:cNvPr id="14" name="Shape 12"/>
+          <p:cNvSpPr/>
+          <p:nvPr/>
+        </p:nvSpPr>
+        <p:spPr>
+          <a:xfrm>
+            <a:off x="701566" y="2784008"/>
+            <a:ext cx="0" cy="1922507"/>
           </a:xfrm>
           <a:prstGeom prst="line">
             <a:avLst/>
@@ -4516,7 +4594,7 @@
           <a:noFill/>
           <a:ln w="12700">
             <a:solidFill>
-              <a:srgbClr val="9AA6AD"/>
+              <a:srgbClr val="1F6FA3"/>
             </a:solidFill>
             <a:prstDash val="solid"/>
           </a:ln>
@@ -4524,13 +4602,13 @@
       </p:sp>
       <p:sp>
         <p:nvSpPr>
-          <p:cNvPr id="14" name="Shape 12"/>
-          <p:cNvSpPr/>
-          <p:nvPr/>
-        </p:nvSpPr>
-        <p:spPr>
-          <a:xfrm>
-            <a:off x="701566" y="4583789"/>
+          <p:cNvPr id="15" name="Shape 13"/>
+          <p:cNvSpPr/>
+          <p:nvPr/>
+        </p:nvSpPr>
+        <p:spPr>
+          <a:xfrm>
+            <a:off x="701566" y="4706515"/>
             <a:ext cx="92691" cy="0"/>
           </a:xfrm>
           <a:prstGeom prst="line">
@@ -4539,7 +4617,7 @@
           <a:noFill/>
           <a:ln w="12700">
             <a:solidFill>
-              <a:srgbClr val="9AA6AD"/>
+              <a:srgbClr val="1F6FA3"/>
             </a:solidFill>
             <a:prstDash val="solid"/>
           </a:ln>
@@ -4547,14 +4625,14 @@
       </p:sp>
       <p:sp>
         <p:nvSpPr>
-          <p:cNvPr id="15" name="Shape 13"/>
-          <p:cNvSpPr/>
-          <p:nvPr/>
-        </p:nvSpPr>
-        <p:spPr>
-          <a:xfrm>
-            <a:off x="6094476" y="1559770"/>
-            <a:ext cx="0" cy="331905"/>
+          <p:cNvPr id="16" name="Shape 14"/>
+          <p:cNvSpPr/>
+          <p:nvPr/>
+        </p:nvSpPr>
+        <p:spPr>
+          <a:xfrm>
+            <a:off x="6094476" y="1732070"/>
+            <a:ext cx="0" cy="326463"/>
           </a:xfrm>
           <a:prstGeom prst="line">
             <a:avLst/>
@@ -4562,7 +4640,7 @@
           <a:noFill/>
           <a:ln w="12700">
             <a:solidFill>
-              <a:srgbClr val="9AA6AD"/>
+              <a:srgbClr val="1F6FA3"/>
             </a:solidFill>
             <a:prstDash val="solid"/>
           </a:ln>
@@ -4570,13 +4648,13 @@
       </p:sp>
       <p:sp>
         <p:nvSpPr>
-          <p:cNvPr id="16" name="Shape 14"/>
+          <p:cNvPr id="17" name="Shape 15"/>
           <p:cNvSpPr/>
           <p:nvPr/>
         </p:nvSpPr>
         <p:spPr>
           <a:xfrm flipH="1">
-            <a:off x="2639643" y="1891674"/>
+            <a:off x="2639643" y="2058534"/>
             <a:ext cx="3454833" cy="0"/>
           </a:xfrm>
           <a:prstGeom prst="line">
@@ -4585,7 +4663,7 @@
           <a:noFill/>
           <a:ln w="12700">
             <a:solidFill>
-              <a:srgbClr val="9AA6AD"/>
+              <a:srgbClr val="1F6FA3"/>
             </a:solidFill>
             <a:prstDash val="solid"/>
           </a:ln>
@@ -4593,14 +4671,14 @@
       </p:sp>
       <p:sp>
         <p:nvSpPr>
-          <p:cNvPr id="17" name="Shape 15"/>
-          <p:cNvSpPr/>
-          <p:nvPr/>
-        </p:nvSpPr>
-        <p:spPr>
-          <a:xfrm>
-            <a:off x="2639643" y="1891674"/>
-            <a:ext cx="0" cy="258148"/>
+          <p:cNvPr id="18" name="Shape 16"/>
+          <p:cNvSpPr/>
+          <p:nvPr/>
+        </p:nvSpPr>
+        <p:spPr>
+          <a:xfrm>
+            <a:off x="2639643" y="2058534"/>
+            <a:ext cx="0" cy="253916"/>
           </a:xfrm>
           <a:prstGeom prst="line">
             <a:avLst/>
@@ -4608,7 +4686,7 @@
           <a:noFill/>
           <a:ln w="12700">
             <a:solidFill>
-              <a:srgbClr val="9AA6AD"/>
+              <a:srgbClr val="1F6FA3"/>
             </a:solidFill>
             <a:prstDash val="solid"/>
           </a:ln>
@@ -4616,14 +4694,14 @@
       </p:sp>
       <p:sp>
         <p:nvSpPr>
-          <p:cNvPr id="18" name="Shape 16"/>
-          <p:cNvSpPr/>
-          <p:nvPr/>
-        </p:nvSpPr>
-        <p:spPr>
-          <a:xfrm>
-            <a:off x="2083499" y="2629240"/>
-            <a:ext cx="0" cy="460979"/>
+          <p:cNvPr id="19" name="Shape 17"/>
+          <p:cNvSpPr/>
+          <p:nvPr/>
+        </p:nvSpPr>
+        <p:spPr>
+          <a:xfrm>
+            <a:off x="2083499" y="2784008"/>
+            <a:ext cx="0" cy="453421"/>
           </a:xfrm>
           <a:prstGeom prst="line">
             <a:avLst/>
@@ -4631,7 +4709,7 @@
           <a:noFill/>
           <a:ln w="12700">
             <a:solidFill>
-              <a:srgbClr val="9AA6AD"/>
+              <a:srgbClr val="1F6FA3"/>
             </a:solidFill>
             <a:prstDash val="solid"/>
           </a:ln>
@@ -4639,13 +4717,13 @@
       </p:sp>
       <p:sp>
         <p:nvSpPr>
-          <p:cNvPr id="19" name="Shape 17"/>
-          <p:cNvSpPr/>
-          <p:nvPr/>
-        </p:nvSpPr>
-        <p:spPr>
-          <a:xfrm>
-            <a:off x="2083499" y="3090219"/>
+          <p:cNvPr id="20" name="Shape 18"/>
+          <p:cNvSpPr/>
+          <p:nvPr/>
+        </p:nvSpPr>
+        <p:spPr>
+          <a:xfrm>
+            <a:off x="2083499" y="3237429"/>
             <a:ext cx="92691" cy="0"/>
           </a:xfrm>
           <a:prstGeom prst="line">
@@ -4654,7 +4732,7 @@
           <a:noFill/>
           <a:ln w="12700">
             <a:solidFill>
-              <a:srgbClr val="9AA6AD"/>
+              <a:srgbClr val="1F6FA3"/>
             </a:solidFill>
             <a:prstDash val="solid"/>
           </a:ln>
@@ -4662,14 +4740,14 @@
       </p:sp>
       <p:sp>
         <p:nvSpPr>
-          <p:cNvPr id="20" name="Shape 18"/>
-          <p:cNvSpPr/>
-          <p:nvPr/>
-        </p:nvSpPr>
-        <p:spPr>
-          <a:xfrm>
-            <a:off x="2083499" y="2629240"/>
-            <a:ext cx="0" cy="958835"/>
+          <p:cNvPr id="21" name="Shape 19"/>
+          <p:cNvSpPr/>
+          <p:nvPr/>
+        </p:nvSpPr>
+        <p:spPr>
+          <a:xfrm>
+            <a:off x="2083499" y="2784008"/>
+            <a:ext cx="0" cy="943117"/>
           </a:xfrm>
           <a:prstGeom prst="line">
             <a:avLst/>
@@ -4677,7 +4755,7 @@
           <a:noFill/>
           <a:ln w="12700">
             <a:solidFill>
-              <a:srgbClr val="9AA6AD"/>
+              <a:srgbClr val="1F6FA3"/>
             </a:solidFill>
             <a:prstDash val="solid"/>
           </a:ln>
@@ -4685,13 +4763,13 @@
       </p:sp>
       <p:sp>
         <p:nvSpPr>
-          <p:cNvPr id="21" name="Shape 19"/>
-          <p:cNvSpPr/>
-          <p:nvPr/>
-        </p:nvSpPr>
-        <p:spPr>
-          <a:xfrm>
-            <a:off x="2083499" y="3588075"/>
+          <p:cNvPr id="22" name="Shape 20"/>
+          <p:cNvSpPr/>
+          <p:nvPr/>
+        </p:nvSpPr>
+        <p:spPr>
+          <a:xfrm>
+            <a:off x="2083499" y="3727125"/>
             <a:ext cx="92691" cy="0"/>
           </a:xfrm>
           <a:prstGeom prst="line">
@@ -4700,7 +4778,7 @@
           <a:noFill/>
           <a:ln w="12700">
             <a:solidFill>
-              <a:srgbClr val="9AA6AD"/>
+              <a:srgbClr val="1F6FA3"/>
             </a:solidFill>
             <a:prstDash val="solid"/>
           </a:ln>
@@ -4708,14 +4786,14 @@
       </p:sp>
       <p:sp>
         <p:nvSpPr>
-          <p:cNvPr id="22" name="Shape 20"/>
-          <p:cNvSpPr/>
-          <p:nvPr/>
-        </p:nvSpPr>
-        <p:spPr>
-          <a:xfrm>
-            <a:off x="2083499" y="2629240"/>
-            <a:ext cx="0" cy="1456692"/>
+          <p:cNvPr id="23" name="Shape 21"/>
+          <p:cNvSpPr/>
+          <p:nvPr/>
+        </p:nvSpPr>
+        <p:spPr>
+          <a:xfrm>
+            <a:off x="2083499" y="2784008"/>
+            <a:ext cx="0" cy="1432812"/>
           </a:xfrm>
           <a:prstGeom prst="line">
             <a:avLst/>
@@ -4723,7 +4801,7 @@
           <a:noFill/>
           <a:ln w="12700">
             <a:solidFill>
-              <a:srgbClr val="9AA6AD"/>
+              <a:srgbClr val="1F6FA3"/>
             </a:solidFill>
             <a:prstDash val="solid"/>
           </a:ln>
@@ -4731,13 +4809,13 @@
       </p:sp>
       <p:sp>
         <p:nvSpPr>
-          <p:cNvPr id="23" name="Shape 21"/>
-          <p:cNvSpPr/>
-          <p:nvPr/>
-        </p:nvSpPr>
-        <p:spPr>
-          <a:xfrm>
-            <a:off x="2083499" y="4085932"/>
+          <p:cNvPr id="24" name="Shape 22"/>
+          <p:cNvSpPr/>
+          <p:nvPr/>
+        </p:nvSpPr>
+        <p:spPr>
+          <a:xfrm>
+            <a:off x="2083499" y="4216820"/>
             <a:ext cx="92691" cy="0"/>
           </a:xfrm>
           <a:prstGeom prst="line">
@@ -4746,7 +4824,7 @@
           <a:noFill/>
           <a:ln w="12700">
             <a:solidFill>
-              <a:srgbClr val="9AA6AD"/>
+              <a:srgbClr val="1F6FA3"/>
             </a:solidFill>
             <a:prstDash val="solid"/>
           </a:ln>
@@ -4754,14 +4832,14 @@
       </p:sp>
       <p:sp>
         <p:nvSpPr>
-          <p:cNvPr id="24" name="Shape 22"/>
-          <p:cNvSpPr/>
-          <p:nvPr/>
-        </p:nvSpPr>
-        <p:spPr>
-          <a:xfrm>
-            <a:off x="2083499" y="2629240"/>
-            <a:ext cx="0" cy="1954549"/>
+          <p:cNvPr id="25" name="Shape 23"/>
+          <p:cNvSpPr/>
+          <p:nvPr/>
+        </p:nvSpPr>
+        <p:spPr>
+          <a:xfrm>
+            <a:off x="2083499" y="2784008"/>
+            <a:ext cx="0" cy="1922507"/>
           </a:xfrm>
           <a:prstGeom prst="line">
             <a:avLst/>
@@ -4769,7 +4847,7 @@
           <a:noFill/>
           <a:ln w="12700">
             <a:solidFill>
-              <a:srgbClr val="9AA6AD"/>
+              <a:srgbClr val="1F6FA3"/>
             </a:solidFill>
             <a:prstDash val="solid"/>
           </a:ln>
@@ -4777,13 +4855,13 @@
       </p:sp>
       <p:sp>
         <p:nvSpPr>
-          <p:cNvPr id="25" name="Shape 23"/>
-          <p:cNvSpPr/>
-          <p:nvPr/>
-        </p:nvSpPr>
-        <p:spPr>
-          <a:xfrm>
-            <a:off x="2083499" y="4583789"/>
+          <p:cNvPr id="26" name="Shape 24"/>
+          <p:cNvSpPr/>
+          <p:nvPr/>
+        </p:nvSpPr>
+        <p:spPr>
+          <a:xfrm>
+            <a:off x="2083499" y="4706515"/>
             <a:ext cx="92691" cy="0"/>
           </a:xfrm>
           <a:prstGeom prst="line">
@@ -4792,7 +4870,7 @@
           <a:noFill/>
           <a:ln w="12700">
             <a:solidFill>
-              <a:srgbClr val="9AA6AD"/>
+              <a:srgbClr val="1F6FA3"/>
             </a:solidFill>
             <a:prstDash val="solid"/>
           </a:ln>
@@ -4800,14 +4878,14 @@
       </p:sp>
       <p:sp>
         <p:nvSpPr>
-          <p:cNvPr id="26" name="Shape 24"/>
-          <p:cNvSpPr/>
-          <p:nvPr/>
-        </p:nvSpPr>
-        <p:spPr>
-          <a:xfrm>
-            <a:off x="2083499" y="2629240"/>
-            <a:ext cx="0" cy="2452406"/>
+          <p:cNvPr id="27" name="Shape 25"/>
+          <p:cNvSpPr/>
+          <p:nvPr/>
+        </p:nvSpPr>
+        <p:spPr>
+          <a:xfrm>
+            <a:off x="2083499" y="2784008"/>
+            <a:ext cx="0" cy="2412202"/>
           </a:xfrm>
           <a:prstGeom prst="line">
             <a:avLst/>
@@ -4815,7 +4893,7 @@
           <a:noFill/>
           <a:ln w="12700">
             <a:solidFill>
-              <a:srgbClr val="9AA6AD"/>
+              <a:srgbClr val="1F6FA3"/>
             </a:solidFill>
             <a:prstDash val="solid"/>
           </a:ln>
@@ -4823,13 +4901,13 @@
       </p:sp>
       <p:sp>
         <p:nvSpPr>
-          <p:cNvPr id="27" name="Shape 25"/>
-          <p:cNvSpPr/>
-          <p:nvPr/>
-        </p:nvSpPr>
-        <p:spPr>
-          <a:xfrm>
-            <a:off x="2083499" y="5081646"/>
+          <p:cNvPr id="28" name="Shape 26"/>
+          <p:cNvSpPr/>
+          <p:nvPr/>
+        </p:nvSpPr>
+        <p:spPr>
+          <a:xfrm>
+            <a:off x="2083499" y="5196210"/>
             <a:ext cx="92691" cy="0"/>
           </a:xfrm>
           <a:prstGeom prst="line">
@@ -4838,7 +4916,7 @@
           <a:noFill/>
           <a:ln w="12700">
             <a:solidFill>
-              <a:srgbClr val="9AA6AD"/>
+              <a:srgbClr val="1F6FA3"/>
             </a:solidFill>
             <a:prstDash val="solid"/>
           </a:ln>
@@ -4846,14 +4924,14 @@
       </p:sp>
       <p:sp>
         <p:nvSpPr>
-          <p:cNvPr id="28" name="Shape 26"/>
-          <p:cNvSpPr/>
-          <p:nvPr/>
-        </p:nvSpPr>
-        <p:spPr>
-          <a:xfrm>
-            <a:off x="2083499" y="2629240"/>
-            <a:ext cx="0" cy="2950262"/>
+          <p:cNvPr id="29" name="Shape 27"/>
+          <p:cNvSpPr/>
+          <p:nvPr/>
+        </p:nvSpPr>
+        <p:spPr>
+          <a:xfrm>
+            <a:off x="2083499" y="2784008"/>
+            <a:ext cx="0" cy="2901898"/>
           </a:xfrm>
           <a:prstGeom prst="line">
             <a:avLst/>
@@ -4861,7 +4939,7 @@
           <a:noFill/>
           <a:ln w="12700">
             <a:solidFill>
-              <a:srgbClr val="9AA6AD"/>
+              <a:srgbClr val="1F6FA3"/>
             </a:solidFill>
             <a:prstDash val="solid"/>
           </a:ln>
@@ -4869,13 +4947,13 @@
       </p:sp>
       <p:sp>
         <p:nvSpPr>
-          <p:cNvPr id="29" name="Shape 27"/>
-          <p:cNvSpPr/>
-          <p:nvPr/>
-        </p:nvSpPr>
-        <p:spPr>
-          <a:xfrm>
-            <a:off x="2083499" y="5579503"/>
+          <p:cNvPr id="30" name="Shape 28"/>
+          <p:cNvSpPr/>
+          <p:nvPr/>
+        </p:nvSpPr>
+        <p:spPr>
+          <a:xfrm>
+            <a:off x="2083499" y="5685905"/>
             <a:ext cx="92691" cy="0"/>
           </a:xfrm>
           <a:prstGeom prst="line">
@@ -4884,7 +4962,7 @@
           <a:noFill/>
           <a:ln w="12700">
             <a:solidFill>
-              <a:srgbClr val="9AA6AD"/>
+              <a:srgbClr val="1F6FA3"/>
             </a:solidFill>
             <a:prstDash val="solid"/>
           </a:ln>
@@ -4892,14 +4970,14 @@
       </p:sp>
       <p:sp>
         <p:nvSpPr>
-          <p:cNvPr id="30" name="Shape 28"/>
-          <p:cNvSpPr/>
-          <p:nvPr/>
-        </p:nvSpPr>
-        <p:spPr>
-          <a:xfrm>
-            <a:off x="2083499" y="2629240"/>
-            <a:ext cx="0" cy="3448119"/>
+          <p:cNvPr id="31" name="Shape 29"/>
+          <p:cNvSpPr/>
+          <p:nvPr/>
+        </p:nvSpPr>
+        <p:spPr>
+          <a:xfrm>
+            <a:off x="2083499" y="2784008"/>
+            <a:ext cx="0" cy="3391593"/>
           </a:xfrm>
           <a:prstGeom prst="line">
             <a:avLst/>
@@ -4907,7 +4985,7 @@
           <a:noFill/>
           <a:ln w="12700">
             <a:solidFill>
-              <a:srgbClr val="9AA6AD"/>
+              <a:srgbClr val="1F6FA3"/>
             </a:solidFill>
             <a:prstDash val="solid"/>
           </a:ln>
@@ -4915,13 +4993,13 @@
       </p:sp>
       <p:sp>
         <p:nvSpPr>
-          <p:cNvPr id="31" name="Shape 29"/>
-          <p:cNvSpPr/>
-          <p:nvPr/>
-        </p:nvSpPr>
-        <p:spPr>
-          <a:xfrm>
-            <a:off x="2083499" y="6077359"/>
+          <p:cNvPr id="32" name="Shape 30"/>
+          <p:cNvSpPr/>
+          <p:nvPr/>
+        </p:nvSpPr>
+        <p:spPr>
+          <a:xfrm>
+            <a:off x="2083499" y="6175601"/>
             <a:ext cx="92691" cy="0"/>
           </a:xfrm>
           <a:prstGeom prst="line">
@@ -4930,7 +5008,7 @@
           <a:noFill/>
           <a:ln w="12700">
             <a:solidFill>
-              <a:srgbClr val="9AA6AD"/>
+              <a:srgbClr val="1F6FA3"/>
             </a:solidFill>
             <a:prstDash val="solid"/>
           </a:ln>
@@ -4938,14 +5016,14 @@
       </p:sp>
       <p:sp>
         <p:nvSpPr>
-          <p:cNvPr id="32" name="Shape 30"/>
-          <p:cNvSpPr/>
-          <p:nvPr/>
-        </p:nvSpPr>
-        <p:spPr>
-          <a:xfrm>
-            <a:off x="6094476" y="1559770"/>
-            <a:ext cx="0" cy="331905"/>
+          <p:cNvPr id="33" name="Shape 31"/>
+          <p:cNvSpPr/>
+          <p:nvPr/>
+        </p:nvSpPr>
+        <p:spPr>
+          <a:xfrm>
+            <a:off x="6094476" y="1732070"/>
+            <a:ext cx="0" cy="326463"/>
           </a:xfrm>
           <a:prstGeom prst="line">
             <a:avLst/>
@@ -4953,7 +5031,7 @@
           <a:noFill/>
           <a:ln w="12700">
             <a:solidFill>
-              <a:srgbClr val="9AA6AD"/>
+              <a:srgbClr val="1F6FA3"/>
             </a:solidFill>
             <a:prstDash val="solid"/>
           </a:ln>
@@ -4961,13 +5039,13 @@
       </p:sp>
       <p:sp>
         <p:nvSpPr>
-          <p:cNvPr id="33" name="Shape 31"/>
+          <p:cNvPr id="34" name="Shape 32"/>
           <p:cNvSpPr/>
           <p:nvPr/>
         </p:nvSpPr>
         <p:spPr>
           <a:xfrm flipH="1">
-            <a:off x="4021576" y="1891674"/>
+            <a:off x="4021576" y="2058534"/>
             <a:ext cx="2072900" cy="0"/>
           </a:xfrm>
           <a:prstGeom prst="line">
@@ -4976,7 +5054,7 @@
           <a:noFill/>
           <a:ln w="12700">
             <a:solidFill>
-              <a:srgbClr val="9AA6AD"/>
+              <a:srgbClr val="1F6FA3"/>
             </a:solidFill>
             <a:prstDash val="solid"/>
           </a:ln>
@@ -4984,14 +5062,14 @@
       </p:sp>
       <p:sp>
         <p:nvSpPr>
-          <p:cNvPr id="34" name="Shape 32"/>
-          <p:cNvSpPr/>
-          <p:nvPr/>
-        </p:nvSpPr>
-        <p:spPr>
-          <a:xfrm>
-            <a:off x="4021576" y="1891674"/>
-            <a:ext cx="0" cy="258148"/>
+          <p:cNvPr id="35" name="Shape 33"/>
+          <p:cNvSpPr/>
+          <p:nvPr/>
+        </p:nvSpPr>
+        <p:spPr>
+          <a:xfrm>
+            <a:off x="4021576" y="2058534"/>
+            <a:ext cx="0" cy="253916"/>
           </a:xfrm>
           <a:prstGeom prst="line">
             <a:avLst/>
@@ -4999,7 +5077,7 @@
           <a:noFill/>
           <a:ln w="12700">
             <a:solidFill>
-              <a:srgbClr val="9AA6AD"/>
+              <a:srgbClr val="1F6FA3"/>
             </a:solidFill>
             <a:prstDash val="solid"/>
           </a:ln>
@@ -5007,14 +5085,14 @@
       </p:sp>
       <p:sp>
         <p:nvSpPr>
-          <p:cNvPr id="35" name="Shape 33"/>
-          <p:cNvSpPr/>
-          <p:nvPr/>
-        </p:nvSpPr>
-        <p:spPr>
-          <a:xfrm>
-            <a:off x="3465432" y="2629240"/>
-            <a:ext cx="0" cy="460979"/>
+          <p:cNvPr id="36" name="Shape 34"/>
+          <p:cNvSpPr/>
+          <p:nvPr/>
+        </p:nvSpPr>
+        <p:spPr>
+          <a:xfrm>
+            <a:off x="3465432" y="2784008"/>
+            <a:ext cx="0" cy="453421"/>
           </a:xfrm>
           <a:prstGeom prst="line">
             <a:avLst/>
@@ -5022,7 +5100,7 @@
           <a:noFill/>
           <a:ln w="12700">
             <a:solidFill>
-              <a:srgbClr val="9AA6AD"/>
+              <a:srgbClr val="1F6FA3"/>
             </a:solidFill>
             <a:prstDash val="solid"/>
           </a:ln>
@@ -5030,13 +5108,13 @@
       </p:sp>
       <p:sp>
         <p:nvSpPr>
-          <p:cNvPr id="36" name="Shape 34"/>
-          <p:cNvSpPr/>
-          <p:nvPr/>
-        </p:nvSpPr>
-        <p:spPr>
-          <a:xfrm>
-            <a:off x="3465432" y="3090219"/>
+          <p:cNvPr id="37" name="Shape 35"/>
+          <p:cNvSpPr/>
+          <p:nvPr/>
+        </p:nvSpPr>
+        <p:spPr>
+          <a:xfrm>
+            <a:off x="3465432" y="3237429"/>
             <a:ext cx="92691" cy="0"/>
           </a:xfrm>
           <a:prstGeom prst="line">
@@ -5045,7 +5123,7 @@
           <a:noFill/>
           <a:ln w="12700">
             <a:solidFill>
-              <a:srgbClr val="9AA6AD"/>
+              <a:srgbClr val="1F6FA3"/>
             </a:solidFill>
             <a:prstDash val="solid"/>
           </a:ln>
@@ -5053,14 +5131,14 @@
       </p:sp>
       <p:sp>
         <p:nvSpPr>
-          <p:cNvPr id="37" name="Shape 35"/>
-          <p:cNvSpPr/>
-          <p:nvPr/>
-        </p:nvSpPr>
-        <p:spPr>
-          <a:xfrm>
-            <a:off x="3465432" y="2629240"/>
-            <a:ext cx="0" cy="958835"/>
+          <p:cNvPr id="38" name="Shape 36"/>
+          <p:cNvSpPr/>
+          <p:nvPr/>
+        </p:nvSpPr>
+        <p:spPr>
+          <a:xfrm>
+            <a:off x="3465432" y="2784008"/>
+            <a:ext cx="0" cy="943117"/>
           </a:xfrm>
           <a:prstGeom prst="line">
             <a:avLst/>
@@ -5068,7 +5146,7 @@
           <a:noFill/>
           <a:ln w="12700">
             <a:solidFill>
-              <a:srgbClr val="9AA6AD"/>
+              <a:srgbClr val="1F6FA3"/>
             </a:solidFill>
             <a:prstDash val="solid"/>
           </a:ln>
@@ -5076,13 +5154,13 @@
       </p:sp>
       <p:sp>
         <p:nvSpPr>
-          <p:cNvPr id="38" name="Shape 36"/>
-          <p:cNvSpPr/>
-          <p:nvPr/>
-        </p:nvSpPr>
-        <p:spPr>
-          <a:xfrm>
-            <a:off x="3465432" y="3588075"/>
+          <p:cNvPr id="39" name="Shape 37"/>
+          <p:cNvSpPr/>
+          <p:nvPr/>
+        </p:nvSpPr>
+        <p:spPr>
+          <a:xfrm>
+            <a:off x="3465432" y="3727125"/>
             <a:ext cx="92691" cy="0"/>
           </a:xfrm>
           <a:prstGeom prst="line">
@@ -5091,7 +5169,7 @@
           <a:noFill/>
           <a:ln w="12700">
             <a:solidFill>
-              <a:srgbClr val="9AA6AD"/>
+              <a:srgbClr val="1F6FA3"/>
             </a:solidFill>
             <a:prstDash val="solid"/>
           </a:ln>
@@ -5099,14 +5177,14 @@
       </p:sp>
       <p:sp>
         <p:nvSpPr>
-          <p:cNvPr id="39" name="Shape 37"/>
-          <p:cNvSpPr/>
-          <p:nvPr/>
-        </p:nvSpPr>
-        <p:spPr>
-          <a:xfrm>
-            <a:off x="3465432" y="2629240"/>
-            <a:ext cx="0" cy="1456692"/>
+          <p:cNvPr id="40" name="Shape 38"/>
+          <p:cNvSpPr/>
+          <p:nvPr/>
+        </p:nvSpPr>
+        <p:spPr>
+          <a:xfrm>
+            <a:off x="3465432" y="2784008"/>
+            <a:ext cx="0" cy="1432812"/>
           </a:xfrm>
           <a:prstGeom prst="line">
             <a:avLst/>
@@ -5114,7 +5192,7 @@
           <a:noFill/>
           <a:ln w="12700">
             <a:solidFill>
-              <a:srgbClr val="9AA6AD"/>
+              <a:srgbClr val="1F6FA3"/>
             </a:solidFill>
             <a:prstDash val="solid"/>
           </a:ln>
@@ -5122,13 +5200,13 @@
       </p:sp>
       <p:sp>
         <p:nvSpPr>
-          <p:cNvPr id="40" name="Shape 38"/>
-          <p:cNvSpPr/>
-          <p:nvPr/>
-        </p:nvSpPr>
-        <p:spPr>
-          <a:xfrm>
-            <a:off x="3465432" y="4085932"/>
+          <p:cNvPr id="41" name="Shape 39"/>
+          <p:cNvSpPr/>
+          <p:nvPr/>
+        </p:nvSpPr>
+        <p:spPr>
+          <a:xfrm>
+            <a:off x="3465432" y="4216820"/>
             <a:ext cx="92691" cy="0"/>
           </a:xfrm>
           <a:prstGeom prst="line">
@@ -5137,7 +5215,7 @@
           <a:noFill/>
           <a:ln w="12700">
             <a:solidFill>
-              <a:srgbClr val="9AA6AD"/>
+              <a:srgbClr val="1F6FA3"/>
             </a:solidFill>
             <a:prstDash val="solid"/>
           </a:ln>
@@ -5145,14 +5223,14 @@
       </p:sp>
       <p:sp>
         <p:nvSpPr>
-          <p:cNvPr id="41" name="Shape 39"/>
-          <p:cNvSpPr/>
-          <p:nvPr/>
-        </p:nvSpPr>
-        <p:spPr>
-          <a:xfrm>
-            <a:off x="3465432" y="2629240"/>
-            <a:ext cx="0" cy="1954549"/>
+          <p:cNvPr id="42" name="Shape 40"/>
+          <p:cNvSpPr/>
+          <p:nvPr/>
+        </p:nvSpPr>
+        <p:spPr>
+          <a:xfrm>
+            <a:off x="3465432" y="2784008"/>
+            <a:ext cx="0" cy="1922507"/>
           </a:xfrm>
           <a:prstGeom prst="line">
             <a:avLst/>
@@ -5160,7 +5238,7 @@
           <a:noFill/>
           <a:ln w="12700">
             <a:solidFill>
-              <a:srgbClr val="9AA6AD"/>
+              <a:srgbClr val="1F6FA3"/>
             </a:solidFill>
             <a:prstDash val="solid"/>
           </a:ln>
@@ -5168,13 +5246,13 @@
       </p:sp>
       <p:sp>
         <p:nvSpPr>
-          <p:cNvPr id="42" name="Shape 40"/>
-          <p:cNvSpPr/>
-          <p:nvPr/>
-        </p:nvSpPr>
-        <p:spPr>
-          <a:xfrm>
-            <a:off x="3465432" y="4583789"/>
+          <p:cNvPr id="43" name="Shape 41"/>
+          <p:cNvSpPr/>
+          <p:nvPr/>
+        </p:nvSpPr>
+        <p:spPr>
+          <a:xfrm>
+            <a:off x="3465432" y="4706515"/>
             <a:ext cx="92691" cy="0"/>
           </a:xfrm>
           <a:prstGeom prst="line">
@@ -5183,7 +5261,7 @@
           <a:noFill/>
           <a:ln w="12700">
             <a:solidFill>
-              <a:srgbClr val="9AA6AD"/>
+              <a:srgbClr val="1F6FA3"/>
             </a:solidFill>
             <a:prstDash val="solid"/>
           </a:ln>
@@ -5191,14 +5269,14 @@
       </p:sp>
       <p:sp>
         <p:nvSpPr>
-          <p:cNvPr id="43" name="Shape 41"/>
-          <p:cNvSpPr/>
-          <p:nvPr/>
-        </p:nvSpPr>
-        <p:spPr>
-          <a:xfrm>
-            <a:off x="3465432" y="2629240"/>
-            <a:ext cx="0" cy="2452406"/>
+          <p:cNvPr id="44" name="Shape 42"/>
+          <p:cNvSpPr/>
+          <p:nvPr/>
+        </p:nvSpPr>
+        <p:spPr>
+          <a:xfrm>
+            <a:off x="3465432" y="2784008"/>
+            <a:ext cx="0" cy="2412202"/>
           </a:xfrm>
           <a:prstGeom prst="line">
             <a:avLst/>
@@ -5206,7 +5284,7 @@
           <a:noFill/>
           <a:ln w="12700">
             <a:solidFill>
-              <a:srgbClr val="9AA6AD"/>
+              <a:srgbClr val="1F6FA3"/>
             </a:solidFill>
             <a:prstDash val="solid"/>
           </a:ln>
@@ -5214,13 +5292,13 @@
       </p:sp>
       <p:sp>
         <p:nvSpPr>
-          <p:cNvPr id="44" name="Shape 42"/>
-          <p:cNvSpPr/>
-          <p:nvPr/>
-        </p:nvSpPr>
-        <p:spPr>
-          <a:xfrm>
-            <a:off x="3465432" y="5081646"/>
+          <p:cNvPr id="45" name="Shape 43"/>
+          <p:cNvSpPr/>
+          <p:nvPr/>
+        </p:nvSpPr>
+        <p:spPr>
+          <a:xfrm>
+            <a:off x="3465432" y="5196210"/>
             <a:ext cx="92691" cy="0"/>
           </a:xfrm>
           <a:prstGeom prst="line">
@@ -5229,7 +5307,7 @@
           <a:noFill/>
           <a:ln w="12700">
             <a:solidFill>
-              <a:srgbClr val="9AA6AD"/>
+              <a:srgbClr val="1F6FA3"/>
             </a:solidFill>
             <a:prstDash val="solid"/>
           </a:ln>
@@ -5237,14 +5315,14 @@
       </p:sp>
       <p:sp>
         <p:nvSpPr>
-          <p:cNvPr id="45" name="Shape 43"/>
-          <p:cNvSpPr/>
-          <p:nvPr/>
-        </p:nvSpPr>
-        <p:spPr>
-          <a:xfrm>
-            <a:off x="3465432" y="2629240"/>
-            <a:ext cx="0" cy="2950262"/>
+          <p:cNvPr id="46" name="Shape 44"/>
+          <p:cNvSpPr/>
+          <p:nvPr/>
+        </p:nvSpPr>
+        <p:spPr>
+          <a:xfrm>
+            <a:off x="3465432" y="2784008"/>
+            <a:ext cx="0" cy="2901898"/>
           </a:xfrm>
           <a:prstGeom prst="line">
             <a:avLst/>
@@ -5252,7 +5330,7 @@
           <a:noFill/>
           <a:ln w="12700">
             <a:solidFill>
-              <a:srgbClr val="9AA6AD"/>
+              <a:srgbClr val="1F6FA3"/>
             </a:solidFill>
             <a:prstDash val="solid"/>
           </a:ln>
@@ -5260,13 +5338,13 @@
       </p:sp>
       <p:sp>
         <p:nvSpPr>
-          <p:cNvPr id="46" name="Shape 44"/>
-          <p:cNvSpPr/>
-          <p:nvPr/>
-        </p:nvSpPr>
-        <p:spPr>
-          <a:xfrm>
-            <a:off x="3465432" y="5579503"/>
+          <p:cNvPr id="47" name="Shape 45"/>
+          <p:cNvSpPr/>
+          <p:nvPr/>
+        </p:nvSpPr>
+        <p:spPr>
+          <a:xfrm>
+            <a:off x="3465432" y="5685905"/>
             <a:ext cx="92691" cy="0"/>
           </a:xfrm>
           <a:prstGeom prst="line">
@@ -5275,7 +5353,7 @@
           <a:noFill/>
           <a:ln w="12700">
             <a:solidFill>
-              <a:srgbClr val="9AA6AD"/>
+              <a:srgbClr val="1F6FA3"/>
             </a:solidFill>
             <a:prstDash val="solid"/>
           </a:ln>
@@ -5283,14 +5361,14 @@
       </p:sp>
       <p:sp>
         <p:nvSpPr>
-          <p:cNvPr id="47" name="Shape 45"/>
-          <p:cNvSpPr/>
-          <p:nvPr/>
-        </p:nvSpPr>
-        <p:spPr>
-          <a:xfrm>
-            <a:off x="6094476" y="1559770"/>
-            <a:ext cx="0" cy="331905"/>
+          <p:cNvPr id="48" name="Shape 46"/>
+          <p:cNvSpPr/>
+          <p:nvPr/>
+        </p:nvSpPr>
+        <p:spPr>
+          <a:xfrm>
+            <a:off x="6094476" y="1732070"/>
+            <a:ext cx="0" cy="326463"/>
           </a:xfrm>
           <a:prstGeom prst="line">
             <a:avLst/>
@@ -5298,7 +5376,7 @@
           <a:noFill/>
           <a:ln w="12700">
             <a:solidFill>
-              <a:srgbClr val="9AA6AD"/>
+              <a:srgbClr val="1F6FA3"/>
             </a:solidFill>
             <a:prstDash val="solid"/>
           </a:ln>
@@ -5306,13 +5384,13 @@
       </p:sp>
       <p:sp>
         <p:nvSpPr>
-          <p:cNvPr id="48" name="Shape 46"/>
+          <p:cNvPr id="49" name="Shape 47"/>
           <p:cNvSpPr/>
           <p:nvPr/>
         </p:nvSpPr>
         <p:spPr>
           <a:xfrm flipH="1">
-            <a:off x="5403509" y="1891674"/>
+            <a:off x="5403509" y="2058534"/>
             <a:ext cx="690967" cy="0"/>
           </a:xfrm>
           <a:prstGeom prst="line">
@@ -5321,7 +5399,7 @@
           <a:noFill/>
           <a:ln w="12700">
             <a:solidFill>
-              <a:srgbClr val="9AA6AD"/>
+              <a:srgbClr val="1F6FA3"/>
             </a:solidFill>
             <a:prstDash val="solid"/>
           </a:ln>
@@ -5329,14 +5407,14 @@
       </p:sp>
       <p:sp>
         <p:nvSpPr>
-          <p:cNvPr id="49" name="Shape 47"/>
-          <p:cNvSpPr/>
-          <p:nvPr/>
-        </p:nvSpPr>
-        <p:spPr>
-          <a:xfrm>
-            <a:off x="5403509" y="1891674"/>
-            <a:ext cx="0" cy="258148"/>
+          <p:cNvPr id="50" name="Shape 48"/>
+          <p:cNvSpPr/>
+          <p:nvPr/>
+        </p:nvSpPr>
+        <p:spPr>
+          <a:xfrm>
+            <a:off x="5403509" y="2058534"/>
+            <a:ext cx="0" cy="253916"/>
           </a:xfrm>
           <a:prstGeom prst="line">
             <a:avLst/>
@@ -5344,7 +5422,7 @@
           <a:noFill/>
           <a:ln w="12700">
             <a:solidFill>
-              <a:srgbClr val="9AA6AD"/>
+              <a:srgbClr val="1F6FA3"/>
             </a:solidFill>
             <a:prstDash val="solid"/>
           </a:ln>
@@ -5352,14 +5430,14 @@
       </p:sp>
       <p:sp>
         <p:nvSpPr>
-          <p:cNvPr id="50" name="Shape 48"/>
-          <p:cNvSpPr/>
-          <p:nvPr/>
-        </p:nvSpPr>
-        <p:spPr>
-          <a:xfrm>
-            <a:off x="4847366" y="2629240"/>
-            <a:ext cx="0" cy="460979"/>
+          <p:cNvPr id="51" name="Shape 49"/>
+          <p:cNvSpPr/>
+          <p:nvPr/>
+        </p:nvSpPr>
+        <p:spPr>
+          <a:xfrm>
+            <a:off x="4847366" y="2784008"/>
+            <a:ext cx="0" cy="453421"/>
           </a:xfrm>
           <a:prstGeom prst="line">
             <a:avLst/>
@@ -5367,7 +5445,7 @@
           <a:noFill/>
           <a:ln w="12700">
             <a:solidFill>
-              <a:srgbClr val="9AA6AD"/>
+              <a:srgbClr val="1F6FA3"/>
             </a:solidFill>
             <a:prstDash val="solid"/>
           </a:ln>
@@ -5375,13 +5453,13 @@
       </p:sp>
       <p:sp>
         <p:nvSpPr>
-          <p:cNvPr id="51" name="Shape 49"/>
-          <p:cNvSpPr/>
-          <p:nvPr/>
-        </p:nvSpPr>
-        <p:spPr>
-          <a:xfrm>
-            <a:off x="4847366" y="3090219"/>
+          <p:cNvPr id="52" name="Shape 50"/>
+          <p:cNvSpPr/>
+          <p:nvPr/>
+        </p:nvSpPr>
+        <p:spPr>
+          <a:xfrm>
+            <a:off x="4847366" y="3237429"/>
             <a:ext cx="92691" cy="0"/>
           </a:xfrm>
           <a:prstGeom prst="line">
@@ -5390,7 +5468,7 @@
           <a:noFill/>
           <a:ln w="12700">
             <a:solidFill>
-              <a:srgbClr val="9AA6AD"/>
+              <a:srgbClr val="1F6FA3"/>
             </a:solidFill>
             <a:prstDash val="solid"/>
           </a:ln>
@@ -5398,14 +5476,14 @@
       </p:sp>
       <p:sp>
         <p:nvSpPr>
-          <p:cNvPr id="52" name="Shape 50"/>
-          <p:cNvSpPr/>
-          <p:nvPr/>
-        </p:nvSpPr>
-        <p:spPr>
-          <a:xfrm>
-            <a:off x="4847366" y="2629240"/>
-            <a:ext cx="0" cy="958835"/>
+          <p:cNvPr id="53" name="Shape 51"/>
+          <p:cNvSpPr/>
+          <p:nvPr/>
+        </p:nvSpPr>
+        <p:spPr>
+          <a:xfrm>
+            <a:off x="4847366" y="2784008"/>
+            <a:ext cx="0" cy="943117"/>
           </a:xfrm>
           <a:prstGeom prst="line">
             <a:avLst/>
@@ -5413,7 +5491,7 @@
           <a:noFill/>
           <a:ln w="12700">
             <a:solidFill>
-              <a:srgbClr val="9AA6AD"/>
+              <a:srgbClr val="1F6FA3"/>
             </a:solidFill>
             <a:prstDash val="solid"/>
           </a:ln>
@@ -5421,13 +5499,13 @@
       </p:sp>
       <p:sp>
         <p:nvSpPr>
-          <p:cNvPr id="53" name="Shape 51"/>
-          <p:cNvSpPr/>
-          <p:nvPr/>
-        </p:nvSpPr>
-        <p:spPr>
-          <a:xfrm>
-            <a:off x="4847366" y="3588075"/>
+          <p:cNvPr id="54" name="Shape 52"/>
+          <p:cNvSpPr/>
+          <p:nvPr/>
+        </p:nvSpPr>
+        <p:spPr>
+          <a:xfrm>
+            <a:off x="4847366" y="3727125"/>
             <a:ext cx="92691" cy="0"/>
           </a:xfrm>
           <a:prstGeom prst="line">
@@ -5436,7 +5514,7 @@
           <a:noFill/>
           <a:ln w="12700">
             <a:solidFill>
-              <a:srgbClr val="9AA6AD"/>
+              <a:srgbClr val="1F6FA3"/>
             </a:solidFill>
             <a:prstDash val="solid"/>
           </a:ln>
@@ -5444,14 +5522,14 @@
       </p:sp>
       <p:sp>
         <p:nvSpPr>
-          <p:cNvPr id="54" name="Shape 52"/>
-          <p:cNvSpPr/>
-          <p:nvPr/>
-        </p:nvSpPr>
-        <p:spPr>
-          <a:xfrm>
-            <a:off x="4847366" y="2629240"/>
-            <a:ext cx="0" cy="1456692"/>
+          <p:cNvPr id="55" name="Shape 53"/>
+          <p:cNvSpPr/>
+          <p:nvPr/>
+        </p:nvSpPr>
+        <p:spPr>
+          <a:xfrm>
+            <a:off x="4847366" y="2784008"/>
+            <a:ext cx="0" cy="1432812"/>
           </a:xfrm>
           <a:prstGeom prst="line">
             <a:avLst/>
@@ -5459,7 +5537,7 @@
           <a:noFill/>
           <a:ln w="12700">
             <a:solidFill>
-              <a:srgbClr val="9AA6AD"/>
+              <a:srgbClr val="1F6FA3"/>
             </a:solidFill>
             <a:prstDash val="solid"/>
           </a:ln>
@@ -5467,13 +5545,13 @@
       </p:sp>
       <p:sp>
         <p:nvSpPr>
-          <p:cNvPr id="55" name="Shape 53"/>
-          <p:cNvSpPr/>
-          <p:nvPr/>
-        </p:nvSpPr>
-        <p:spPr>
-          <a:xfrm>
-            <a:off x="4847366" y="4085932"/>
+          <p:cNvPr id="56" name="Shape 54"/>
+          <p:cNvSpPr/>
+          <p:nvPr/>
+        </p:nvSpPr>
+        <p:spPr>
+          <a:xfrm>
+            <a:off x="4847366" y="4216820"/>
             <a:ext cx="92691" cy="0"/>
           </a:xfrm>
           <a:prstGeom prst="line">
@@ -5482,7 +5560,7 @@
           <a:noFill/>
           <a:ln w="12700">
             <a:solidFill>
-              <a:srgbClr val="9AA6AD"/>
+              <a:srgbClr val="1F6FA3"/>
             </a:solidFill>
             <a:prstDash val="solid"/>
           </a:ln>
@@ -5490,14 +5568,14 @@
       </p:sp>
       <p:sp>
         <p:nvSpPr>
-          <p:cNvPr id="56" name="Shape 54"/>
-          <p:cNvSpPr/>
-          <p:nvPr/>
-        </p:nvSpPr>
-        <p:spPr>
-          <a:xfrm>
-            <a:off x="4847366" y="2629240"/>
-            <a:ext cx="0" cy="1954549"/>
+          <p:cNvPr id="57" name="Shape 55"/>
+          <p:cNvSpPr/>
+          <p:nvPr/>
+        </p:nvSpPr>
+        <p:spPr>
+          <a:xfrm>
+            <a:off x="4847366" y="2784008"/>
+            <a:ext cx="0" cy="1922507"/>
           </a:xfrm>
           <a:prstGeom prst="line">
             <a:avLst/>
@@ -5505,7 +5583,7 @@
           <a:noFill/>
           <a:ln w="12700">
             <a:solidFill>
-              <a:srgbClr val="9AA6AD"/>
+              <a:srgbClr val="1F6FA3"/>
             </a:solidFill>
             <a:prstDash val="solid"/>
           </a:ln>
@@ -5513,13 +5591,13 @@
       </p:sp>
       <p:sp>
         <p:nvSpPr>
-          <p:cNvPr id="57" name="Shape 55"/>
-          <p:cNvSpPr/>
-          <p:nvPr/>
-        </p:nvSpPr>
-        <p:spPr>
-          <a:xfrm>
-            <a:off x="4847366" y="4583789"/>
+          <p:cNvPr id="58" name="Shape 56"/>
+          <p:cNvSpPr/>
+          <p:nvPr/>
+        </p:nvSpPr>
+        <p:spPr>
+          <a:xfrm>
+            <a:off x="4847366" y="4706515"/>
             <a:ext cx="92691" cy="0"/>
           </a:xfrm>
           <a:prstGeom prst="line">
@@ -5528,7 +5606,7 @@
           <a:noFill/>
           <a:ln w="12700">
             <a:solidFill>
-              <a:srgbClr val="9AA6AD"/>
+              <a:srgbClr val="1F6FA3"/>
             </a:solidFill>
             <a:prstDash val="solid"/>
           </a:ln>
@@ -5536,14 +5614,14 @@
       </p:sp>
       <p:sp>
         <p:nvSpPr>
-          <p:cNvPr id="58" name="Shape 56"/>
-          <p:cNvSpPr/>
-          <p:nvPr/>
-        </p:nvSpPr>
-        <p:spPr>
-          <a:xfrm>
-            <a:off x="4847366" y="2629240"/>
-            <a:ext cx="0" cy="2452406"/>
+          <p:cNvPr id="59" name="Shape 57"/>
+          <p:cNvSpPr/>
+          <p:nvPr/>
+        </p:nvSpPr>
+        <p:spPr>
+          <a:xfrm>
+            <a:off x="4847366" y="2784008"/>
+            <a:ext cx="0" cy="2412202"/>
           </a:xfrm>
           <a:prstGeom prst="line">
             <a:avLst/>
@@ -5551,7 +5629,7 @@
           <a:noFill/>
           <a:ln w="12700">
             <a:solidFill>
-              <a:srgbClr val="9AA6AD"/>
+              <a:srgbClr val="1F6FA3"/>
             </a:solidFill>
             <a:prstDash val="solid"/>
           </a:ln>
@@ -5559,13 +5637,13 @@
       </p:sp>
       <p:sp>
         <p:nvSpPr>
-          <p:cNvPr id="59" name="Shape 57"/>
-          <p:cNvSpPr/>
-          <p:nvPr/>
-        </p:nvSpPr>
-        <p:spPr>
-          <a:xfrm>
-            <a:off x="4847366" y="5081646"/>
+          <p:cNvPr id="60" name="Shape 58"/>
+          <p:cNvSpPr/>
+          <p:nvPr/>
+        </p:nvSpPr>
+        <p:spPr>
+          <a:xfrm>
+            <a:off x="4847366" y="5196210"/>
             <a:ext cx="92691" cy="0"/>
           </a:xfrm>
           <a:prstGeom prst="line">
@@ -5574,7 +5652,7 @@
           <a:noFill/>
           <a:ln w="12700">
             <a:solidFill>
-              <a:srgbClr val="9AA6AD"/>
+              <a:srgbClr val="1F6FA3"/>
             </a:solidFill>
             <a:prstDash val="solid"/>
           </a:ln>
@@ -5582,14 +5660,14 @@
       </p:sp>
       <p:sp>
         <p:nvSpPr>
-          <p:cNvPr id="60" name="Shape 58"/>
-          <p:cNvSpPr/>
-          <p:nvPr/>
-        </p:nvSpPr>
-        <p:spPr>
-          <a:xfrm>
-            <a:off x="6094476" y="1559770"/>
-            <a:ext cx="0" cy="331905"/>
+          <p:cNvPr id="61" name="Shape 59"/>
+          <p:cNvSpPr/>
+          <p:nvPr/>
+        </p:nvSpPr>
+        <p:spPr>
+          <a:xfrm>
+            <a:off x="6094476" y="1732070"/>
+            <a:ext cx="0" cy="326463"/>
           </a:xfrm>
           <a:prstGeom prst="line">
             <a:avLst/>
@@ -5597,7 +5675,7 @@
           <a:noFill/>
           <a:ln w="12700">
             <a:solidFill>
-              <a:srgbClr val="9AA6AD"/>
+              <a:srgbClr val="1F6FA3"/>
             </a:solidFill>
             <a:prstDash val="solid"/>
           </a:ln>
@@ -5605,13 +5683,13 @@
       </p:sp>
       <p:sp>
         <p:nvSpPr>
-          <p:cNvPr id="61" name="Shape 59"/>
-          <p:cNvSpPr/>
-          <p:nvPr/>
-        </p:nvSpPr>
-        <p:spPr>
-          <a:xfrm>
-            <a:off x="6094476" y="1891674"/>
+          <p:cNvPr id="62" name="Shape 60"/>
+          <p:cNvSpPr/>
+          <p:nvPr/>
+        </p:nvSpPr>
+        <p:spPr>
+          <a:xfrm>
+            <a:off x="6094476" y="2058534"/>
             <a:ext cx="690967" cy="0"/>
           </a:xfrm>
           <a:prstGeom prst="line">
@@ -5620,7 +5698,7 @@
           <a:noFill/>
           <a:ln w="12700">
             <a:solidFill>
-              <a:srgbClr val="9AA6AD"/>
+              <a:srgbClr val="1F6FA3"/>
             </a:solidFill>
             <a:prstDash val="solid"/>
           </a:ln>
@@ -5628,14 +5706,14 @@
       </p:sp>
       <p:sp>
         <p:nvSpPr>
-          <p:cNvPr id="62" name="Shape 60"/>
-          <p:cNvSpPr/>
-          <p:nvPr/>
-        </p:nvSpPr>
-        <p:spPr>
-          <a:xfrm>
-            <a:off x="6785443" y="1891674"/>
-            <a:ext cx="0" cy="258148"/>
+          <p:cNvPr id="63" name="Shape 61"/>
+          <p:cNvSpPr/>
+          <p:nvPr/>
+        </p:nvSpPr>
+        <p:spPr>
+          <a:xfrm>
+            <a:off x="6785443" y="2058534"/>
+            <a:ext cx="0" cy="253916"/>
           </a:xfrm>
           <a:prstGeom prst="line">
             <a:avLst/>
@@ -5643,7 +5721,7 @@
           <a:noFill/>
           <a:ln w="12700">
             <a:solidFill>
-              <a:srgbClr val="9AA6AD"/>
+              <a:srgbClr val="1F6FA3"/>
             </a:solidFill>
             <a:prstDash val="solid"/>
           </a:ln>
@@ -5651,14 +5729,14 @@
       </p:sp>
       <p:sp>
         <p:nvSpPr>
-          <p:cNvPr id="63" name="Shape 61"/>
-          <p:cNvSpPr/>
-          <p:nvPr/>
-        </p:nvSpPr>
-        <p:spPr>
-          <a:xfrm>
-            <a:off x="6229299" y="2629240"/>
-            <a:ext cx="0" cy="460979"/>
+          <p:cNvPr id="64" name="Shape 62"/>
+          <p:cNvSpPr/>
+          <p:nvPr/>
+        </p:nvSpPr>
+        <p:spPr>
+          <a:xfrm>
+            <a:off x="6229299" y="2784008"/>
+            <a:ext cx="0" cy="453421"/>
           </a:xfrm>
           <a:prstGeom prst="line">
             <a:avLst/>
@@ -5666,7 +5744,7 @@
           <a:noFill/>
           <a:ln w="12700">
             <a:solidFill>
-              <a:srgbClr val="9AA6AD"/>
+              <a:srgbClr val="1F6FA3"/>
             </a:solidFill>
             <a:prstDash val="solid"/>
           </a:ln>
@@ -5674,13 +5752,13 @@
       </p:sp>
       <p:sp>
         <p:nvSpPr>
-          <p:cNvPr id="64" name="Shape 62"/>
-          <p:cNvSpPr/>
-          <p:nvPr/>
-        </p:nvSpPr>
-        <p:spPr>
-          <a:xfrm>
-            <a:off x="6229299" y="3090219"/>
+          <p:cNvPr id="65" name="Shape 63"/>
+          <p:cNvSpPr/>
+          <p:nvPr/>
+        </p:nvSpPr>
+        <p:spPr>
+          <a:xfrm>
+            <a:off x="6229299" y="3237429"/>
             <a:ext cx="92691" cy="0"/>
           </a:xfrm>
           <a:prstGeom prst="line">
@@ -5689,7 +5767,7 @@
           <a:noFill/>
           <a:ln w="12700">
             <a:solidFill>
-              <a:srgbClr val="9AA6AD"/>
+              <a:srgbClr val="1F6FA3"/>
             </a:solidFill>
             <a:prstDash val="solid"/>
           </a:ln>
@@ -5697,14 +5775,14 @@
       </p:sp>
       <p:sp>
         <p:nvSpPr>
-          <p:cNvPr id="65" name="Shape 63"/>
-          <p:cNvSpPr/>
-          <p:nvPr/>
-        </p:nvSpPr>
-        <p:spPr>
-          <a:xfrm>
-            <a:off x="6229299" y="2629240"/>
-            <a:ext cx="0" cy="958835"/>
+          <p:cNvPr id="66" name="Shape 64"/>
+          <p:cNvSpPr/>
+          <p:nvPr/>
+        </p:nvSpPr>
+        <p:spPr>
+          <a:xfrm>
+            <a:off x="6229299" y="2784008"/>
+            <a:ext cx="0" cy="943117"/>
           </a:xfrm>
           <a:prstGeom prst="line">
             <a:avLst/>
@@ -5712,7 +5790,7 @@
           <a:noFill/>
           <a:ln w="12700">
             <a:solidFill>
-              <a:srgbClr val="9AA6AD"/>
+              <a:srgbClr val="1F6FA3"/>
             </a:solidFill>
             <a:prstDash val="solid"/>
           </a:ln>
@@ -5720,13 +5798,13 @@
       </p:sp>
       <p:sp>
         <p:nvSpPr>
-          <p:cNvPr id="66" name="Shape 64"/>
-          <p:cNvSpPr/>
-          <p:nvPr/>
-        </p:nvSpPr>
-        <p:spPr>
-          <a:xfrm>
-            <a:off x="6229299" y="3588075"/>
+          <p:cNvPr id="67" name="Shape 65"/>
+          <p:cNvSpPr/>
+          <p:nvPr/>
+        </p:nvSpPr>
+        <p:spPr>
+          <a:xfrm>
+            <a:off x="6229299" y="3727125"/>
             <a:ext cx="92691" cy="0"/>
           </a:xfrm>
           <a:prstGeom prst="line">
@@ -5735,7 +5813,7 @@
           <a:noFill/>
           <a:ln w="12700">
             <a:solidFill>
-              <a:srgbClr val="9AA6AD"/>
+              <a:srgbClr val="1F6FA3"/>
             </a:solidFill>
             <a:prstDash val="solid"/>
           </a:ln>
@@ -5743,14 +5821,14 @@
       </p:sp>
       <p:sp>
         <p:nvSpPr>
-          <p:cNvPr id="67" name="Shape 65"/>
-          <p:cNvSpPr/>
-          <p:nvPr/>
-        </p:nvSpPr>
-        <p:spPr>
-          <a:xfrm>
-            <a:off x="6229299" y="2629240"/>
-            <a:ext cx="0" cy="1456692"/>
+          <p:cNvPr id="68" name="Shape 66"/>
+          <p:cNvSpPr/>
+          <p:nvPr/>
+        </p:nvSpPr>
+        <p:spPr>
+          <a:xfrm>
+            <a:off x="6229299" y="2784008"/>
+            <a:ext cx="0" cy="1432812"/>
           </a:xfrm>
           <a:prstGeom prst="line">
             <a:avLst/>
@@ -5758,7 +5836,7 @@
           <a:noFill/>
           <a:ln w="12700">
             <a:solidFill>
-              <a:srgbClr val="9AA6AD"/>
+              <a:srgbClr val="1F6FA3"/>
             </a:solidFill>
             <a:prstDash val="solid"/>
           </a:ln>
@@ -5766,13 +5844,13 @@
       </p:sp>
       <p:sp>
         <p:nvSpPr>
-          <p:cNvPr id="68" name="Shape 66"/>
-          <p:cNvSpPr/>
-          <p:nvPr/>
-        </p:nvSpPr>
-        <p:spPr>
-          <a:xfrm>
-            <a:off x="6229299" y="4085932"/>
+          <p:cNvPr id="69" name="Shape 67"/>
+          <p:cNvSpPr/>
+          <p:nvPr/>
+        </p:nvSpPr>
+        <p:spPr>
+          <a:xfrm>
+            <a:off x="6229299" y="4216820"/>
             <a:ext cx="92691" cy="0"/>
           </a:xfrm>
           <a:prstGeom prst="line">
@@ -5781,7 +5859,7 @@
           <a:noFill/>
           <a:ln w="12700">
             <a:solidFill>
-              <a:srgbClr val="9AA6AD"/>
+              <a:srgbClr val="1F6FA3"/>
             </a:solidFill>
             <a:prstDash val="solid"/>
           </a:ln>
@@ -5789,14 +5867,14 @@
       </p:sp>
       <p:sp>
         <p:nvSpPr>
-          <p:cNvPr id="69" name="Shape 67"/>
-          <p:cNvSpPr/>
-          <p:nvPr/>
-        </p:nvSpPr>
-        <p:spPr>
-          <a:xfrm>
-            <a:off x="6229299" y="2629240"/>
-            <a:ext cx="0" cy="1954549"/>
+          <p:cNvPr id="70" name="Shape 68"/>
+          <p:cNvSpPr/>
+          <p:nvPr/>
+        </p:nvSpPr>
+        <p:spPr>
+          <a:xfrm>
+            <a:off x="6229299" y="2784008"/>
+            <a:ext cx="0" cy="1922507"/>
           </a:xfrm>
           <a:prstGeom prst="line">
             <a:avLst/>
@@ -5804,7 +5882,7 @@
           <a:noFill/>
           <a:ln w="12700">
             <a:solidFill>
-              <a:srgbClr val="9AA6AD"/>
+              <a:srgbClr val="1F6FA3"/>
             </a:solidFill>
             <a:prstDash val="solid"/>
           </a:ln>
@@ -5812,13 +5890,13 @@
       </p:sp>
       <p:sp>
         <p:nvSpPr>
-          <p:cNvPr id="70" name="Shape 68"/>
-          <p:cNvSpPr/>
-          <p:nvPr/>
-        </p:nvSpPr>
-        <p:spPr>
-          <a:xfrm>
-            <a:off x="6229299" y="4583789"/>
+          <p:cNvPr id="71" name="Shape 69"/>
+          <p:cNvSpPr/>
+          <p:nvPr/>
+        </p:nvSpPr>
+        <p:spPr>
+          <a:xfrm>
+            <a:off x="6229299" y="4706515"/>
             <a:ext cx="92691" cy="0"/>
           </a:xfrm>
           <a:prstGeom prst="line">
@@ -5827,7 +5905,7 @@
           <a:noFill/>
           <a:ln w="12700">
             <a:solidFill>
-              <a:srgbClr val="9AA6AD"/>
+              <a:srgbClr val="1F6FA3"/>
             </a:solidFill>
             <a:prstDash val="solid"/>
           </a:ln>
@@ -5835,14 +5913,14 @@
       </p:sp>
       <p:sp>
         <p:nvSpPr>
-          <p:cNvPr id="71" name="Shape 69"/>
-          <p:cNvSpPr/>
-          <p:nvPr/>
-        </p:nvSpPr>
-        <p:spPr>
-          <a:xfrm>
-            <a:off x="6229299" y="2629240"/>
-            <a:ext cx="0" cy="2452406"/>
+          <p:cNvPr id="72" name="Shape 70"/>
+          <p:cNvSpPr/>
+          <p:nvPr/>
+        </p:nvSpPr>
+        <p:spPr>
+          <a:xfrm>
+            <a:off x="6229299" y="2784008"/>
+            <a:ext cx="0" cy="2412202"/>
           </a:xfrm>
           <a:prstGeom prst="line">
             <a:avLst/>
@@ -5850,7 +5928,7 @@
           <a:noFill/>
           <a:ln w="12700">
             <a:solidFill>
-              <a:srgbClr val="9AA6AD"/>
+              <a:srgbClr val="1F6FA3"/>
             </a:solidFill>
             <a:prstDash val="solid"/>
           </a:ln>
@@ -5858,13 +5936,13 @@
       </p:sp>
       <p:sp>
         <p:nvSpPr>
-          <p:cNvPr id="72" name="Shape 70"/>
-          <p:cNvSpPr/>
-          <p:nvPr/>
-        </p:nvSpPr>
-        <p:spPr>
-          <a:xfrm>
-            <a:off x="6229299" y="5081646"/>
+          <p:cNvPr id="73" name="Shape 71"/>
+          <p:cNvSpPr/>
+          <p:nvPr/>
+        </p:nvSpPr>
+        <p:spPr>
+          <a:xfrm>
+            <a:off x="6229299" y="5196210"/>
             <a:ext cx="92691" cy="0"/>
           </a:xfrm>
           <a:prstGeom prst="line">
@@ -5873,7 +5951,7 @@
           <a:noFill/>
           <a:ln w="12700">
             <a:solidFill>
-              <a:srgbClr val="9AA6AD"/>
+              <a:srgbClr val="1F6FA3"/>
             </a:solidFill>
             <a:prstDash val="solid"/>
           </a:ln>
@@ -5881,14 +5959,14 @@
       </p:sp>
       <p:sp>
         <p:nvSpPr>
-          <p:cNvPr id="73" name="Shape 71"/>
-          <p:cNvSpPr/>
-          <p:nvPr/>
-        </p:nvSpPr>
-        <p:spPr>
-          <a:xfrm>
-            <a:off x="6229299" y="2629240"/>
-            <a:ext cx="0" cy="2950262"/>
+          <p:cNvPr id="74" name="Shape 72"/>
+          <p:cNvSpPr/>
+          <p:nvPr/>
+        </p:nvSpPr>
+        <p:spPr>
+          <a:xfrm>
+            <a:off x="6229299" y="2784008"/>
+            <a:ext cx="0" cy="2901898"/>
           </a:xfrm>
           <a:prstGeom prst="line">
             <a:avLst/>
@@ -5896,7 +5974,7 @@
           <a:noFill/>
           <a:ln w="12700">
             <a:solidFill>
-              <a:srgbClr val="9AA6AD"/>
+              <a:srgbClr val="1F6FA3"/>
             </a:solidFill>
             <a:prstDash val="solid"/>
           </a:ln>
@@ -5904,13 +5982,13 @@
       </p:sp>
       <p:sp>
         <p:nvSpPr>
-          <p:cNvPr id="74" name="Shape 72"/>
-          <p:cNvSpPr/>
-          <p:nvPr/>
-        </p:nvSpPr>
-        <p:spPr>
-          <a:xfrm>
-            <a:off x="6229299" y="5579503"/>
+          <p:cNvPr id="75" name="Shape 73"/>
+          <p:cNvSpPr/>
+          <p:nvPr/>
+        </p:nvSpPr>
+        <p:spPr>
+          <a:xfrm>
+            <a:off x="6229299" y="5685905"/>
             <a:ext cx="92691" cy="0"/>
           </a:xfrm>
           <a:prstGeom prst="line">
@@ -5919,7 +5997,7 @@
           <a:noFill/>
           <a:ln w="12700">
             <a:solidFill>
-              <a:srgbClr val="9AA6AD"/>
+              <a:srgbClr val="1F6FA3"/>
             </a:solidFill>
             <a:prstDash val="solid"/>
           </a:ln>
@@ -5927,14 +6005,14 @@
       </p:sp>
       <p:sp>
         <p:nvSpPr>
-          <p:cNvPr id="75" name="Shape 73"/>
-          <p:cNvSpPr/>
-          <p:nvPr/>
-        </p:nvSpPr>
-        <p:spPr>
-          <a:xfrm>
-            <a:off x="6094476" y="1559770"/>
-            <a:ext cx="0" cy="331905"/>
+          <p:cNvPr id="76" name="Shape 74"/>
+          <p:cNvSpPr/>
+          <p:nvPr/>
+        </p:nvSpPr>
+        <p:spPr>
+          <a:xfrm>
+            <a:off x="6094476" y="1732070"/>
+            <a:ext cx="0" cy="326463"/>
           </a:xfrm>
           <a:prstGeom prst="line">
             <a:avLst/>
@@ -5942,7 +6020,7 @@
           <a:noFill/>
           <a:ln w="12700">
             <a:solidFill>
-              <a:srgbClr val="9AA6AD"/>
+              <a:srgbClr val="1F6FA3"/>
             </a:solidFill>
             <a:prstDash val="solid"/>
           </a:ln>
@@ -5950,13 +6028,13 @@
       </p:sp>
       <p:sp>
         <p:nvSpPr>
-          <p:cNvPr id="76" name="Shape 74"/>
-          <p:cNvSpPr/>
-          <p:nvPr/>
-        </p:nvSpPr>
-        <p:spPr>
-          <a:xfrm>
-            <a:off x="6094476" y="1891674"/>
+          <p:cNvPr id="77" name="Shape 75"/>
+          <p:cNvSpPr/>
+          <p:nvPr/>
+        </p:nvSpPr>
+        <p:spPr>
+          <a:xfrm>
+            <a:off x="6094476" y="2058534"/>
             <a:ext cx="2072900" cy="0"/>
           </a:xfrm>
           <a:prstGeom prst="line">
@@ -5965,7 +6043,7 @@
           <a:noFill/>
           <a:ln w="12700">
             <a:solidFill>
-              <a:srgbClr val="9AA6AD"/>
+              <a:srgbClr val="1F6FA3"/>
             </a:solidFill>
             <a:prstDash val="solid"/>
           </a:ln>
@@ -5973,14 +6051,14 @@
       </p:sp>
       <p:sp>
         <p:nvSpPr>
-          <p:cNvPr id="77" name="Shape 75"/>
-          <p:cNvSpPr/>
-          <p:nvPr/>
-        </p:nvSpPr>
-        <p:spPr>
-          <a:xfrm>
-            <a:off x="8167376" y="1891674"/>
-            <a:ext cx="0" cy="258148"/>
+          <p:cNvPr id="78" name="Shape 76"/>
+          <p:cNvSpPr/>
+          <p:nvPr/>
+        </p:nvSpPr>
+        <p:spPr>
+          <a:xfrm>
+            <a:off x="8167376" y="2058534"/>
+            <a:ext cx="0" cy="253916"/>
           </a:xfrm>
           <a:prstGeom prst="line">
             <a:avLst/>
@@ -5988,7 +6066,7 @@
           <a:noFill/>
           <a:ln w="12700">
             <a:solidFill>
-              <a:srgbClr val="9AA6AD"/>
+              <a:srgbClr val="1F6FA3"/>
             </a:solidFill>
             <a:prstDash val="solid"/>
           </a:ln>
@@ -5996,14 +6074,14 @@
       </p:sp>
       <p:sp>
         <p:nvSpPr>
-          <p:cNvPr id="78" name="Shape 76"/>
-          <p:cNvSpPr/>
-          <p:nvPr/>
-        </p:nvSpPr>
-        <p:spPr>
-          <a:xfrm>
-            <a:off x="7611232" y="2629240"/>
-            <a:ext cx="0" cy="460979"/>
+          <p:cNvPr id="79" name="Shape 77"/>
+          <p:cNvSpPr/>
+          <p:nvPr/>
+        </p:nvSpPr>
+        <p:spPr>
+          <a:xfrm>
+            <a:off x="7611232" y="2784008"/>
+            <a:ext cx="0" cy="453421"/>
           </a:xfrm>
           <a:prstGeom prst="line">
             <a:avLst/>
@@ -6011,7 +6089,7 @@
           <a:noFill/>
           <a:ln w="12700">
             <a:solidFill>
-              <a:srgbClr val="9AA6AD"/>
+              <a:srgbClr val="1F6FA3"/>
             </a:solidFill>
             <a:prstDash val="solid"/>
           </a:ln>
@@ -6019,13 +6097,13 @@
       </p:sp>
       <p:sp>
         <p:nvSpPr>
-          <p:cNvPr id="79" name="Shape 77"/>
-          <p:cNvSpPr/>
-          <p:nvPr/>
-        </p:nvSpPr>
-        <p:spPr>
-          <a:xfrm>
-            <a:off x="7611232" y="3090219"/>
+          <p:cNvPr id="80" name="Shape 78"/>
+          <p:cNvSpPr/>
+          <p:nvPr/>
+        </p:nvSpPr>
+        <p:spPr>
+          <a:xfrm>
+            <a:off x="7611232" y="3237429"/>
             <a:ext cx="92691" cy="0"/>
           </a:xfrm>
           <a:prstGeom prst="line">
@@ -6034,7 +6112,7 @@
           <a:noFill/>
           <a:ln w="12700">
             <a:solidFill>
-              <a:srgbClr val="9AA6AD"/>
+              <a:srgbClr val="1F6FA3"/>
             </a:solidFill>
             <a:prstDash val="solid"/>
           </a:ln>
@@ -6042,14 +6120,14 @@
       </p:sp>
       <p:sp>
         <p:nvSpPr>
-          <p:cNvPr id="80" name="Shape 78"/>
-          <p:cNvSpPr/>
-          <p:nvPr/>
-        </p:nvSpPr>
-        <p:spPr>
-          <a:xfrm>
-            <a:off x="7611232" y="2629240"/>
-            <a:ext cx="0" cy="958835"/>
+          <p:cNvPr id="81" name="Shape 79"/>
+          <p:cNvSpPr/>
+          <p:nvPr/>
+        </p:nvSpPr>
+        <p:spPr>
+          <a:xfrm>
+            <a:off x="7611232" y="2784008"/>
+            <a:ext cx="0" cy="943117"/>
           </a:xfrm>
           <a:prstGeom prst="line">
             <a:avLst/>
@@ -6057,7 +6135,7 @@
           <a:noFill/>
           <a:ln w="12700">
             <a:solidFill>
-              <a:srgbClr val="9AA6AD"/>
+              <a:srgbClr val="1F6FA3"/>
             </a:solidFill>
             <a:prstDash val="solid"/>
           </a:ln>
@@ -6065,13 +6143,13 @@
       </p:sp>
       <p:sp>
         <p:nvSpPr>
-          <p:cNvPr id="81" name="Shape 79"/>
-          <p:cNvSpPr/>
-          <p:nvPr/>
-        </p:nvSpPr>
-        <p:spPr>
-          <a:xfrm>
-            <a:off x="7611232" y="3588075"/>
+          <p:cNvPr id="82" name="Shape 80"/>
+          <p:cNvSpPr/>
+          <p:nvPr/>
+        </p:nvSpPr>
+        <p:spPr>
+          <a:xfrm>
+            <a:off x="7611232" y="3727125"/>
             <a:ext cx="92691" cy="0"/>
           </a:xfrm>
           <a:prstGeom prst="line">
@@ -6080,7 +6158,7 @@
           <a:noFill/>
           <a:ln w="12700">
             <a:solidFill>
-              <a:srgbClr val="9AA6AD"/>
+              <a:srgbClr val="1F6FA3"/>
             </a:solidFill>
             <a:prstDash val="solid"/>
           </a:ln>
@@ -6088,14 +6166,14 @@
       </p:sp>
       <p:sp>
         <p:nvSpPr>
-          <p:cNvPr id="82" name="Shape 80"/>
-          <p:cNvSpPr/>
-          <p:nvPr/>
-        </p:nvSpPr>
-        <p:spPr>
-          <a:xfrm>
-            <a:off x="7611232" y="2629240"/>
-            <a:ext cx="0" cy="1456692"/>
+          <p:cNvPr id="83" name="Shape 81"/>
+          <p:cNvSpPr/>
+          <p:nvPr/>
+        </p:nvSpPr>
+        <p:spPr>
+          <a:xfrm>
+            <a:off x="7611232" y="2784008"/>
+            <a:ext cx="0" cy="1432812"/>
           </a:xfrm>
           <a:prstGeom prst="line">
             <a:avLst/>
@@ -6103,7 +6181,7 @@
           <a:noFill/>
           <a:ln w="12700">
             <a:solidFill>
-              <a:srgbClr val="9AA6AD"/>
+              <a:srgbClr val="1F6FA3"/>
             </a:solidFill>
             <a:prstDash val="solid"/>
           </a:ln>
@@ -6111,13 +6189,13 @@
       </p:sp>
       <p:sp>
         <p:nvSpPr>
-          <p:cNvPr id="83" name="Shape 81"/>
-          <p:cNvSpPr/>
-          <p:nvPr/>
-        </p:nvSpPr>
-        <p:spPr>
-          <a:xfrm>
-            <a:off x="7611232" y="4085932"/>
+          <p:cNvPr id="84" name="Shape 82"/>
+          <p:cNvSpPr/>
+          <p:nvPr/>
+        </p:nvSpPr>
+        <p:spPr>
+          <a:xfrm>
+            <a:off x="7611232" y="4216820"/>
             <a:ext cx="92691" cy="0"/>
           </a:xfrm>
           <a:prstGeom prst="line">
@@ -6126,7 +6204,7 @@
           <a:noFill/>
           <a:ln w="12700">
             <a:solidFill>
-              <a:srgbClr val="9AA6AD"/>
+              <a:srgbClr val="1F6FA3"/>
             </a:solidFill>
             <a:prstDash val="solid"/>
           </a:ln>
@@ -6134,14 +6212,14 @@
       </p:sp>
       <p:sp>
         <p:nvSpPr>
-          <p:cNvPr id="84" name="Shape 82"/>
-          <p:cNvSpPr/>
-          <p:nvPr/>
-        </p:nvSpPr>
-        <p:spPr>
-          <a:xfrm>
-            <a:off x="7611232" y="2629240"/>
-            <a:ext cx="0" cy="1954549"/>
+          <p:cNvPr id="85" name="Shape 83"/>
+          <p:cNvSpPr/>
+          <p:nvPr/>
+        </p:nvSpPr>
+        <p:spPr>
+          <a:xfrm>
+            <a:off x="7611232" y="2784008"/>
+            <a:ext cx="0" cy="1922507"/>
           </a:xfrm>
           <a:prstGeom prst="line">
             <a:avLst/>
@@ -6149,7 +6227,7 @@
           <a:noFill/>
           <a:ln w="12700">
             <a:solidFill>
-              <a:srgbClr val="9AA6AD"/>
+              <a:srgbClr val="1F6FA3"/>
             </a:solidFill>
             <a:prstDash val="solid"/>
           </a:ln>
@@ -6157,13 +6235,13 @@
       </p:sp>
       <p:sp>
         <p:nvSpPr>
-          <p:cNvPr id="85" name="Shape 83"/>
-          <p:cNvSpPr/>
-          <p:nvPr/>
-        </p:nvSpPr>
-        <p:spPr>
-          <a:xfrm>
-            <a:off x="7611232" y="4583789"/>
+          <p:cNvPr id="86" name="Shape 84"/>
+          <p:cNvSpPr/>
+          <p:nvPr/>
+        </p:nvSpPr>
+        <p:spPr>
+          <a:xfrm>
+            <a:off x="7611232" y="4706515"/>
             <a:ext cx="92691" cy="0"/>
           </a:xfrm>
           <a:prstGeom prst="line">
@@ -6172,7 +6250,7 @@
           <a:noFill/>
           <a:ln w="12700">
             <a:solidFill>
-              <a:srgbClr val="9AA6AD"/>
+              <a:srgbClr val="1F6FA3"/>
             </a:solidFill>
             <a:prstDash val="solid"/>
           </a:ln>
@@ -6180,14 +6258,14 @@
       </p:sp>
       <p:sp>
         <p:nvSpPr>
-          <p:cNvPr id="86" name="Shape 84"/>
-          <p:cNvSpPr/>
-          <p:nvPr/>
-        </p:nvSpPr>
-        <p:spPr>
-          <a:xfrm>
-            <a:off x="6094476" y="1559770"/>
-            <a:ext cx="0" cy="331905"/>
+          <p:cNvPr id="87" name="Shape 85"/>
+          <p:cNvSpPr/>
+          <p:nvPr/>
+        </p:nvSpPr>
+        <p:spPr>
+          <a:xfrm>
+            <a:off x="6094476" y="1732070"/>
+            <a:ext cx="0" cy="326463"/>
           </a:xfrm>
           <a:prstGeom prst="line">
             <a:avLst/>
@@ -6195,7 +6273,7 @@
           <a:noFill/>
           <a:ln w="12700">
             <a:solidFill>
-              <a:srgbClr val="9AA6AD"/>
+              <a:srgbClr val="1F6FA3"/>
             </a:solidFill>
             <a:prstDash val="solid"/>
           </a:ln>
@@ -6203,13 +6281,13 @@
       </p:sp>
       <p:sp>
         <p:nvSpPr>
-          <p:cNvPr id="87" name="Shape 85"/>
-          <p:cNvSpPr/>
-          <p:nvPr/>
-        </p:nvSpPr>
-        <p:spPr>
-          <a:xfrm>
-            <a:off x="6094476" y="1891674"/>
+          <p:cNvPr id="88" name="Shape 86"/>
+          <p:cNvSpPr/>
+          <p:nvPr/>
+        </p:nvSpPr>
+        <p:spPr>
+          <a:xfrm>
+            <a:off x="6094476" y="2058534"/>
             <a:ext cx="3454833" cy="0"/>
           </a:xfrm>
           <a:prstGeom prst="line">
@@ -6218,7 +6296,7 @@
           <a:noFill/>
           <a:ln w="12700">
             <a:solidFill>
-              <a:srgbClr val="9AA6AD"/>
+              <a:srgbClr val="1F6FA3"/>
             </a:solidFill>
             <a:prstDash val="solid"/>
           </a:ln>
@@ -6226,14 +6304,14 @@
       </p:sp>
       <p:sp>
         <p:nvSpPr>
-          <p:cNvPr id="88" name="Shape 86"/>
-          <p:cNvSpPr/>
-          <p:nvPr/>
-        </p:nvSpPr>
-        <p:spPr>
-          <a:xfrm>
-            <a:off x="9549309" y="1891674"/>
-            <a:ext cx="0" cy="258148"/>
+          <p:cNvPr id="89" name="Shape 87"/>
+          <p:cNvSpPr/>
+          <p:nvPr/>
+        </p:nvSpPr>
+        <p:spPr>
+          <a:xfrm>
+            <a:off x="9549309" y="2058534"/>
+            <a:ext cx="0" cy="253916"/>
           </a:xfrm>
           <a:prstGeom prst="line">
             <a:avLst/>
@@ -6241,7 +6319,7 @@
           <a:noFill/>
           <a:ln w="12700">
             <a:solidFill>
-              <a:srgbClr val="9AA6AD"/>
+              <a:srgbClr val="1F6FA3"/>
             </a:solidFill>
             <a:prstDash val="solid"/>
           </a:ln>
@@ -6249,14 +6327,14 @@
       </p:sp>
       <p:sp>
         <p:nvSpPr>
-          <p:cNvPr id="89" name="Shape 87"/>
-          <p:cNvSpPr/>
-          <p:nvPr/>
-        </p:nvSpPr>
-        <p:spPr>
-          <a:xfrm>
-            <a:off x="8993165" y="2629240"/>
-            <a:ext cx="0" cy="460979"/>
+          <p:cNvPr id="90" name="Shape 88"/>
+          <p:cNvSpPr/>
+          <p:nvPr/>
+        </p:nvSpPr>
+        <p:spPr>
+          <a:xfrm>
+            <a:off x="8993165" y="2784008"/>
+            <a:ext cx="0" cy="453421"/>
           </a:xfrm>
           <a:prstGeom prst="line">
             <a:avLst/>
@@ -6264,7 +6342,7 @@
           <a:noFill/>
           <a:ln w="12700">
             <a:solidFill>
-              <a:srgbClr val="9AA6AD"/>
+              <a:srgbClr val="1F6FA3"/>
             </a:solidFill>
             <a:prstDash val="solid"/>
           </a:ln>
@@ -6272,13 +6350,13 @@
       </p:sp>
       <p:sp>
         <p:nvSpPr>
-          <p:cNvPr id="90" name="Shape 88"/>
-          <p:cNvSpPr/>
-          <p:nvPr/>
-        </p:nvSpPr>
-        <p:spPr>
-          <a:xfrm>
-            <a:off x="8993165" y="3090219"/>
+          <p:cNvPr id="91" name="Shape 89"/>
+          <p:cNvSpPr/>
+          <p:nvPr/>
+        </p:nvSpPr>
+        <p:spPr>
+          <a:xfrm>
+            <a:off x="8993165" y="3237429"/>
             <a:ext cx="92691" cy="0"/>
           </a:xfrm>
           <a:prstGeom prst="line">
@@ -6287,7 +6365,7 @@
           <a:noFill/>
           <a:ln w="12700">
             <a:solidFill>
-              <a:srgbClr val="9AA6AD"/>
+              <a:srgbClr val="1F6FA3"/>
             </a:solidFill>
             <a:prstDash val="solid"/>
           </a:ln>
@@ -6295,14 +6373,14 @@
       </p:sp>
       <p:sp>
         <p:nvSpPr>
-          <p:cNvPr id="91" name="Shape 89"/>
-          <p:cNvSpPr/>
-          <p:nvPr/>
-        </p:nvSpPr>
-        <p:spPr>
-          <a:xfrm>
-            <a:off x="8993165" y="2629240"/>
-            <a:ext cx="0" cy="958835"/>
+          <p:cNvPr id="92" name="Shape 90"/>
+          <p:cNvSpPr/>
+          <p:nvPr/>
+        </p:nvSpPr>
+        <p:spPr>
+          <a:xfrm>
+            <a:off x="8993165" y="2784008"/>
+            <a:ext cx="0" cy="943117"/>
           </a:xfrm>
           <a:prstGeom prst="line">
             <a:avLst/>
@@ -6310,7 +6388,7 @@
           <a:noFill/>
           <a:ln w="12700">
             <a:solidFill>
-              <a:srgbClr val="9AA6AD"/>
+              <a:srgbClr val="1F6FA3"/>
             </a:solidFill>
             <a:prstDash val="solid"/>
           </a:ln>
@@ -6318,13 +6396,13 @@
       </p:sp>
       <p:sp>
         <p:nvSpPr>
-          <p:cNvPr id="92" name="Shape 90"/>
-          <p:cNvSpPr/>
-          <p:nvPr/>
-        </p:nvSpPr>
-        <p:spPr>
-          <a:xfrm>
-            <a:off x="8993165" y="3588075"/>
+          <p:cNvPr id="93" name="Shape 91"/>
+          <p:cNvSpPr/>
+          <p:nvPr/>
+        </p:nvSpPr>
+        <p:spPr>
+          <a:xfrm>
+            <a:off x="8993165" y="3727125"/>
             <a:ext cx="92691" cy="0"/>
           </a:xfrm>
           <a:prstGeom prst="line">
@@ -6333,7 +6411,7 @@
           <a:noFill/>
           <a:ln w="12700">
             <a:solidFill>
-              <a:srgbClr val="9AA6AD"/>
+              <a:srgbClr val="1F6FA3"/>
             </a:solidFill>
             <a:prstDash val="solid"/>
           </a:ln>
@@ -6341,14 +6419,14 @@
       </p:sp>
       <p:sp>
         <p:nvSpPr>
-          <p:cNvPr id="93" name="Shape 91"/>
-          <p:cNvSpPr/>
-          <p:nvPr/>
-        </p:nvSpPr>
-        <p:spPr>
-          <a:xfrm>
-            <a:off x="8993165" y="2629240"/>
-            <a:ext cx="0" cy="1456692"/>
+          <p:cNvPr id="94" name="Shape 92"/>
+          <p:cNvSpPr/>
+          <p:nvPr/>
+        </p:nvSpPr>
+        <p:spPr>
+          <a:xfrm>
+            <a:off x="8993165" y="2784008"/>
+            <a:ext cx="0" cy="1432812"/>
           </a:xfrm>
           <a:prstGeom prst="line">
             <a:avLst/>
@@ -6356,7 +6434,7 @@
           <a:noFill/>
           <a:ln w="12700">
             <a:solidFill>
-              <a:srgbClr val="9AA6AD"/>
+              <a:srgbClr val="1F6FA3"/>
             </a:solidFill>
             <a:prstDash val="solid"/>
           </a:ln>
@@ -6364,13 +6442,13 @@
       </p:sp>
       <p:sp>
         <p:nvSpPr>
-          <p:cNvPr id="94" name="Shape 92"/>
-          <p:cNvSpPr/>
-          <p:nvPr/>
-        </p:nvSpPr>
-        <p:spPr>
-          <a:xfrm>
-            <a:off x="8993165" y="4085932"/>
+          <p:cNvPr id="95" name="Shape 93"/>
+          <p:cNvSpPr/>
+          <p:nvPr/>
+        </p:nvSpPr>
+        <p:spPr>
+          <a:xfrm>
+            <a:off x="8993165" y="4216820"/>
             <a:ext cx="92691" cy="0"/>
           </a:xfrm>
           <a:prstGeom prst="line">
@@ -6379,7 +6457,7 @@
           <a:noFill/>
           <a:ln w="12700">
             <a:solidFill>
-              <a:srgbClr val="9AA6AD"/>
+              <a:srgbClr val="1F6FA3"/>
             </a:solidFill>
             <a:prstDash val="solid"/>
           </a:ln>
@@ -6387,14 +6465,14 @@
       </p:sp>
       <p:sp>
         <p:nvSpPr>
-          <p:cNvPr id="95" name="Shape 93"/>
-          <p:cNvSpPr/>
-          <p:nvPr/>
-        </p:nvSpPr>
-        <p:spPr>
-          <a:xfrm>
-            <a:off x="8993165" y="2629240"/>
-            <a:ext cx="0" cy="1954549"/>
+          <p:cNvPr id="96" name="Shape 94"/>
+          <p:cNvSpPr/>
+          <p:nvPr/>
+        </p:nvSpPr>
+        <p:spPr>
+          <a:xfrm>
+            <a:off x="8993165" y="2784008"/>
+            <a:ext cx="0" cy="1922507"/>
           </a:xfrm>
           <a:prstGeom prst="line">
             <a:avLst/>
@@ -6402,7 +6480,7 @@
           <a:noFill/>
           <a:ln w="12700">
             <a:solidFill>
-              <a:srgbClr val="9AA6AD"/>
+              <a:srgbClr val="1F6FA3"/>
             </a:solidFill>
             <a:prstDash val="solid"/>
           </a:ln>
@@ -6410,13 +6488,13 @@
       </p:sp>
       <p:sp>
         <p:nvSpPr>
-          <p:cNvPr id="96" name="Shape 94"/>
-          <p:cNvSpPr/>
-          <p:nvPr/>
-        </p:nvSpPr>
-        <p:spPr>
-          <a:xfrm>
-            <a:off x="8993165" y="4583789"/>
+          <p:cNvPr id="97" name="Shape 95"/>
+          <p:cNvSpPr/>
+          <p:nvPr/>
+        </p:nvSpPr>
+        <p:spPr>
+          <a:xfrm>
+            <a:off x="8993165" y="4706515"/>
             <a:ext cx="92691" cy="0"/>
           </a:xfrm>
           <a:prstGeom prst="line">
@@ -6425,7 +6503,7 @@
           <a:noFill/>
           <a:ln w="12700">
             <a:solidFill>
-              <a:srgbClr val="9AA6AD"/>
+              <a:srgbClr val="1F6FA3"/>
             </a:solidFill>
             <a:prstDash val="solid"/>
           </a:ln>
@@ -6433,14 +6511,14 @@
       </p:sp>
       <p:sp>
         <p:nvSpPr>
-          <p:cNvPr id="97" name="Shape 95"/>
-          <p:cNvSpPr/>
-          <p:nvPr/>
-        </p:nvSpPr>
-        <p:spPr>
-          <a:xfrm>
-            <a:off x="8993165" y="2629240"/>
-            <a:ext cx="0" cy="2452406"/>
+          <p:cNvPr id="98" name="Shape 96"/>
+          <p:cNvSpPr/>
+          <p:nvPr/>
+        </p:nvSpPr>
+        <p:spPr>
+          <a:xfrm>
+            <a:off x="8993165" y="2784008"/>
+            <a:ext cx="0" cy="2412202"/>
           </a:xfrm>
           <a:prstGeom prst="line">
             <a:avLst/>
@@ -6448,7 +6526,7 @@
           <a:noFill/>
           <a:ln w="12700">
             <a:solidFill>
-              <a:srgbClr val="9AA6AD"/>
+              <a:srgbClr val="1F6FA3"/>
             </a:solidFill>
             <a:prstDash val="solid"/>
           </a:ln>
@@ -6456,13 +6534,13 @@
       </p:sp>
       <p:sp>
         <p:nvSpPr>
-          <p:cNvPr id="98" name="Shape 96"/>
-          <p:cNvSpPr/>
-          <p:nvPr/>
-        </p:nvSpPr>
-        <p:spPr>
-          <a:xfrm>
-            <a:off x="8993165" y="5081646"/>
+          <p:cNvPr id="99" name="Shape 97"/>
+          <p:cNvSpPr/>
+          <p:nvPr/>
+        </p:nvSpPr>
+        <p:spPr>
+          <a:xfrm>
+            <a:off x="8993165" y="5196210"/>
             <a:ext cx="92691" cy="0"/>
           </a:xfrm>
           <a:prstGeom prst="line">
@@ -6471,7 +6549,7 @@
           <a:noFill/>
           <a:ln w="12700">
             <a:solidFill>
-              <a:srgbClr val="9AA6AD"/>
+              <a:srgbClr val="1F6FA3"/>
             </a:solidFill>
             <a:prstDash val="solid"/>
           </a:ln>
@@ -6479,14 +6557,14 @@
       </p:sp>
       <p:sp>
         <p:nvSpPr>
-          <p:cNvPr id="99" name="Shape 97"/>
-          <p:cNvSpPr/>
-          <p:nvPr/>
-        </p:nvSpPr>
-        <p:spPr>
-          <a:xfrm>
-            <a:off x="8993165" y="2629240"/>
-            <a:ext cx="0" cy="2950262"/>
+          <p:cNvPr id="100" name="Shape 98"/>
+          <p:cNvSpPr/>
+          <p:nvPr/>
+        </p:nvSpPr>
+        <p:spPr>
+          <a:xfrm>
+            <a:off x="8993165" y="2784008"/>
+            <a:ext cx="0" cy="2901898"/>
           </a:xfrm>
           <a:prstGeom prst="line">
             <a:avLst/>
@@ -6494,7 +6572,7 @@
           <a:noFill/>
           <a:ln w="12700">
             <a:solidFill>
-              <a:srgbClr val="9AA6AD"/>
+              <a:srgbClr val="1F6FA3"/>
             </a:solidFill>
             <a:prstDash val="solid"/>
           </a:ln>
@@ -6502,13 +6580,13 @@
       </p:sp>
       <p:sp>
         <p:nvSpPr>
-          <p:cNvPr id="100" name="Shape 98"/>
-          <p:cNvSpPr/>
-          <p:nvPr/>
-        </p:nvSpPr>
-        <p:spPr>
-          <a:xfrm>
-            <a:off x="8993165" y="5579503"/>
+          <p:cNvPr id="101" name="Shape 99"/>
+          <p:cNvSpPr/>
+          <p:nvPr/>
+        </p:nvSpPr>
+        <p:spPr>
+          <a:xfrm>
+            <a:off x="8993165" y="5685905"/>
             <a:ext cx="92691" cy="0"/>
           </a:xfrm>
           <a:prstGeom prst="line">
@@ -6517,7 +6595,7 @@
           <a:noFill/>
           <a:ln w="12700">
             <a:solidFill>
-              <a:srgbClr val="9AA6AD"/>
+              <a:srgbClr val="1F6FA3"/>
             </a:solidFill>
             <a:prstDash val="solid"/>
           </a:ln>
@@ -6525,14 +6603,14 @@
       </p:sp>
       <p:sp>
         <p:nvSpPr>
-          <p:cNvPr id="101" name="Shape 99"/>
-          <p:cNvSpPr/>
-          <p:nvPr/>
-        </p:nvSpPr>
-        <p:spPr>
-          <a:xfrm>
-            <a:off x="6094476" y="1559770"/>
-            <a:ext cx="0" cy="331905"/>
+          <p:cNvPr id="102" name="Shape 100"/>
+          <p:cNvSpPr/>
+          <p:nvPr/>
+        </p:nvSpPr>
+        <p:spPr>
+          <a:xfrm>
+            <a:off x="6094476" y="1732070"/>
+            <a:ext cx="0" cy="326463"/>
           </a:xfrm>
           <a:prstGeom prst="line">
             <a:avLst/>
@@ -6540,7 +6618,7 @@
           <a:noFill/>
           <a:ln w="12700">
             <a:solidFill>
-              <a:srgbClr val="9AA6AD"/>
+              <a:srgbClr val="1F6FA3"/>
             </a:solidFill>
             <a:prstDash val="solid"/>
           </a:ln>
@@ -6548,13 +6626,13 @@
       </p:sp>
       <p:sp>
         <p:nvSpPr>
-          <p:cNvPr id="102" name="Shape 100"/>
-          <p:cNvSpPr/>
-          <p:nvPr/>
-        </p:nvSpPr>
-        <p:spPr>
-          <a:xfrm>
-            <a:off x="6094476" y="1891674"/>
+          <p:cNvPr id="103" name="Shape 101"/>
+          <p:cNvSpPr/>
+          <p:nvPr/>
+        </p:nvSpPr>
+        <p:spPr>
+          <a:xfrm>
+            <a:off x="6094476" y="2058534"/>
             <a:ext cx="4836766" cy="0"/>
           </a:xfrm>
           <a:prstGeom prst="line">
@@ -6563,7 +6641,7 @@
           <a:noFill/>
           <a:ln w="12700">
             <a:solidFill>
-              <a:srgbClr val="9AA6AD"/>
+              <a:srgbClr val="1F6FA3"/>
             </a:solidFill>
             <a:prstDash val="solid"/>
           </a:ln>
@@ -6571,14 +6649,14 @@
       </p:sp>
       <p:sp>
         <p:nvSpPr>
-          <p:cNvPr id="103" name="Shape 101"/>
-          <p:cNvSpPr/>
-          <p:nvPr/>
-        </p:nvSpPr>
-        <p:spPr>
-          <a:xfrm>
-            <a:off x="10931242" y="1891674"/>
-            <a:ext cx="0" cy="258148"/>
+          <p:cNvPr id="104" name="Shape 102"/>
+          <p:cNvSpPr/>
+          <p:nvPr/>
+        </p:nvSpPr>
+        <p:spPr>
+          <a:xfrm>
+            <a:off x="10931242" y="2058534"/>
+            <a:ext cx="0" cy="253916"/>
           </a:xfrm>
           <a:prstGeom prst="line">
             <a:avLst/>
@@ -6586,7 +6664,7 @@
           <a:noFill/>
           <a:ln w="12700">
             <a:solidFill>
-              <a:srgbClr val="9AA6AD"/>
+              <a:srgbClr val="1F6FA3"/>
             </a:solidFill>
             <a:prstDash val="solid"/>
           </a:ln>
@@ -6594,14 +6672,14 @@
       </p:sp>
       <p:sp>
         <p:nvSpPr>
-          <p:cNvPr id="104" name="Shape 102"/>
-          <p:cNvSpPr/>
-          <p:nvPr/>
-        </p:nvSpPr>
-        <p:spPr>
-          <a:xfrm>
-            <a:off x="10375098" y="2629240"/>
-            <a:ext cx="0" cy="460979"/>
+          <p:cNvPr id="105" name="Shape 103"/>
+          <p:cNvSpPr/>
+          <p:nvPr/>
+        </p:nvSpPr>
+        <p:spPr>
+          <a:xfrm>
+            <a:off x="10375098" y="2784008"/>
+            <a:ext cx="0" cy="453421"/>
           </a:xfrm>
           <a:prstGeom prst="line">
             <a:avLst/>
@@ -6609,7 +6687,7 @@
           <a:noFill/>
           <a:ln w="12700">
             <a:solidFill>
-              <a:srgbClr val="9AA6AD"/>
+              <a:srgbClr val="1F6FA3"/>
             </a:solidFill>
             <a:prstDash val="solid"/>
           </a:ln>
@@ -6617,13 +6695,13 @@
       </p:sp>
       <p:sp>
         <p:nvSpPr>
-          <p:cNvPr id="105" name="Shape 103"/>
-          <p:cNvSpPr/>
-          <p:nvPr/>
-        </p:nvSpPr>
-        <p:spPr>
-          <a:xfrm>
-            <a:off x="10375098" y="3090219"/>
+          <p:cNvPr id="106" name="Shape 104"/>
+          <p:cNvSpPr/>
+          <p:nvPr/>
+        </p:nvSpPr>
+        <p:spPr>
+          <a:xfrm>
+            <a:off x="10375098" y="3237429"/>
             <a:ext cx="92691" cy="0"/>
           </a:xfrm>
           <a:prstGeom prst="line">
@@ -6632,7 +6710,7 @@
           <a:noFill/>
           <a:ln w="12700">
             <a:solidFill>
-              <a:srgbClr val="9AA6AD"/>
+              <a:srgbClr val="1F6FA3"/>
             </a:solidFill>
             <a:prstDash val="solid"/>
           </a:ln>
@@ -6640,14 +6718,14 @@
       </p:sp>
       <p:sp>
         <p:nvSpPr>
-          <p:cNvPr id="106" name="Shape 104"/>
-          <p:cNvSpPr/>
-          <p:nvPr/>
-        </p:nvSpPr>
-        <p:spPr>
-          <a:xfrm>
-            <a:off x="10375098" y="2629240"/>
-            <a:ext cx="0" cy="958835"/>
+          <p:cNvPr id="107" name="Shape 105"/>
+          <p:cNvSpPr/>
+          <p:nvPr/>
+        </p:nvSpPr>
+        <p:spPr>
+          <a:xfrm>
+            <a:off x="10375098" y="2784008"/>
+            <a:ext cx="0" cy="943117"/>
           </a:xfrm>
           <a:prstGeom prst="line">
             <a:avLst/>
@@ -6655,7 +6733,7 @@
           <a:noFill/>
           <a:ln w="12700">
             <a:solidFill>
-              <a:srgbClr val="9AA6AD"/>
+              <a:srgbClr val="1F6FA3"/>
             </a:solidFill>
             <a:prstDash val="solid"/>
           </a:ln>
@@ -6663,13 +6741,13 @@
       </p:sp>
       <p:sp>
         <p:nvSpPr>
-          <p:cNvPr id="107" name="Shape 105"/>
-          <p:cNvSpPr/>
-          <p:nvPr/>
-        </p:nvSpPr>
-        <p:spPr>
-          <a:xfrm>
-            <a:off x="10375098" y="3588075"/>
+          <p:cNvPr id="108" name="Shape 106"/>
+          <p:cNvSpPr/>
+          <p:nvPr/>
+        </p:nvSpPr>
+        <p:spPr>
+          <a:xfrm>
+            <a:off x="10375098" y="3727125"/>
             <a:ext cx="92691" cy="0"/>
           </a:xfrm>
           <a:prstGeom prst="line">
@@ -6678,7 +6756,7 @@
           <a:noFill/>
           <a:ln w="12700">
             <a:solidFill>
-              <a:srgbClr val="9AA6AD"/>
+              <a:srgbClr val="1F6FA3"/>
             </a:solidFill>
             <a:prstDash val="solid"/>
           </a:ln>
@@ -6686,14 +6764,14 @@
       </p:sp>
       <p:sp>
         <p:nvSpPr>
-          <p:cNvPr id="108" name="Shape 106"/>
-          <p:cNvSpPr/>
-          <p:nvPr/>
-        </p:nvSpPr>
-        <p:spPr>
-          <a:xfrm>
-            <a:off x="10375098" y="2629240"/>
-            <a:ext cx="0" cy="1456692"/>
+          <p:cNvPr id="109" name="Shape 107"/>
+          <p:cNvSpPr/>
+          <p:nvPr/>
+        </p:nvSpPr>
+        <p:spPr>
+          <a:xfrm>
+            <a:off x="10375098" y="2784008"/>
+            <a:ext cx="0" cy="1432812"/>
           </a:xfrm>
           <a:prstGeom prst="line">
             <a:avLst/>
@@ -6701,7 +6779,7 @@
           <a:noFill/>
           <a:ln w="12700">
             <a:solidFill>
-              <a:srgbClr val="9AA6AD"/>
+              <a:srgbClr val="1F6FA3"/>
             </a:solidFill>
             <a:prstDash val="solid"/>
           </a:ln>
@@ -6709,13 +6787,13 @@
       </p:sp>
       <p:sp>
         <p:nvSpPr>
-          <p:cNvPr id="109" name="Shape 107"/>
-          <p:cNvSpPr/>
-          <p:nvPr/>
-        </p:nvSpPr>
-        <p:spPr>
-          <a:xfrm>
-            <a:off x="10375098" y="4085932"/>
+          <p:cNvPr id="110" name="Shape 108"/>
+          <p:cNvSpPr/>
+          <p:nvPr/>
+        </p:nvSpPr>
+        <p:spPr>
+          <a:xfrm>
+            <a:off x="10375098" y="4216820"/>
             <a:ext cx="92691" cy="0"/>
           </a:xfrm>
           <a:prstGeom prst="line">
@@ -6724,7 +6802,7 @@
           <a:noFill/>
           <a:ln w="12700">
             <a:solidFill>
-              <a:srgbClr val="9AA6AD"/>
+              <a:srgbClr val="1F6FA3"/>
             </a:solidFill>
             <a:prstDash val="solid"/>
           </a:ln>
@@ -6732,14 +6810,14 @@
       </p:sp>
       <p:sp>
         <p:nvSpPr>
-          <p:cNvPr id="110" name="Shape 108"/>
-          <p:cNvSpPr/>
-          <p:nvPr/>
-        </p:nvSpPr>
-        <p:spPr>
-          <a:xfrm>
-            <a:off x="10375098" y="2629240"/>
-            <a:ext cx="0" cy="1954549"/>
+          <p:cNvPr id="111" name="Shape 109"/>
+          <p:cNvSpPr/>
+          <p:nvPr/>
+        </p:nvSpPr>
+        <p:spPr>
+          <a:xfrm>
+            <a:off x="10375098" y="2784008"/>
+            <a:ext cx="0" cy="1922507"/>
           </a:xfrm>
           <a:prstGeom prst="line">
             <a:avLst/>
@@ -6747,7 +6825,7 @@
           <a:noFill/>
           <a:ln w="12700">
             <a:solidFill>
-              <a:srgbClr val="9AA6AD"/>
+              <a:srgbClr val="1F6FA3"/>
             </a:solidFill>
             <a:prstDash val="solid"/>
           </a:ln>
@@ -6755,13 +6833,13 @@
       </p:sp>
       <p:sp>
         <p:nvSpPr>
-          <p:cNvPr id="111" name="Shape 109"/>
-          <p:cNvSpPr/>
-          <p:nvPr/>
-        </p:nvSpPr>
-        <p:spPr>
-          <a:xfrm>
-            <a:off x="10375098" y="4583789"/>
+          <p:cNvPr id="112" name="Shape 110"/>
+          <p:cNvSpPr/>
+          <p:nvPr/>
+        </p:nvSpPr>
+        <p:spPr>
+          <a:xfrm>
+            <a:off x="10375098" y="4706515"/>
             <a:ext cx="92691" cy="0"/>
           </a:xfrm>
           <a:prstGeom prst="line">
@@ -6770,7 +6848,7 @@
           <a:noFill/>
           <a:ln w="12700">
             <a:solidFill>
-              <a:srgbClr val="9AA6AD"/>
+              <a:srgbClr val="1F6FA3"/>
             </a:solidFill>
             <a:prstDash val="solid"/>
           </a:ln>
@@ -6778,26 +6856,26 @@
       </p:sp>
       <p:sp>
         <p:nvSpPr>
-          <p:cNvPr id="112" name="Text 110"/>
-          <p:cNvSpPr/>
-          <p:nvPr/>
-        </p:nvSpPr>
-        <p:spPr>
-          <a:xfrm>
-            <a:off x="4577720" y="1080352"/>
-            <a:ext cx="3033512" cy="479418"/>
+          <p:cNvPr id="113" name="Text 111"/>
+          <p:cNvSpPr/>
+          <p:nvPr/>
+        </p:nvSpPr>
+        <p:spPr>
+          <a:xfrm>
+            <a:off x="4577720" y="1260512"/>
+            <a:ext cx="3033512" cy="471558"/>
           </a:xfrm>
           <a:prstGeom prst="roundRect">
             <a:avLst>
-              <a:gd name="adj" fmla="val 11444"/>
+              <a:gd name="adj" fmla="val 11635"/>
             </a:avLst>
           </a:prstGeom>
           <a:solidFill>
-            <a:srgbClr val="15202A"/>
+            <a:srgbClr val="00587C"/>
           </a:solidFill>
           <a:ln w="12700">
             <a:solidFill>
-              <a:srgbClr val="15202A"/>
+              <a:srgbClr val="00587C"/>
             </a:solidFill>
           </a:ln>
         </p:spPr>
@@ -6809,7 +6887,7 @@
               <a:buNone/>
             </a:pPr>
             <a:r>
-              <a:rPr lang="en-US" sz="1200" b="1" dirty="0">
+              <a:rPr lang="en-US" sz="1300" b="1" dirty="0">
                 <a:solidFill>
                   <a:srgbClr val="FFFFFF"/>
                 </a:solidFill>
@@ -6817,51 +6895,34 @@
                 <a:ea typeface="Calibri" pitchFamily="34" charset="-122"/>
                 <a:cs typeface="Calibri" pitchFamily="34" charset="-120"/>
               </a:rPr>
-              <a:t>F0  Deliver a parcel by drone</a:t>
-            </a:r>
-            <a:endParaRPr lang="en-US" sz="1200" dirty="0"/>
-          </a:p>
-          <a:p>
-            <a:pPr algn="ctr" indent="0" marL="0">
-              <a:buNone/>
-            </a:pPr>
-            <a:r>
-              <a:rPr lang="en-US" sz="1200" b="1" dirty="0">
-                <a:solidFill>
-                  <a:srgbClr val="FFFFFF"/>
-                </a:solidFill>
-                <a:latin typeface="Calibri" pitchFamily="34" charset="0"/>
-                <a:ea typeface="Calibri" pitchFamily="34" charset="-122"/>
-                <a:cs typeface="Calibri" pitchFamily="34" charset="-120"/>
-              </a:rPr>
-              <a:t>in an urban area</a:t>
-            </a:r>
-            <a:endParaRPr lang="en-US" sz="1200" dirty="0"/>
+              <a:t>Delivery drone</a:t>
+            </a:r>
+            <a:endParaRPr lang="en-US" sz="1300" dirty="0"/>
           </a:p>
         </p:txBody>
       </p:sp>
       <p:sp>
         <p:nvSpPr>
-          <p:cNvPr id="113" name="Text 111"/>
-          <p:cNvSpPr/>
-          <p:nvPr/>
-        </p:nvSpPr>
-        <p:spPr>
-          <a:xfrm>
-            <a:off x="625728" y="2149822"/>
-            <a:ext cx="1263963" cy="479418"/>
+          <p:cNvPr id="114" name="Text 112"/>
+          <p:cNvSpPr/>
+          <p:nvPr/>
+        </p:nvSpPr>
+        <p:spPr>
+          <a:xfrm>
+            <a:off x="625728" y="2312450"/>
+            <a:ext cx="1263963" cy="471558"/>
           </a:xfrm>
           <a:prstGeom prst="roundRect">
             <a:avLst>
-              <a:gd name="adj" fmla="val 11444"/>
+              <a:gd name="adj" fmla="val 11635"/>
             </a:avLst>
           </a:prstGeom>
           <a:solidFill>
-            <a:srgbClr val="E3EEF1"/>
+            <a:srgbClr val="E1002A"/>
           </a:solidFill>
           <a:ln w="12700">
             <a:solidFill>
-              <a:srgbClr val="0E6A86"/>
+              <a:srgbClr val="E1002A"/>
             </a:solidFill>
           </a:ln>
         </p:spPr>
@@ -6875,7 +6936,7 @@
             <a:r>
               <a:rPr lang="en-US" sz="900" b="1" dirty="0">
                 <a:solidFill>
-                  <a:srgbClr val="15202A"/>
+                  <a:srgbClr val="FFFFFF"/>
                 </a:solidFill>
                 <a:latin typeface="Calibri" pitchFamily="34" charset="0"/>
                 <a:ea typeface="Calibri" pitchFamily="34" charset="-122"/>
@@ -6889,26 +6950,26 @@
       </p:sp>
       <p:sp>
         <p:nvSpPr>
-          <p:cNvPr id="114" name="Text 112"/>
-          <p:cNvSpPr/>
-          <p:nvPr/>
-        </p:nvSpPr>
-        <p:spPr>
-          <a:xfrm>
-            <a:off x="794257" y="2887388"/>
-            <a:ext cx="1095435" cy="405661"/>
+          <p:cNvPr id="115" name="Text 113"/>
+          <p:cNvSpPr/>
+          <p:nvPr/>
+        </p:nvSpPr>
+        <p:spPr>
+          <a:xfrm>
+            <a:off x="794257" y="3037924"/>
+            <a:ext cx="1095435" cy="399011"/>
           </a:xfrm>
           <a:prstGeom prst="roundRect">
             <a:avLst>
-              <a:gd name="adj" fmla="val 13525"/>
+              <a:gd name="adj" fmla="val 13750"/>
             </a:avLst>
           </a:prstGeom>
           <a:solidFill>
-            <a:srgbClr val="FFFFFF"/>
+            <a:srgbClr val="9E3200"/>
           </a:solidFill>
           <a:ln w="12700">
             <a:solidFill>
-              <a:srgbClr val="9AA6AD"/>
+              <a:srgbClr val="9E3200"/>
             </a:solidFill>
           </a:ln>
         </p:spPr>
@@ -6922,7 +6983,7 @@
             <a:r>
               <a:rPr lang="en-US" sz="750" dirty="0">
                 <a:solidFill>
-                  <a:srgbClr val="15202A"/>
+                  <a:srgbClr val="FFFFFF"/>
                 </a:solidFill>
                 <a:latin typeface="Calibri" pitchFamily="34" charset="0"/>
                 <a:ea typeface="Calibri" pitchFamily="34" charset="-122"/>
@@ -6939,7 +7000,7 @@
             <a:r>
               <a:rPr lang="en-US" sz="750" dirty="0">
                 <a:solidFill>
-                  <a:srgbClr val="15202A"/>
+                  <a:srgbClr val="FFFFFF"/>
                 </a:solidFill>
                 <a:latin typeface="Calibri" pitchFamily="34" charset="0"/>
                 <a:ea typeface="Calibri" pitchFamily="34" charset="-122"/>
@@ -6953,26 +7014,26 @@
       </p:sp>
       <p:sp>
         <p:nvSpPr>
-          <p:cNvPr id="115" name="Text 113"/>
-          <p:cNvSpPr/>
-          <p:nvPr/>
-        </p:nvSpPr>
-        <p:spPr>
-          <a:xfrm>
-            <a:off x="794257" y="3385245"/>
-            <a:ext cx="1095435" cy="405661"/>
+          <p:cNvPr id="116" name="Text 114"/>
+          <p:cNvSpPr/>
+          <p:nvPr/>
+        </p:nvSpPr>
+        <p:spPr>
+          <a:xfrm>
+            <a:off x="794257" y="3527619"/>
+            <a:ext cx="1095435" cy="399011"/>
           </a:xfrm>
           <a:prstGeom prst="roundRect">
             <a:avLst>
-              <a:gd name="adj" fmla="val 13525"/>
+              <a:gd name="adj" fmla="val 13750"/>
             </a:avLst>
           </a:prstGeom>
           <a:solidFill>
-            <a:srgbClr val="FFFFFF"/>
+            <a:srgbClr val="9E3200"/>
           </a:solidFill>
           <a:ln w="12700">
             <a:solidFill>
-              <a:srgbClr val="9AA6AD"/>
+              <a:srgbClr val="9E3200"/>
             </a:solidFill>
           </a:ln>
         </p:spPr>
@@ -6986,7 +7047,7 @@
             <a:r>
               <a:rPr lang="en-US" sz="750" dirty="0">
                 <a:solidFill>
-                  <a:srgbClr val="15202A"/>
+                  <a:srgbClr val="FFFFFF"/>
                 </a:solidFill>
                 <a:latin typeface="Calibri" pitchFamily="34" charset="0"/>
                 <a:ea typeface="Calibri" pitchFamily="34" charset="-122"/>
@@ -7000,26 +7061,26 @@
       </p:sp>
       <p:sp>
         <p:nvSpPr>
-          <p:cNvPr id="116" name="Text 114"/>
-          <p:cNvSpPr/>
-          <p:nvPr/>
-        </p:nvSpPr>
-        <p:spPr>
-          <a:xfrm>
-            <a:off x="794257" y="3883102"/>
-            <a:ext cx="1095435" cy="405661"/>
+          <p:cNvPr id="117" name="Text 115"/>
+          <p:cNvSpPr/>
+          <p:nvPr/>
+        </p:nvSpPr>
+        <p:spPr>
+          <a:xfrm>
+            <a:off x="794257" y="4017314"/>
+            <a:ext cx="1095435" cy="399011"/>
           </a:xfrm>
           <a:prstGeom prst="roundRect">
             <a:avLst>
-              <a:gd name="adj" fmla="val 13525"/>
+              <a:gd name="adj" fmla="val 13750"/>
             </a:avLst>
           </a:prstGeom>
           <a:solidFill>
-            <a:srgbClr val="FFFFFF"/>
+            <a:srgbClr val="9E3200"/>
           </a:solidFill>
           <a:ln w="12700">
             <a:solidFill>
-              <a:srgbClr val="9AA6AD"/>
+              <a:srgbClr val="9E3200"/>
             </a:solidFill>
           </a:ln>
         </p:spPr>
@@ -7033,7 +7094,7 @@
             <a:r>
               <a:rPr lang="en-US" sz="750" dirty="0">
                 <a:solidFill>
-                  <a:srgbClr val="15202A"/>
+                  <a:srgbClr val="FFFFFF"/>
                 </a:solidFill>
                 <a:latin typeface="Calibri" pitchFamily="34" charset="0"/>
                 <a:ea typeface="Calibri" pitchFamily="34" charset="-122"/>
@@ -7050,7 +7111,7 @@
             <a:r>
               <a:rPr lang="en-US" sz="750" dirty="0">
                 <a:solidFill>
-                  <a:srgbClr val="15202A"/>
+                  <a:srgbClr val="FFFFFF"/>
                 </a:solidFill>
                 <a:latin typeface="Calibri" pitchFamily="34" charset="0"/>
                 <a:ea typeface="Calibri" pitchFamily="34" charset="-122"/>
@@ -7064,26 +7125,26 @@
       </p:sp>
       <p:sp>
         <p:nvSpPr>
-          <p:cNvPr id="117" name="Text 115"/>
-          <p:cNvSpPr/>
-          <p:nvPr/>
-        </p:nvSpPr>
-        <p:spPr>
-          <a:xfrm>
-            <a:off x="794257" y="4380958"/>
-            <a:ext cx="1095435" cy="405661"/>
+          <p:cNvPr id="118" name="Text 116"/>
+          <p:cNvSpPr/>
+          <p:nvPr/>
+        </p:nvSpPr>
+        <p:spPr>
+          <a:xfrm>
+            <a:off x="794257" y="4507010"/>
+            <a:ext cx="1095435" cy="399011"/>
           </a:xfrm>
           <a:prstGeom prst="roundRect">
             <a:avLst>
-              <a:gd name="adj" fmla="val 13525"/>
+              <a:gd name="adj" fmla="val 13750"/>
             </a:avLst>
           </a:prstGeom>
           <a:solidFill>
-            <a:srgbClr val="FFFFFF"/>
+            <a:srgbClr val="9E3200"/>
           </a:solidFill>
           <a:ln w="12700">
             <a:solidFill>
-              <a:srgbClr val="9AA6AD"/>
+              <a:srgbClr val="9E3200"/>
             </a:solidFill>
           </a:ln>
         </p:spPr>
@@ -7097,7 +7158,7 @@
             <a:r>
               <a:rPr lang="en-US" sz="750" dirty="0">
                 <a:solidFill>
-                  <a:srgbClr val="15202A"/>
+                  <a:srgbClr val="FFFFFF"/>
                 </a:solidFill>
                 <a:latin typeface="Calibri" pitchFamily="34" charset="0"/>
                 <a:ea typeface="Calibri" pitchFamily="34" charset="-122"/>
@@ -7114,7 +7175,7 @@
             <a:r>
               <a:rPr lang="en-US" sz="750" dirty="0">
                 <a:solidFill>
-                  <a:srgbClr val="15202A"/>
+                  <a:srgbClr val="FFFFFF"/>
                 </a:solidFill>
                 <a:latin typeface="Calibri" pitchFamily="34" charset="0"/>
                 <a:ea typeface="Calibri" pitchFamily="34" charset="-122"/>
@@ -7128,26 +7189,26 @@
       </p:sp>
       <p:sp>
         <p:nvSpPr>
-          <p:cNvPr id="118" name="Text 116"/>
-          <p:cNvSpPr/>
-          <p:nvPr/>
-        </p:nvSpPr>
-        <p:spPr>
-          <a:xfrm>
-            <a:off x="2007662" y="2149822"/>
-            <a:ext cx="1263963" cy="479418"/>
+          <p:cNvPr id="119" name="Text 117"/>
+          <p:cNvSpPr/>
+          <p:nvPr/>
+        </p:nvSpPr>
+        <p:spPr>
+          <a:xfrm>
+            <a:off x="2007662" y="2312450"/>
+            <a:ext cx="1263963" cy="471558"/>
           </a:xfrm>
           <a:prstGeom prst="roundRect">
             <a:avLst>
-              <a:gd name="adj" fmla="val 11444"/>
+              <a:gd name="adj" fmla="val 11635"/>
             </a:avLst>
           </a:prstGeom>
           <a:solidFill>
-            <a:srgbClr val="E3EEF1"/>
+            <a:srgbClr val="E1002A"/>
           </a:solidFill>
           <a:ln w="12700">
             <a:solidFill>
-              <a:srgbClr val="0E6A86"/>
+              <a:srgbClr val="E1002A"/>
             </a:solidFill>
           </a:ln>
         </p:spPr>
@@ -7161,7 +7222,7 @@
             <a:r>
               <a:rPr lang="en-US" sz="900" b="1" dirty="0">
                 <a:solidFill>
-                  <a:srgbClr val="15202A"/>
+                  <a:srgbClr val="FFFFFF"/>
                 </a:solidFill>
                 <a:latin typeface="Calibri" pitchFamily="34" charset="0"/>
                 <a:ea typeface="Calibri" pitchFamily="34" charset="-122"/>
@@ -7175,26 +7236,26 @@
       </p:sp>
       <p:sp>
         <p:nvSpPr>
-          <p:cNvPr id="119" name="Text 117"/>
-          <p:cNvSpPr/>
-          <p:nvPr/>
-        </p:nvSpPr>
-        <p:spPr>
-          <a:xfrm>
-            <a:off x="2176190" y="2887388"/>
-            <a:ext cx="1095435" cy="405661"/>
+          <p:cNvPr id="120" name="Text 118"/>
+          <p:cNvSpPr/>
+          <p:nvPr/>
+        </p:nvSpPr>
+        <p:spPr>
+          <a:xfrm>
+            <a:off x="2176190" y="3037924"/>
+            <a:ext cx="1095435" cy="399011"/>
           </a:xfrm>
           <a:prstGeom prst="roundRect">
             <a:avLst>
-              <a:gd name="adj" fmla="val 13525"/>
+              <a:gd name="adj" fmla="val 13750"/>
             </a:avLst>
           </a:prstGeom>
           <a:solidFill>
-            <a:srgbClr val="FFFFFF"/>
+            <a:srgbClr val="9E3200"/>
           </a:solidFill>
           <a:ln w="12700">
             <a:solidFill>
-              <a:srgbClr val="9AA6AD"/>
+              <a:srgbClr val="9E3200"/>
             </a:solidFill>
           </a:ln>
         </p:spPr>
@@ -7208,7 +7269,7 @@
             <a:r>
               <a:rPr lang="en-US" sz="750" dirty="0">
                 <a:solidFill>
-                  <a:srgbClr val="15202A"/>
+                  <a:srgbClr val="FFFFFF"/>
                 </a:solidFill>
                 <a:latin typeface="Calibri" pitchFamily="34" charset="0"/>
                 <a:ea typeface="Calibri" pitchFamily="34" charset="-122"/>
@@ -7225,7 +7286,7 @@
             <a:r>
               <a:rPr lang="en-US" sz="750" dirty="0">
                 <a:solidFill>
-                  <a:srgbClr val="15202A"/>
+                  <a:srgbClr val="FFFFFF"/>
                 </a:solidFill>
                 <a:latin typeface="Calibri" pitchFamily="34" charset="0"/>
                 <a:ea typeface="Calibri" pitchFamily="34" charset="-122"/>
@@ -7239,26 +7300,26 @@
       </p:sp>
       <p:sp>
         <p:nvSpPr>
-          <p:cNvPr id="120" name="Text 118"/>
-          <p:cNvSpPr/>
-          <p:nvPr/>
-        </p:nvSpPr>
-        <p:spPr>
-          <a:xfrm>
-            <a:off x="2176190" y="3385245"/>
-            <a:ext cx="1095435" cy="405661"/>
+          <p:cNvPr id="121" name="Text 119"/>
+          <p:cNvSpPr/>
+          <p:nvPr/>
+        </p:nvSpPr>
+        <p:spPr>
+          <a:xfrm>
+            <a:off x="2176190" y="3527619"/>
+            <a:ext cx="1095435" cy="399011"/>
           </a:xfrm>
           <a:prstGeom prst="roundRect">
             <a:avLst>
-              <a:gd name="adj" fmla="val 13525"/>
+              <a:gd name="adj" fmla="val 13750"/>
             </a:avLst>
           </a:prstGeom>
           <a:solidFill>
-            <a:srgbClr val="FFFFFF"/>
+            <a:srgbClr val="9E3200"/>
           </a:solidFill>
           <a:ln w="12700">
             <a:solidFill>
-              <a:srgbClr val="9AA6AD"/>
+              <a:srgbClr val="9E3200"/>
             </a:solidFill>
           </a:ln>
         </p:spPr>
@@ -7272,7 +7333,7 @@
             <a:r>
               <a:rPr lang="en-US" sz="750" dirty="0">
                 <a:solidFill>
-                  <a:srgbClr val="15202A"/>
+                  <a:srgbClr val="FFFFFF"/>
                 </a:solidFill>
                 <a:latin typeface="Calibri" pitchFamily="34" charset="0"/>
                 <a:ea typeface="Calibri" pitchFamily="34" charset="-122"/>
@@ -7289,7 +7350,7 @@
             <a:r>
               <a:rPr lang="en-US" sz="750" dirty="0">
                 <a:solidFill>
-                  <a:srgbClr val="15202A"/>
+                  <a:srgbClr val="FFFFFF"/>
                 </a:solidFill>
                 <a:latin typeface="Calibri" pitchFamily="34" charset="0"/>
                 <a:ea typeface="Calibri" pitchFamily="34" charset="-122"/>
@@ -7303,26 +7364,26 @@
       </p:sp>
       <p:sp>
         <p:nvSpPr>
-          <p:cNvPr id="121" name="Text 119"/>
-          <p:cNvSpPr/>
-          <p:nvPr/>
-        </p:nvSpPr>
-        <p:spPr>
-          <a:xfrm>
-            <a:off x="2176190" y="3883102"/>
-            <a:ext cx="1095435" cy="405661"/>
+          <p:cNvPr id="122" name="Text 120"/>
+          <p:cNvSpPr/>
+          <p:nvPr/>
+        </p:nvSpPr>
+        <p:spPr>
+          <a:xfrm>
+            <a:off x="2176190" y="4017314"/>
+            <a:ext cx="1095435" cy="399011"/>
           </a:xfrm>
           <a:prstGeom prst="roundRect">
             <a:avLst>
-              <a:gd name="adj" fmla="val 13525"/>
+              <a:gd name="adj" fmla="val 13750"/>
             </a:avLst>
           </a:prstGeom>
           <a:solidFill>
-            <a:srgbClr val="FFFFFF"/>
+            <a:srgbClr val="9E3200"/>
           </a:solidFill>
           <a:ln w="12700">
             <a:solidFill>
-              <a:srgbClr val="9AA6AD"/>
+              <a:srgbClr val="9E3200"/>
             </a:solidFill>
           </a:ln>
         </p:spPr>
@@ -7336,7 +7397,7 @@
             <a:r>
               <a:rPr lang="en-US" sz="750" dirty="0">
                 <a:solidFill>
-                  <a:srgbClr val="15202A"/>
+                  <a:srgbClr val="FFFFFF"/>
                 </a:solidFill>
                 <a:latin typeface="Calibri" pitchFamily="34" charset="0"/>
                 <a:ea typeface="Calibri" pitchFamily="34" charset="-122"/>
@@ -7353,7 +7414,7 @@
             <a:r>
               <a:rPr lang="en-US" sz="750" dirty="0">
                 <a:solidFill>
-                  <a:srgbClr val="15202A"/>
+                  <a:srgbClr val="FFFFFF"/>
                 </a:solidFill>
                 <a:latin typeface="Calibri" pitchFamily="34" charset="0"/>
                 <a:ea typeface="Calibri" pitchFamily="34" charset="-122"/>
@@ -7367,26 +7428,26 @@
       </p:sp>
       <p:sp>
         <p:nvSpPr>
-          <p:cNvPr id="122" name="Text 120"/>
-          <p:cNvSpPr/>
-          <p:nvPr/>
-        </p:nvSpPr>
-        <p:spPr>
-          <a:xfrm>
-            <a:off x="2176190" y="4380958"/>
-            <a:ext cx="1095435" cy="405661"/>
+          <p:cNvPr id="123" name="Text 121"/>
+          <p:cNvSpPr/>
+          <p:nvPr/>
+        </p:nvSpPr>
+        <p:spPr>
+          <a:xfrm>
+            <a:off x="2176190" y="4507010"/>
+            <a:ext cx="1095435" cy="399011"/>
           </a:xfrm>
           <a:prstGeom prst="roundRect">
             <a:avLst>
-              <a:gd name="adj" fmla="val 13525"/>
+              <a:gd name="adj" fmla="val 13750"/>
             </a:avLst>
           </a:prstGeom>
           <a:solidFill>
-            <a:srgbClr val="FFFFFF"/>
+            <a:srgbClr val="9E3200"/>
           </a:solidFill>
           <a:ln w="12700">
             <a:solidFill>
-              <a:srgbClr val="9AA6AD"/>
+              <a:srgbClr val="9E3200"/>
             </a:solidFill>
           </a:ln>
         </p:spPr>
@@ -7400,7 +7461,7 @@
             <a:r>
               <a:rPr lang="en-US" sz="750" dirty="0">
                 <a:solidFill>
-                  <a:srgbClr val="15202A"/>
+                  <a:srgbClr val="FFFFFF"/>
                 </a:solidFill>
                 <a:latin typeface="Calibri" pitchFamily="34" charset="0"/>
                 <a:ea typeface="Calibri" pitchFamily="34" charset="-122"/>
@@ -7417,7 +7478,7 @@
             <a:r>
               <a:rPr lang="en-US" sz="750" dirty="0">
                 <a:solidFill>
-                  <a:srgbClr val="15202A"/>
+                  <a:srgbClr val="FFFFFF"/>
                 </a:solidFill>
                 <a:latin typeface="Calibri" pitchFamily="34" charset="0"/>
                 <a:ea typeface="Calibri" pitchFamily="34" charset="-122"/>
@@ -7431,26 +7492,26 @@
       </p:sp>
       <p:sp>
         <p:nvSpPr>
-          <p:cNvPr id="123" name="Text 121"/>
-          <p:cNvSpPr/>
-          <p:nvPr/>
-        </p:nvSpPr>
-        <p:spPr>
-          <a:xfrm>
-            <a:off x="2176190" y="4878815"/>
-            <a:ext cx="1095435" cy="405661"/>
+          <p:cNvPr id="124" name="Text 122"/>
+          <p:cNvSpPr/>
+          <p:nvPr/>
+        </p:nvSpPr>
+        <p:spPr>
+          <a:xfrm>
+            <a:off x="2176190" y="4996705"/>
+            <a:ext cx="1095435" cy="399011"/>
           </a:xfrm>
           <a:prstGeom prst="roundRect">
             <a:avLst>
-              <a:gd name="adj" fmla="val 13525"/>
+              <a:gd name="adj" fmla="val 13750"/>
             </a:avLst>
           </a:prstGeom>
           <a:solidFill>
-            <a:srgbClr val="FFFFFF"/>
+            <a:srgbClr val="9E3200"/>
           </a:solidFill>
           <a:ln w="12700">
             <a:solidFill>
-              <a:srgbClr val="9AA6AD"/>
+              <a:srgbClr val="9E3200"/>
             </a:solidFill>
           </a:ln>
         </p:spPr>
@@ -7464,7 +7525,7 @@
             <a:r>
               <a:rPr lang="en-US" sz="750" dirty="0">
                 <a:solidFill>
-                  <a:srgbClr val="15202A"/>
+                  <a:srgbClr val="FFFFFF"/>
                 </a:solidFill>
                 <a:latin typeface="Calibri" pitchFamily="34" charset="0"/>
                 <a:ea typeface="Calibri" pitchFamily="34" charset="-122"/>
@@ -7481,7 +7542,7 @@
             <a:r>
               <a:rPr lang="en-US" sz="750" dirty="0">
                 <a:solidFill>
-                  <a:srgbClr val="15202A"/>
+                  <a:srgbClr val="FFFFFF"/>
                 </a:solidFill>
                 <a:latin typeface="Calibri" pitchFamily="34" charset="0"/>
                 <a:ea typeface="Calibri" pitchFamily="34" charset="-122"/>
@@ -7495,26 +7556,26 @@
       </p:sp>
       <p:sp>
         <p:nvSpPr>
-          <p:cNvPr id="124" name="Text 122"/>
-          <p:cNvSpPr/>
-          <p:nvPr/>
-        </p:nvSpPr>
-        <p:spPr>
-          <a:xfrm>
-            <a:off x="2176190" y="5376672"/>
-            <a:ext cx="1095435" cy="405661"/>
+          <p:cNvPr id="125" name="Text 123"/>
+          <p:cNvSpPr/>
+          <p:nvPr/>
+        </p:nvSpPr>
+        <p:spPr>
+          <a:xfrm>
+            <a:off x="2176190" y="5486400"/>
+            <a:ext cx="1095435" cy="399011"/>
           </a:xfrm>
           <a:prstGeom prst="roundRect">
             <a:avLst>
-              <a:gd name="adj" fmla="val 13525"/>
+              <a:gd name="adj" fmla="val 13750"/>
             </a:avLst>
           </a:prstGeom>
           <a:solidFill>
-            <a:srgbClr val="FFFFFF"/>
+            <a:srgbClr val="9E3200"/>
           </a:solidFill>
           <a:ln w="12700">
             <a:solidFill>
-              <a:srgbClr val="9AA6AD"/>
+              <a:srgbClr val="9E3200"/>
             </a:solidFill>
           </a:ln>
         </p:spPr>
@@ -7528,7 +7589,7 @@
             <a:r>
               <a:rPr lang="en-US" sz="750" dirty="0">
                 <a:solidFill>
-                  <a:srgbClr val="15202A"/>
+                  <a:srgbClr val="FFFFFF"/>
                 </a:solidFill>
                 <a:latin typeface="Calibri" pitchFamily="34" charset="0"/>
                 <a:ea typeface="Calibri" pitchFamily="34" charset="-122"/>
@@ -7545,7 +7606,7 @@
             <a:r>
               <a:rPr lang="en-US" sz="750" dirty="0">
                 <a:solidFill>
-                  <a:srgbClr val="15202A"/>
+                  <a:srgbClr val="FFFFFF"/>
                 </a:solidFill>
                 <a:latin typeface="Calibri" pitchFamily="34" charset="0"/>
                 <a:ea typeface="Calibri" pitchFamily="34" charset="-122"/>
@@ -7559,26 +7620,26 @@
       </p:sp>
       <p:sp>
         <p:nvSpPr>
-          <p:cNvPr id="125" name="Text 123"/>
-          <p:cNvSpPr/>
-          <p:nvPr/>
-        </p:nvSpPr>
-        <p:spPr>
-          <a:xfrm>
-            <a:off x="2176190" y="5874529"/>
-            <a:ext cx="1095435" cy="405661"/>
+          <p:cNvPr id="126" name="Text 124"/>
+          <p:cNvSpPr/>
+          <p:nvPr/>
+        </p:nvSpPr>
+        <p:spPr>
+          <a:xfrm>
+            <a:off x="2176190" y="5976095"/>
+            <a:ext cx="1095435" cy="399011"/>
           </a:xfrm>
           <a:prstGeom prst="roundRect">
             <a:avLst>
-              <a:gd name="adj" fmla="val 13525"/>
+              <a:gd name="adj" fmla="val 13750"/>
             </a:avLst>
           </a:prstGeom>
           <a:solidFill>
-            <a:srgbClr val="FFFFFF"/>
+            <a:srgbClr val="9E3200"/>
           </a:solidFill>
           <a:ln w="12700">
             <a:solidFill>
-              <a:srgbClr val="9AA6AD"/>
+              <a:srgbClr val="9E3200"/>
             </a:solidFill>
           </a:ln>
         </p:spPr>
@@ -7592,7 +7653,7 @@
             <a:r>
               <a:rPr lang="en-US" sz="750" dirty="0">
                 <a:solidFill>
-                  <a:srgbClr val="15202A"/>
+                  <a:srgbClr val="FFFFFF"/>
                 </a:solidFill>
                 <a:latin typeface="Calibri" pitchFamily="34" charset="0"/>
                 <a:ea typeface="Calibri" pitchFamily="34" charset="-122"/>
@@ -7609,7 +7670,7 @@
             <a:r>
               <a:rPr lang="en-US" sz="750" dirty="0">
                 <a:solidFill>
-                  <a:srgbClr val="15202A"/>
+                  <a:srgbClr val="FFFFFF"/>
                 </a:solidFill>
                 <a:latin typeface="Calibri" pitchFamily="34" charset="0"/>
                 <a:ea typeface="Calibri" pitchFamily="34" charset="-122"/>
@@ -7623,26 +7684,26 @@
       </p:sp>
       <p:sp>
         <p:nvSpPr>
-          <p:cNvPr id="126" name="Text 124"/>
-          <p:cNvSpPr/>
-          <p:nvPr/>
-        </p:nvSpPr>
-        <p:spPr>
-          <a:xfrm>
-            <a:off x="3389595" y="2149822"/>
-            <a:ext cx="1263963" cy="479418"/>
+          <p:cNvPr id="127" name="Text 125"/>
+          <p:cNvSpPr/>
+          <p:nvPr/>
+        </p:nvSpPr>
+        <p:spPr>
+          <a:xfrm>
+            <a:off x="3389595" y="2312450"/>
+            <a:ext cx="1263963" cy="471558"/>
           </a:xfrm>
           <a:prstGeom prst="roundRect">
             <a:avLst>
-              <a:gd name="adj" fmla="val 11444"/>
+              <a:gd name="adj" fmla="val 11635"/>
             </a:avLst>
           </a:prstGeom>
           <a:solidFill>
-            <a:srgbClr val="E3EEF1"/>
+            <a:srgbClr val="E1002A"/>
           </a:solidFill>
           <a:ln w="12700">
             <a:solidFill>
-              <a:srgbClr val="0E6A86"/>
+              <a:srgbClr val="E1002A"/>
             </a:solidFill>
           </a:ln>
         </p:spPr>
@@ -7656,7 +7717,7 @@
             <a:r>
               <a:rPr lang="en-US" sz="900" b="1" dirty="0">
                 <a:solidFill>
-                  <a:srgbClr val="15202A"/>
+                  <a:srgbClr val="FFFFFF"/>
                 </a:solidFill>
                 <a:latin typeface="Calibri" pitchFamily="34" charset="0"/>
                 <a:ea typeface="Calibri" pitchFamily="34" charset="-122"/>
@@ -7673,7 +7734,7 @@
             <a:r>
               <a:rPr lang="en-US" sz="900" b="1" dirty="0">
                 <a:solidFill>
-                  <a:srgbClr val="15202A"/>
+                  <a:srgbClr val="FFFFFF"/>
                 </a:solidFill>
                 <a:latin typeface="Calibri" pitchFamily="34" charset="0"/>
                 <a:ea typeface="Calibri" pitchFamily="34" charset="-122"/>
@@ -7687,26 +7748,26 @@
       </p:sp>
       <p:sp>
         <p:nvSpPr>
-          <p:cNvPr id="127" name="Text 125"/>
-          <p:cNvSpPr/>
-          <p:nvPr/>
-        </p:nvSpPr>
-        <p:spPr>
-          <a:xfrm>
-            <a:off x="3558123" y="2887388"/>
-            <a:ext cx="1095435" cy="405661"/>
+          <p:cNvPr id="128" name="Text 126"/>
+          <p:cNvSpPr/>
+          <p:nvPr/>
+        </p:nvSpPr>
+        <p:spPr>
+          <a:xfrm>
+            <a:off x="3558123" y="3037924"/>
+            <a:ext cx="1095435" cy="399011"/>
           </a:xfrm>
           <a:prstGeom prst="roundRect">
             <a:avLst>
-              <a:gd name="adj" fmla="val 13525"/>
+              <a:gd name="adj" fmla="val 13750"/>
             </a:avLst>
           </a:prstGeom>
           <a:solidFill>
-            <a:srgbClr val="FFFFFF"/>
+            <a:srgbClr val="9E3200"/>
           </a:solidFill>
           <a:ln w="12700">
             <a:solidFill>
-              <a:srgbClr val="9AA6AD"/>
+              <a:srgbClr val="9E3200"/>
             </a:solidFill>
           </a:ln>
         </p:spPr>
@@ -7720,7 +7781,7 @@
             <a:r>
               <a:rPr lang="en-US" sz="750" dirty="0">
                 <a:solidFill>
-                  <a:srgbClr val="15202A"/>
+                  <a:srgbClr val="FFFFFF"/>
                 </a:solidFill>
                 <a:latin typeface="Calibri" pitchFamily="34" charset="0"/>
                 <a:ea typeface="Calibri" pitchFamily="34" charset="-122"/>
@@ -7734,26 +7795,26 @@
       </p:sp>
       <p:sp>
         <p:nvSpPr>
-          <p:cNvPr id="128" name="Text 126"/>
-          <p:cNvSpPr/>
-          <p:nvPr/>
-        </p:nvSpPr>
-        <p:spPr>
-          <a:xfrm>
-            <a:off x="3558123" y="3385245"/>
-            <a:ext cx="1095435" cy="405661"/>
+          <p:cNvPr id="129" name="Text 127"/>
+          <p:cNvSpPr/>
+          <p:nvPr/>
+        </p:nvSpPr>
+        <p:spPr>
+          <a:xfrm>
+            <a:off x="3558123" y="3527619"/>
+            <a:ext cx="1095435" cy="399011"/>
           </a:xfrm>
           <a:prstGeom prst="roundRect">
             <a:avLst>
-              <a:gd name="adj" fmla="val 13525"/>
+              <a:gd name="adj" fmla="val 13750"/>
             </a:avLst>
           </a:prstGeom>
           <a:solidFill>
-            <a:srgbClr val="FFFFFF"/>
+            <a:srgbClr val="9E3200"/>
           </a:solidFill>
           <a:ln w="12700">
             <a:solidFill>
-              <a:srgbClr val="9AA6AD"/>
+              <a:srgbClr val="9E3200"/>
             </a:solidFill>
           </a:ln>
         </p:spPr>
@@ -7767,7 +7828,7 @@
             <a:r>
               <a:rPr lang="en-US" sz="750" dirty="0">
                 <a:solidFill>
-                  <a:srgbClr val="15202A"/>
+                  <a:srgbClr val="FFFFFF"/>
                 </a:solidFill>
                 <a:latin typeface="Calibri" pitchFamily="34" charset="0"/>
                 <a:ea typeface="Calibri" pitchFamily="34" charset="-122"/>
@@ -7781,26 +7842,26 @@
       </p:sp>
       <p:sp>
         <p:nvSpPr>
-          <p:cNvPr id="129" name="Text 127"/>
-          <p:cNvSpPr/>
-          <p:nvPr/>
-        </p:nvSpPr>
-        <p:spPr>
-          <a:xfrm>
-            <a:off x="3558123" y="3883102"/>
-            <a:ext cx="1095435" cy="405661"/>
+          <p:cNvPr id="130" name="Text 128"/>
+          <p:cNvSpPr/>
+          <p:nvPr/>
+        </p:nvSpPr>
+        <p:spPr>
+          <a:xfrm>
+            <a:off x="3558123" y="4017314"/>
+            <a:ext cx="1095435" cy="399011"/>
           </a:xfrm>
           <a:prstGeom prst="roundRect">
             <a:avLst>
-              <a:gd name="adj" fmla="val 13525"/>
+              <a:gd name="adj" fmla="val 13750"/>
             </a:avLst>
           </a:prstGeom>
           <a:solidFill>
-            <a:srgbClr val="FFFFFF"/>
+            <a:srgbClr val="9E3200"/>
           </a:solidFill>
           <a:ln w="12700">
             <a:solidFill>
-              <a:srgbClr val="9AA6AD"/>
+              <a:srgbClr val="9E3200"/>
             </a:solidFill>
           </a:ln>
         </p:spPr>
@@ -7814,7 +7875,7 @@
             <a:r>
               <a:rPr lang="en-US" sz="750" dirty="0">
                 <a:solidFill>
-                  <a:srgbClr val="15202A"/>
+                  <a:srgbClr val="FFFFFF"/>
                 </a:solidFill>
                 <a:latin typeface="Calibri" pitchFamily="34" charset="0"/>
                 <a:ea typeface="Calibri" pitchFamily="34" charset="-122"/>
@@ -7828,26 +7889,26 @@
       </p:sp>
       <p:sp>
         <p:nvSpPr>
-          <p:cNvPr id="130" name="Text 128"/>
-          <p:cNvSpPr/>
-          <p:nvPr/>
-        </p:nvSpPr>
-        <p:spPr>
-          <a:xfrm>
-            <a:off x="3558123" y="4380958"/>
-            <a:ext cx="1095435" cy="405661"/>
+          <p:cNvPr id="131" name="Text 129"/>
+          <p:cNvSpPr/>
+          <p:nvPr/>
+        </p:nvSpPr>
+        <p:spPr>
+          <a:xfrm>
+            <a:off x="3558123" y="4507010"/>
+            <a:ext cx="1095435" cy="399011"/>
           </a:xfrm>
           <a:prstGeom prst="roundRect">
             <a:avLst>
-              <a:gd name="adj" fmla="val 13525"/>
+              <a:gd name="adj" fmla="val 13750"/>
             </a:avLst>
           </a:prstGeom>
           <a:solidFill>
-            <a:srgbClr val="FFFFFF"/>
+            <a:srgbClr val="9E3200"/>
           </a:solidFill>
           <a:ln w="12700">
             <a:solidFill>
-              <a:srgbClr val="9AA6AD"/>
+              <a:srgbClr val="9E3200"/>
             </a:solidFill>
           </a:ln>
         </p:spPr>
@@ -7861,7 +7922,7 @@
             <a:r>
               <a:rPr lang="en-US" sz="750" dirty="0">
                 <a:solidFill>
-                  <a:srgbClr val="15202A"/>
+                  <a:srgbClr val="FFFFFF"/>
                 </a:solidFill>
                 <a:latin typeface="Calibri" pitchFamily="34" charset="0"/>
                 <a:ea typeface="Calibri" pitchFamily="34" charset="-122"/>
@@ -7875,26 +7936,26 @@
       </p:sp>
       <p:sp>
         <p:nvSpPr>
-          <p:cNvPr id="131" name="Text 129"/>
-          <p:cNvSpPr/>
-          <p:nvPr/>
-        </p:nvSpPr>
-        <p:spPr>
-          <a:xfrm>
-            <a:off x="3558123" y="4878815"/>
-            <a:ext cx="1095435" cy="405661"/>
+          <p:cNvPr id="132" name="Text 130"/>
+          <p:cNvSpPr/>
+          <p:nvPr/>
+        </p:nvSpPr>
+        <p:spPr>
+          <a:xfrm>
+            <a:off x="3558123" y="4996705"/>
+            <a:ext cx="1095435" cy="399011"/>
           </a:xfrm>
           <a:prstGeom prst="roundRect">
             <a:avLst>
-              <a:gd name="adj" fmla="val 13525"/>
+              <a:gd name="adj" fmla="val 13750"/>
             </a:avLst>
           </a:prstGeom>
           <a:solidFill>
-            <a:srgbClr val="FFFFFF"/>
+            <a:srgbClr val="9E3200"/>
           </a:solidFill>
           <a:ln w="12700">
             <a:solidFill>
-              <a:srgbClr val="9AA6AD"/>
+              <a:srgbClr val="9E3200"/>
             </a:solidFill>
           </a:ln>
         </p:spPr>
@@ -7908,7 +7969,7 @@
             <a:r>
               <a:rPr lang="en-US" sz="750" dirty="0">
                 <a:solidFill>
-                  <a:srgbClr val="15202A"/>
+                  <a:srgbClr val="FFFFFF"/>
                 </a:solidFill>
                 <a:latin typeface="Calibri" pitchFamily="34" charset="0"/>
                 <a:ea typeface="Calibri" pitchFamily="34" charset="-122"/>
@@ -7922,26 +7983,26 @@
       </p:sp>
       <p:sp>
         <p:nvSpPr>
-          <p:cNvPr id="132" name="Text 130"/>
-          <p:cNvSpPr/>
-          <p:nvPr/>
-        </p:nvSpPr>
-        <p:spPr>
-          <a:xfrm>
-            <a:off x="3558123" y="5376672"/>
-            <a:ext cx="1095435" cy="405661"/>
+          <p:cNvPr id="133" name="Text 131"/>
+          <p:cNvSpPr/>
+          <p:nvPr/>
+        </p:nvSpPr>
+        <p:spPr>
+          <a:xfrm>
+            <a:off x="3558123" y="5486400"/>
+            <a:ext cx="1095435" cy="399011"/>
           </a:xfrm>
           <a:prstGeom prst="roundRect">
             <a:avLst>
-              <a:gd name="adj" fmla="val 13525"/>
+              <a:gd name="adj" fmla="val 13750"/>
             </a:avLst>
           </a:prstGeom>
           <a:solidFill>
-            <a:srgbClr val="FFFFFF"/>
+            <a:srgbClr val="9E3200"/>
           </a:solidFill>
           <a:ln w="12700">
             <a:solidFill>
-              <a:srgbClr val="9AA6AD"/>
+              <a:srgbClr val="9E3200"/>
             </a:solidFill>
           </a:ln>
         </p:spPr>
@@ -7955,7 +8016,7 @@
             <a:r>
               <a:rPr lang="en-US" sz="750" dirty="0">
                 <a:solidFill>
-                  <a:srgbClr val="15202A"/>
+                  <a:srgbClr val="FFFFFF"/>
                 </a:solidFill>
                 <a:latin typeface="Calibri" pitchFamily="34" charset="0"/>
                 <a:ea typeface="Calibri" pitchFamily="34" charset="-122"/>
@@ -7972,7 +8033,7 @@
             <a:r>
               <a:rPr lang="en-US" sz="750" dirty="0">
                 <a:solidFill>
-                  <a:srgbClr val="15202A"/>
+                  <a:srgbClr val="FFFFFF"/>
                 </a:solidFill>
                 <a:latin typeface="Calibri" pitchFamily="34" charset="0"/>
                 <a:ea typeface="Calibri" pitchFamily="34" charset="-122"/>
@@ -7986,26 +8047,26 @@
       </p:sp>
       <p:sp>
         <p:nvSpPr>
-          <p:cNvPr id="133" name="Text 131"/>
-          <p:cNvSpPr/>
-          <p:nvPr/>
-        </p:nvSpPr>
-        <p:spPr>
-          <a:xfrm>
-            <a:off x="4771528" y="2149822"/>
-            <a:ext cx="1263963" cy="479418"/>
+          <p:cNvPr id="134" name="Text 132"/>
+          <p:cNvSpPr/>
+          <p:nvPr/>
+        </p:nvSpPr>
+        <p:spPr>
+          <a:xfrm>
+            <a:off x="4771528" y="2312450"/>
+            <a:ext cx="1263963" cy="471558"/>
           </a:xfrm>
           <a:prstGeom prst="roundRect">
             <a:avLst>
-              <a:gd name="adj" fmla="val 11444"/>
+              <a:gd name="adj" fmla="val 11635"/>
             </a:avLst>
           </a:prstGeom>
           <a:solidFill>
-            <a:srgbClr val="E3EEF1"/>
+            <a:srgbClr val="E1002A"/>
           </a:solidFill>
           <a:ln w="12700">
             <a:solidFill>
-              <a:srgbClr val="0E6A86"/>
+              <a:srgbClr val="E1002A"/>
             </a:solidFill>
           </a:ln>
         </p:spPr>
@@ -8019,7 +8080,7 @@
             <a:r>
               <a:rPr lang="en-US" sz="900" b="1" dirty="0">
                 <a:solidFill>
-                  <a:srgbClr val="15202A"/>
+                  <a:srgbClr val="FFFFFF"/>
                 </a:solidFill>
                 <a:latin typeface="Calibri" pitchFamily="34" charset="0"/>
                 <a:ea typeface="Calibri" pitchFamily="34" charset="-122"/>
@@ -8033,26 +8094,26 @@
       </p:sp>
       <p:sp>
         <p:nvSpPr>
-          <p:cNvPr id="134" name="Text 132"/>
-          <p:cNvSpPr/>
-          <p:nvPr/>
-        </p:nvSpPr>
-        <p:spPr>
-          <a:xfrm>
-            <a:off x="4940056" y="2887388"/>
-            <a:ext cx="1095435" cy="405661"/>
+          <p:cNvPr id="135" name="Text 133"/>
+          <p:cNvSpPr/>
+          <p:nvPr/>
+        </p:nvSpPr>
+        <p:spPr>
+          <a:xfrm>
+            <a:off x="4940056" y="3037924"/>
+            <a:ext cx="1095435" cy="399011"/>
           </a:xfrm>
           <a:prstGeom prst="roundRect">
             <a:avLst>
-              <a:gd name="adj" fmla="val 13525"/>
+              <a:gd name="adj" fmla="val 13750"/>
             </a:avLst>
           </a:prstGeom>
           <a:solidFill>
-            <a:srgbClr val="FFFFFF"/>
+            <a:srgbClr val="9E3200"/>
           </a:solidFill>
           <a:ln w="12700">
             <a:solidFill>
-              <a:srgbClr val="9AA6AD"/>
+              <a:srgbClr val="9E3200"/>
             </a:solidFill>
           </a:ln>
         </p:spPr>
@@ -8066,7 +8127,7 @@
             <a:r>
               <a:rPr lang="en-US" sz="750" dirty="0">
                 <a:solidFill>
-                  <a:srgbClr val="15202A"/>
+                  <a:srgbClr val="FFFFFF"/>
                 </a:solidFill>
                 <a:latin typeface="Calibri" pitchFamily="34" charset="0"/>
                 <a:ea typeface="Calibri" pitchFamily="34" charset="-122"/>
@@ -8083,7 +8144,7 @@
             <a:r>
               <a:rPr lang="en-US" sz="750" dirty="0">
                 <a:solidFill>
-                  <a:srgbClr val="15202A"/>
+                  <a:srgbClr val="FFFFFF"/>
                 </a:solidFill>
                 <a:latin typeface="Calibri" pitchFamily="34" charset="0"/>
                 <a:ea typeface="Calibri" pitchFamily="34" charset="-122"/>
@@ -8097,26 +8158,26 @@
       </p:sp>
       <p:sp>
         <p:nvSpPr>
-          <p:cNvPr id="135" name="Text 133"/>
-          <p:cNvSpPr/>
-          <p:nvPr/>
-        </p:nvSpPr>
-        <p:spPr>
-          <a:xfrm>
-            <a:off x="4940056" y="3385245"/>
-            <a:ext cx="1095435" cy="405661"/>
+          <p:cNvPr id="136" name="Text 134"/>
+          <p:cNvSpPr/>
+          <p:nvPr/>
+        </p:nvSpPr>
+        <p:spPr>
+          <a:xfrm>
+            <a:off x="4940056" y="3527619"/>
+            <a:ext cx="1095435" cy="399011"/>
           </a:xfrm>
           <a:prstGeom prst="roundRect">
             <a:avLst>
-              <a:gd name="adj" fmla="val 13525"/>
+              <a:gd name="adj" fmla="val 13750"/>
             </a:avLst>
           </a:prstGeom>
           <a:solidFill>
-            <a:srgbClr val="FFFFFF"/>
+            <a:srgbClr val="9E3200"/>
           </a:solidFill>
           <a:ln w="12700">
             <a:solidFill>
-              <a:srgbClr val="9AA6AD"/>
+              <a:srgbClr val="9E3200"/>
             </a:solidFill>
           </a:ln>
         </p:spPr>
@@ -8130,7 +8191,7 @@
             <a:r>
               <a:rPr lang="en-US" sz="750" dirty="0">
                 <a:solidFill>
-                  <a:srgbClr val="15202A"/>
+                  <a:srgbClr val="FFFFFF"/>
                 </a:solidFill>
                 <a:latin typeface="Calibri" pitchFamily="34" charset="0"/>
                 <a:ea typeface="Calibri" pitchFamily="34" charset="-122"/>
@@ -8147,7 +8208,7 @@
             <a:r>
               <a:rPr lang="en-US" sz="750" dirty="0">
                 <a:solidFill>
-                  <a:srgbClr val="15202A"/>
+                  <a:srgbClr val="FFFFFF"/>
                 </a:solidFill>
                 <a:latin typeface="Calibri" pitchFamily="34" charset="0"/>
                 <a:ea typeface="Calibri" pitchFamily="34" charset="-122"/>
@@ -8161,26 +8222,26 @@
       </p:sp>
       <p:sp>
         <p:nvSpPr>
-          <p:cNvPr id="136" name="Text 134"/>
-          <p:cNvSpPr/>
-          <p:nvPr/>
-        </p:nvSpPr>
-        <p:spPr>
-          <a:xfrm>
-            <a:off x="4940056" y="3883102"/>
-            <a:ext cx="1095435" cy="405661"/>
+          <p:cNvPr id="137" name="Text 135"/>
+          <p:cNvSpPr/>
+          <p:nvPr/>
+        </p:nvSpPr>
+        <p:spPr>
+          <a:xfrm>
+            <a:off x="4940056" y="4017314"/>
+            <a:ext cx="1095435" cy="399011"/>
           </a:xfrm>
           <a:prstGeom prst="roundRect">
             <a:avLst>
-              <a:gd name="adj" fmla="val 13525"/>
+              <a:gd name="adj" fmla="val 13750"/>
             </a:avLst>
           </a:prstGeom>
           <a:solidFill>
-            <a:srgbClr val="FFFFFF"/>
+            <a:srgbClr val="9E3200"/>
           </a:solidFill>
           <a:ln w="12700">
             <a:solidFill>
-              <a:srgbClr val="9AA6AD"/>
+              <a:srgbClr val="9E3200"/>
             </a:solidFill>
           </a:ln>
         </p:spPr>
@@ -8194,7 +8255,7 @@
             <a:r>
               <a:rPr lang="en-US" sz="750" dirty="0">
                 <a:solidFill>
-                  <a:srgbClr val="15202A"/>
+                  <a:srgbClr val="FFFFFF"/>
                 </a:solidFill>
                 <a:latin typeface="Calibri" pitchFamily="34" charset="0"/>
                 <a:ea typeface="Calibri" pitchFamily="34" charset="-122"/>
@@ -8211,7 +8272,7 @@
             <a:r>
               <a:rPr lang="en-US" sz="750" dirty="0">
                 <a:solidFill>
-                  <a:srgbClr val="15202A"/>
+                  <a:srgbClr val="FFFFFF"/>
                 </a:solidFill>
                 <a:latin typeface="Calibri" pitchFamily="34" charset="0"/>
                 <a:ea typeface="Calibri" pitchFamily="34" charset="-122"/>
@@ -8225,26 +8286,26 @@
       </p:sp>
       <p:sp>
         <p:nvSpPr>
-          <p:cNvPr id="137" name="Text 135"/>
-          <p:cNvSpPr/>
-          <p:nvPr/>
-        </p:nvSpPr>
-        <p:spPr>
-          <a:xfrm>
-            <a:off x="4940056" y="4380958"/>
-            <a:ext cx="1095435" cy="405661"/>
+          <p:cNvPr id="138" name="Text 136"/>
+          <p:cNvSpPr/>
+          <p:nvPr/>
+        </p:nvSpPr>
+        <p:spPr>
+          <a:xfrm>
+            <a:off x="4940056" y="4507010"/>
+            <a:ext cx="1095435" cy="399011"/>
           </a:xfrm>
           <a:prstGeom prst="roundRect">
             <a:avLst>
-              <a:gd name="adj" fmla="val 13525"/>
+              <a:gd name="adj" fmla="val 13750"/>
             </a:avLst>
           </a:prstGeom>
           <a:solidFill>
-            <a:srgbClr val="FFFFFF"/>
+            <a:srgbClr val="9E3200"/>
           </a:solidFill>
           <a:ln w="12700">
             <a:solidFill>
-              <a:srgbClr val="9AA6AD"/>
+              <a:srgbClr val="9E3200"/>
             </a:solidFill>
           </a:ln>
         </p:spPr>
@@ -8258,7 +8319,7 @@
             <a:r>
               <a:rPr lang="en-US" sz="750" dirty="0">
                 <a:solidFill>
-                  <a:srgbClr val="15202A"/>
+                  <a:srgbClr val="FFFFFF"/>
                 </a:solidFill>
                 <a:latin typeface="Calibri" pitchFamily="34" charset="0"/>
                 <a:ea typeface="Calibri" pitchFamily="34" charset="-122"/>
@@ -8272,26 +8333,26 @@
       </p:sp>
       <p:sp>
         <p:nvSpPr>
-          <p:cNvPr id="138" name="Text 136"/>
-          <p:cNvSpPr/>
-          <p:nvPr/>
-        </p:nvSpPr>
-        <p:spPr>
-          <a:xfrm>
-            <a:off x="4940056" y="4878815"/>
-            <a:ext cx="1095435" cy="405661"/>
+          <p:cNvPr id="139" name="Text 137"/>
+          <p:cNvSpPr/>
+          <p:nvPr/>
+        </p:nvSpPr>
+        <p:spPr>
+          <a:xfrm>
+            <a:off x="4940056" y="4996705"/>
+            <a:ext cx="1095435" cy="399011"/>
           </a:xfrm>
           <a:prstGeom prst="roundRect">
             <a:avLst>
-              <a:gd name="adj" fmla="val 13525"/>
+              <a:gd name="adj" fmla="val 13750"/>
             </a:avLst>
           </a:prstGeom>
           <a:solidFill>
-            <a:srgbClr val="FFFFFF"/>
+            <a:srgbClr val="9E3200"/>
           </a:solidFill>
           <a:ln w="12700">
             <a:solidFill>
-              <a:srgbClr val="9AA6AD"/>
+              <a:srgbClr val="9E3200"/>
             </a:solidFill>
           </a:ln>
         </p:spPr>
@@ -8305,7 +8366,7 @@
             <a:r>
               <a:rPr lang="en-US" sz="750" dirty="0">
                 <a:solidFill>
-                  <a:srgbClr val="15202A"/>
+                  <a:srgbClr val="FFFFFF"/>
                 </a:solidFill>
                 <a:latin typeface="Calibri" pitchFamily="34" charset="0"/>
                 <a:ea typeface="Calibri" pitchFamily="34" charset="-122"/>
@@ -8322,7 +8383,7 @@
             <a:r>
               <a:rPr lang="en-US" sz="750" dirty="0">
                 <a:solidFill>
-                  <a:srgbClr val="15202A"/>
+                  <a:srgbClr val="FFFFFF"/>
                 </a:solidFill>
                 <a:latin typeface="Calibri" pitchFamily="34" charset="0"/>
                 <a:ea typeface="Calibri" pitchFamily="34" charset="-122"/>
@@ -8336,26 +8397,26 @@
       </p:sp>
       <p:sp>
         <p:nvSpPr>
-          <p:cNvPr id="139" name="Text 137"/>
-          <p:cNvSpPr/>
-          <p:nvPr/>
-        </p:nvSpPr>
-        <p:spPr>
-          <a:xfrm>
-            <a:off x="6153461" y="2149822"/>
-            <a:ext cx="1263963" cy="479418"/>
+          <p:cNvPr id="140" name="Text 138"/>
+          <p:cNvSpPr/>
+          <p:nvPr/>
+        </p:nvSpPr>
+        <p:spPr>
+          <a:xfrm>
+            <a:off x="6153461" y="2312450"/>
+            <a:ext cx="1263963" cy="471558"/>
           </a:xfrm>
           <a:prstGeom prst="roundRect">
             <a:avLst>
-              <a:gd name="adj" fmla="val 11444"/>
+              <a:gd name="adj" fmla="val 11635"/>
             </a:avLst>
           </a:prstGeom>
           <a:solidFill>
-            <a:srgbClr val="E3EEF1"/>
+            <a:srgbClr val="E1002A"/>
           </a:solidFill>
           <a:ln w="12700">
             <a:solidFill>
-              <a:srgbClr val="0E6A86"/>
+              <a:srgbClr val="E1002A"/>
             </a:solidFill>
           </a:ln>
         </p:spPr>
@@ -8369,7 +8430,7 @@
             <a:r>
               <a:rPr lang="en-US" sz="900" b="1" dirty="0">
                 <a:solidFill>
-                  <a:srgbClr val="15202A"/>
+                  <a:srgbClr val="FFFFFF"/>
                 </a:solidFill>
                 <a:latin typeface="Calibri" pitchFamily="34" charset="0"/>
                 <a:ea typeface="Calibri" pitchFamily="34" charset="-122"/>
@@ -8383,26 +8444,26 @@
       </p:sp>
       <p:sp>
         <p:nvSpPr>
-          <p:cNvPr id="140" name="Text 138"/>
-          <p:cNvSpPr/>
-          <p:nvPr/>
-        </p:nvSpPr>
-        <p:spPr>
-          <a:xfrm>
-            <a:off x="6321989" y="2887388"/>
-            <a:ext cx="1095435" cy="405661"/>
+          <p:cNvPr id="141" name="Text 139"/>
+          <p:cNvSpPr/>
+          <p:nvPr/>
+        </p:nvSpPr>
+        <p:spPr>
+          <a:xfrm>
+            <a:off x="6321989" y="3037924"/>
+            <a:ext cx="1095435" cy="399011"/>
           </a:xfrm>
           <a:prstGeom prst="roundRect">
             <a:avLst>
-              <a:gd name="adj" fmla="val 13525"/>
+              <a:gd name="adj" fmla="val 13750"/>
             </a:avLst>
           </a:prstGeom>
           <a:solidFill>
-            <a:srgbClr val="FFFFFF"/>
+            <a:srgbClr val="9E3200"/>
           </a:solidFill>
           <a:ln w="12700">
             <a:solidFill>
-              <a:srgbClr val="9AA6AD"/>
+              <a:srgbClr val="9E3200"/>
             </a:solidFill>
           </a:ln>
         </p:spPr>
@@ -8416,7 +8477,7 @@
             <a:r>
               <a:rPr lang="en-US" sz="750" dirty="0">
                 <a:solidFill>
-                  <a:srgbClr val="15202A"/>
+                  <a:srgbClr val="FFFFFF"/>
                 </a:solidFill>
                 <a:latin typeface="Calibri" pitchFamily="34" charset="0"/>
                 <a:ea typeface="Calibri" pitchFamily="34" charset="-122"/>
@@ -8433,7 +8494,7 @@
             <a:r>
               <a:rPr lang="en-US" sz="750" dirty="0">
                 <a:solidFill>
-                  <a:srgbClr val="15202A"/>
+                  <a:srgbClr val="FFFFFF"/>
                 </a:solidFill>
                 <a:latin typeface="Calibri" pitchFamily="34" charset="0"/>
                 <a:ea typeface="Calibri" pitchFamily="34" charset="-122"/>
@@ -8447,26 +8508,26 @@
       </p:sp>
       <p:sp>
         <p:nvSpPr>
-          <p:cNvPr id="141" name="Text 139"/>
-          <p:cNvSpPr/>
-          <p:nvPr/>
-        </p:nvSpPr>
-        <p:spPr>
-          <a:xfrm>
-            <a:off x="6321989" y="3385245"/>
-            <a:ext cx="1095435" cy="405661"/>
+          <p:cNvPr id="142" name="Text 140"/>
+          <p:cNvSpPr/>
+          <p:nvPr/>
+        </p:nvSpPr>
+        <p:spPr>
+          <a:xfrm>
+            <a:off x="6321989" y="3527619"/>
+            <a:ext cx="1095435" cy="399011"/>
           </a:xfrm>
           <a:prstGeom prst="roundRect">
             <a:avLst>
-              <a:gd name="adj" fmla="val 13525"/>
+              <a:gd name="adj" fmla="val 13750"/>
             </a:avLst>
           </a:prstGeom>
           <a:solidFill>
-            <a:srgbClr val="FFFFFF"/>
+            <a:srgbClr val="9E3200"/>
           </a:solidFill>
           <a:ln w="12700">
             <a:solidFill>
-              <a:srgbClr val="9AA6AD"/>
+              <a:srgbClr val="9E3200"/>
             </a:solidFill>
           </a:ln>
         </p:spPr>
@@ -8480,7 +8541,7 @@
             <a:r>
               <a:rPr lang="en-US" sz="750" dirty="0">
                 <a:solidFill>
-                  <a:srgbClr val="15202A"/>
+                  <a:srgbClr val="FFFFFF"/>
                 </a:solidFill>
                 <a:latin typeface="Calibri" pitchFamily="34" charset="0"/>
                 <a:ea typeface="Calibri" pitchFamily="34" charset="-122"/>
@@ -8497,7 +8558,7 @@
             <a:r>
               <a:rPr lang="en-US" sz="750" dirty="0">
                 <a:solidFill>
-                  <a:srgbClr val="15202A"/>
+                  <a:srgbClr val="FFFFFF"/>
                 </a:solidFill>
                 <a:latin typeface="Calibri" pitchFamily="34" charset="0"/>
                 <a:ea typeface="Calibri" pitchFamily="34" charset="-122"/>
@@ -8511,26 +8572,26 @@
       </p:sp>
       <p:sp>
         <p:nvSpPr>
-          <p:cNvPr id="142" name="Text 140"/>
-          <p:cNvSpPr/>
-          <p:nvPr/>
-        </p:nvSpPr>
-        <p:spPr>
-          <a:xfrm>
-            <a:off x="6321989" y="3883102"/>
-            <a:ext cx="1095435" cy="405661"/>
+          <p:cNvPr id="143" name="Text 141"/>
+          <p:cNvSpPr/>
+          <p:nvPr/>
+        </p:nvSpPr>
+        <p:spPr>
+          <a:xfrm>
+            <a:off x="6321989" y="4017314"/>
+            <a:ext cx="1095435" cy="399011"/>
           </a:xfrm>
           <a:prstGeom prst="roundRect">
             <a:avLst>
-              <a:gd name="adj" fmla="val 13525"/>
+              <a:gd name="adj" fmla="val 13750"/>
             </a:avLst>
           </a:prstGeom>
           <a:solidFill>
-            <a:srgbClr val="FFFFFF"/>
+            <a:srgbClr val="9E3200"/>
           </a:solidFill>
           <a:ln w="12700">
             <a:solidFill>
-              <a:srgbClr val="9AA6AD"/>
+              <a:srgbClr val="9E3200"/>
             </a:solidFill>
           </a:ln>
         </p:spPr>
@@ -8544,7 +8605,7 @@
             <a:r>
               <a:rPr lang="en-US" sz="750" dirty="0">
                 <a:solidFill>
-                  <a:srgbClr val="15202A"/>
+                  <a:srgbClr val="FFFFFF"/>
                 </a:solidFill>
                 <a:latin typeface="Calibri" pitchFamily="34" charset="0"/>
                 <a:ea typeface="Calibri" pitchFamily="34" charset="-122"/>
@@ -8561,7 +8622,7 @@
             <a:r>
               <a:rPr lang="en-US" sz="750" dirty="0">
                 <a:solidFill>
-                  <a:srgbClr val="15202A"/>
+                  <a:srgbClr val="FFFFFF"/>
                 </a:solidFill>
                 <a:latin typeface="Calibri" pitchFamily="34" charset="0"/>
                 <a:ea typeface="Calibri" pitchFamily="34" charset="-122"/>
@@ -8575,26 +8636,26 @@
       </p:sp>
       <p:sp>
         <p:nvSpPr>
-          <p:cNvPr id="143" name="Text 141"/>
-          <p:cNvSpPr/>
-          <p:nvPr/>
-        </p:nvSpPr>
-        <p:spPr>
-          <a:xfrm>
-            <a:off x="6321989" y="4380958"/>
-            <a:ext cx="1095435" cy="405661"/>
+          <p:cNvPr id="144" name="Text 142"/>
+          <p:cNvSpPr/>
+          <p:nvPr/>
+        </p:nvSpPr>
+        <p:spPr>
+          <a:xfrm>
+            <a:off x="6321989" y="4507010"/>
+            <a:ext cx="1095435" cy="399011"/>
           </a:xfrm>
           <a:prstGeom prst="roundRect">
             <a:avLst>
-              <a:gd name="adj" fmla="val 13525"/>
+              <a:gd name="adj" fmla="val 13750"/>
             </a:avLst>
           </a:prstGeom>
           <a:solidFill>
-            <a:srgbClr val="FFFFFF"/>
+            <a:srgbClr val="9E3200"/>
           </a:solidFill>
           <a:ln w="12700">
             <a:solidFill>
-              <a:srgbClr val="9AA6AD"/>
+              <a:srgbClr val="9E3200"/>
             </a:solidFill>
           </a:ln>
         </p:spPr>
@@ -8608,7 +8669,7 @@
             <a:r>
               <a:rPr lang="en-US" sz="750" dirty="0">
                 <a:solidFill>
-                  <a:srgbClr val="15202A"/>
+                  <a:srgbClr val="FFFFFF"/>
                 </a:solidFill>
                 <a:latin typeface="Calibri" pitchFamily="34" charset="0"/>
                 <a:ea typeface="Calibri" pitchFamily="34" charset="-122"/>
@@ -8625,7 +8686,7 @@
             <a:r>
               <a:rPr lang="en-US" sz="750" dirty="0">
                 <a:solidFill>
-                  <a:srgbClr val="15202A"/>
+                  <a:srgbClr val="FFFFFF"/>
                 </a:solidFill>
                 <a:latin typeface="Calibri" pitchFamily="34" charset="0"/>
                 <a:ea typeface="Calibri" pitchFamily="34" charset="-122"/>
@@ -8639,26 +8700,26 @@
       </p:sp>
       <p:sp>
         <p:nvSpPr>
-          <p:cNvPr id="144" name="Text 142"/>
-          <p:cNvSpPr/>
-          <p:nvPr/>
-        </p:nvSpPr>
-        <p:spPr>
-          <a:xfrm>
-            <a:off x="6321989" y="4878815"/>
-            <a:ext cx="1095435" cy="405661"/>
+          <p:cNvPr id="145" name="Text 143"/>
+          <p:cNvSpPr/>
+          <p:nvPr/>
+        </p:nvSpPr>
+        <p:spPr>
+          <a:xfrm>
+            <a:off x="6321989" y="4996705"/>
+            <a:ext cx="1095435" cy="399011"/>
           </a:xfrm>
           <a:prstGeom prst="roundRect">
             <a:avLst>
-              <a:gd name="adj" fmla="val 13525"/>
+              <a:gd name="adj" fmla="val 13750"/>
             </a:avLst>
           </a:prstGeom>
           <a:solidFill>
-            <a:srgbClr val="FFFFFF"/>
+            <a:srgbClr val="9E3200"/>
           </a:solidFill>
           <a:ln w="12700">
             <a:solidFill>
-              <a:srgbClr val="9AA6AD"/>
+              <a:srgbClr val="9E3200"/>
             </a:solidFill>
           </a:ln>
         </p:spPr>
@@ -8672,7 +8733,7 @@
             <a:r>
               <a:rPr lang="en-US" sz="750" dirty="0">
                 <a:solidFill>
-                  <a:srgbClr val="15202A"/>
+                  <a:srgbClr val="FFFFFF"/>
                 </a:solidFill>
                 <a:latin typeface="Calibri" pitchFamily="34" charset="0"/>
                 <a:ea typeface="Calibri" pitchFamily="34" charset="-122"/>
@@ -8689,7 +8750,7 @@
             <a:r>
               <a:rPr lang="en-US" sz="750" dirty="0">
                 <a:solidFill>
-                  <a:srgbClr val="15202A"/>
+                  <a:srgbClr val="FFFFFF"/>
                 </a:solidFill>
                 <a:latin typeface="Calibri" pitchFamily="34" charset="0"/>
                 <a:ea typeface="Calibri" pitchFamily="34" charset="-122"/>
@@ -8703,26 +8764,26 @@
       </p:sp>
       <p:sp>
         <p:nvSpPr>
-          <p:cNvPr id="145" name="Text 143"/>
-          <p:cNvSpPr/>
-          <p:nvPr/>
-        </p:nvSpPr>
-        <p:spPr>
-          <a:xfrm>
-            <a:off x="6321989" y="5376672"/>
-            <a:ext cx="1095435" cy="405661"/>
+          <p:cNvPr id="146" name="Text 144"/>
+          <p:cNvSpPr/>
+          <p:nvPr/>
+        </p:nvSpPr>
+        <p:spPr>
+          <a:xfrm>
+            <a:off x="6321989" y="5486400"/>
+            <a:ext cx="1095435" cy="399011"/>
           </a:xfrm>
           <a:prstGeom prst="roundRect">
             <a:avLst>
-              <a:gd name="adj" fmla="val 13525"/>
+              <a:gd name="adj" fmla="val 13750"/>
             </a:avLst>
           </a:prstGeom>
           <a:solidFill>
-            <a:srgbClr val="FFFFFF"/>
+            <a:srgbClr val="9E3200"/>
           </a:solidFill>
           <a:ln w="12700">
             <a:solidFill>
-              <a:srgbClr val="9AA6AD"/>
+              <a:srgbClr val="9E3200"/>
             </a:solidFill>
           </a:ln>
         </p:spPr>
@@ -8736,7 +8797,7 @@
             <a:r>
               <a:rPr lang="en-US" sz="750" dirty="0">
                 <a:solidFill>
-                  <a:srgbClr val="15202A"/>
+                  <a:srgbClr val="FFFFFF"/>
                 </a:solidFill>
                 <a:latin typeface="Calibri" pitchFamily="34" charset="0"/>
                 <a:ea typeface="Calibri" pitchFamily="34" charset="-122"/>
@@ -8753,7 +8814,7 @@
             <a:r>
               <a:rPr lang="en-US" sz="750" dirty="0">
                 <a:solidFill>
-                  <a:srgbClr val="15202A"/>
+                  <a:srgbClr val="FFFFFF"/>
                 </a:solidFill>
                 <a:latin typeface="Calibri" pitchFamily="34" charset="0"/>
                 <a:ea typeface="Calibri" pitchFamily="34" charset="-122"/>
@@ -8767,26 +8828,26 @@
       </p:sp>
       <p:sp>
         <p:nvSpPr>
-          <p:cNvPr id="146" name="Text 144"/>
-          <p:cNvSpPr/>
-          <p:nvPr/>
-        </p:nvSpPr>
-        <p:spPr>
-          <a:xfrm>
-            <a:off x="7535394" y="2149822"/>
-            <a:ext cx="1263963" cy="479418"/>
+          <p:cNvPr id="147" name="Text 145"/>
+          <p:cNvSpPr/>
+          <p:nvPr/>
+        </p:nvSpPr>
+        <p:spPr>
+          <a:xfrm>
+            <a:off x="7535394" y="2312450"/>
+            <a:ext cx="1263963" cy="471558"/>
           </a:xfrm>
           <a:prstGeom prst="roundRect">
             <a:avLst>
-              <a:gd name="adj" fmla="val 11444"/>
+              <a:gd name="adj" fmla="val 11635"/>
             </a:avLst>
           </a:prstGeom>
           <a:solidFill>
-            <a:srgbClr val="E3EEF1"/>
+            <a:srgbClr val="E1002A"/>
           </a:solidFill>
           <a:ln w="12700">
             <a:solidFill>
-              <a:srgbClr val="0E6A86"/>
+              <a:srgbClr val="E1002A"/>
             </a:solidFill>
           </a:ln>
         </p:spPr>
@@ -8800,7 +8861,7 @@
             <a:r>
               <a:rPr lang="en-US" sz="900" b="1" dirty="0">
                 <a:solidFill>
-                  <a:srgbClr val="15202A"/>
+                  <a:srgbClr val="FFFFFF"/>
                 </a:solidFill>
                 <a:latin typeface="Calibri" pitchFamily="34" charset="0"/>
                 <a:ea typeface="Calibri" pitchFamily="34" charset="-122"/>
@@ -8814,26 +8875,26 @@
       </p:sp>
       <p:sp>
         <p:nvSpPr>
-          <p:cNvPr id="147" name="Text 145"/>
-          <p:cNvSpPr/>
-          <p:nvPr/>
-        </p:nvSpPr>
-        <p:spPr>
-          <a:xfrm>
-            <a:off x="7703923" y="2887388"/>
-            <a:ext cx="1095435" cy="405661"/>
+          <p:cNvPr id="148" name="Text 146"/>
+          <p:cNvSpPr/>
+          <p:nvPr/>
+        </p:nvSpPr>
+        <p:spPr>
+          <a:xfrm>
+            <a:off x="7703923" y="3037924"/>
+            <a:ext cx="1095435" cy="399011"/>
           </a:xfrm>
           <a:prstGeom prst="roundRect">
             <a:avLst>
-              <a:gd name="adj" fmla="val 13525"/>
+              <a:gd name="adj" fmla="val 13750"/>
             </a:avLst>
           </a:prstGeom>
           <a:solidFill>
-            <a:srgbClr val="FFFFFF"/>
+            <a:srgbClr val="9E3200"/>
           </a:solidFill>
           <a:ln w="12700">
             <a:solidFill>
-              <a:srgbClr val="9AA6AD"/>
+              <a:srgbClr val="9E3200"/>
             </a:solidFill>
           </a:ln>
         </p:spPr>
@@ -8847,7 +8908,7 @@
             <a:r>
               <a:rPr lang="en-US" sz="750" dirty="0">
                 <a:solidFill>
-                  <a:srgbClr val="15202A"/>
+                  <a:srgbClr val="FFFFFF"/>
                 </a:solidFill>
                 <a:latin typeface="Calibri" pitchFamily="34" charset="0"/>
                 <a:ea typeface="Calibri" pitchFamily="34" charset="-122"/>
@@ -8864,7 +8925,7 @@
             <a:r>
               <a:rPr lang="en-US" sz="750" dirty="0">
                 <a:solidFill>
-                  <a:srgbClr val="15202A"/>
+                  <a:srgbClr val="FFFFFF"/>
                 </a:solidFill>
                 <a:latin typeface="Calibri" pitchFamily="34" charset="0"/>
                 <a:ea typeface="Calibri" pitchFamily="34" charset="-122"/>
@@ -8878,26 +8939,26 @@
       </p:sp>
       <p:sp>
         <p:nvSpPr>
-          <p:cNvPr id="148" name="Text 146"/>
-          <p:cNvSpPr/>
-          <p:nvPr/>
-        </p:nvSpPr>
-        <p:spPr>
-          <a:xfrm>
-            <a:off x="7703923" y="3385245"/>
-            <a:ext cx="1095435" cy="405661"/>
+          <p:cNvPr id="149" name="Text 147"/>
+          <p:cNvSpPr/>
+          <p:nvPr/>
+        </p:nvSpPr>
+        <p:spPr>
+          <a:xfrm>
+            <a:off x="7703923" y="3527619"/>
+            <a:ext cx="1095435" cy="399011"/>
           </a:xfrm>
           <a:prstGeom prst="roundRect">
             <a:avLst>
-              <a:gd name="adj" fmla="val 13525"/>
+              <a:gd name="adj" fmla="val 13750"/>
             </a:avLst>
           </a:prstGeom>
           <a:solidFill>
-            <a:srgbClr val="FFFFFF"/>
+            <a:srgbClr val="9E3200"/>
           </a:solidFill>
           <a:ln w="12700">
             <a:solidFill>
-              <a:srgbClr val="9AA6AD"/>
+              <a:srgbClr val="9E3200"/>
             </a:solidFill>
           </a:ln>
         </p:spPr>
@@ -8911,7 +8972,7 @@
             <a:r>
               <a:rPr lang="en-US" sz="750" dirty="0">
                 <a:solidFill>
-                  <a:srgbClr val="15202A"/>
+                  <a:srgbClr val="FFFFFF"/>
                 </a:solidFill>
                 <a:latin typeface="Calibri" pitchFamily="34" charset="0"/>
                 <a:ea typeface="Calibri" pitchFamily="34" charset="-122"/>
@@ -8925,26 +8986,26 @@
       </p:sp>
       <p:sp>
         <p:nvSpPr>
-          <p:cNvPr id="149" name="Text 147"/>
-          <p:cNvSpPr/>
-          <p:nvPr/>
-        </p:nvSpPr>
-        <p:spPr>
-          <a:xfrm>
-            <a:off x="7703923" y="3883102"/>
-            <a:ext cx="1095435" cy="405661"/>
+          <p:cNvPr id="150" name="Text 148"/>
+          <p:cNvSpPr/>
+          <p:nvPr/>
+        </p:nvSpPr>
+        <p:spPr>
+          <a:xfrm>
+            <a:off x="7703923" y="4017314"/>
+            <a:ext cx="1095435" cy="399011"/>
           </a:xfrm>
           <a:prstGeom prst="roundRect">
             <a:avLst>
-              <a:gd name="adj" fmla="val 13525"/>
+              <a:gd name="adj" fmla="val 13750"/>
             </a:avLst>
           </a:prstGeom>
           <a:solidFill>
-            <a:srgbClr val="FFFFFF"/>
+            <a:srgbClr val="9E3200"/>
           </a:solidFill>
           <a:ln w="12700">
             <a:solidFill>
-              <a:srgbClr val="9AA6AD"/>
+              <a:srgbClr val="9E3200"/>
             </a:solidFill>
           </a:ln>
         </p:spPr>
@@ -8958,7 +9019,7 @@
             <a:r>
               <a:rPr lang="en-US" sz="750" dirty="0">
                 <a:solidFill>
-                  <a:srgbClr val="15202A"/>
+                  <a:srgbClr val="FFFFFF"/>
                 </a:solidFill>
                 <a:latin typeface="Calibri" pitchFamily="34" charset="0"/>
                 <a:ea typeface="Calibri" pitchFamily="34" charset="-122"/>
@@ -8975,7 +9036,7 @@
             <a:r>
               <a:rPr lang="en-US" sz="750" dirty="0">
                 <a:solidFill>
-                  <a:srgbClr val="15202A"/>
+                  <a:srgbClr val="FFFFFF"/>
                 </a:solidFill>
                 <a:latin typeface="Calibri" pitchFamily="34" charset="0"/>
                 <a:ea typeface="Calibri" pitchFamily="34" charset="-122"/>
@@ -8989,26 +9050,26 @@
       </p:sp>
       <p:sp>
         <p:nvSpPr>
-          <p:cNvPr id="150" name="Text 148"/>
-          <p:cNvSpPr/>
-          <p:nvPr/>
-        </p:nvSpPr>
-        <p:spPr>
-          <a:xfrm>
-            <a:off x="7703923" y="4380958"/>
-            <a:ext cx="1095435" cy="405661"/>
+          <p:cNvPr id="151" name="Text 149"/>
+          <p:cNvSpPr/>
+          <p:nvPr/>
+        </p:nvSpPr>
+        <p:spPr>
+          <a:xfrm>
+            <a:off x="7703923" y="4507010"/>
+            <a:ext cx="1095435" cy="399011"/>
           </a:xfrm>
           <a:prstGeom prst="roundRect">
             <a:avLst>
-              <a:gd name="adj" fmla="val 13525"/>
+              <a:gd name="adj" fmla="val 13750"/>
             </a:avLst>
           </a:prstGeom>
           <a:solidFill>
-            <a:srgbClr val="FFFFFF"/>
+            <a:srgbClr val="9E3200"/>
           </a:solidFill>
           <a:ln w="12700">
             <a:solidFill>
-              <a:srgbClr val="9AA6AD"/>
+              <a:srgbClr val="9E3200"/>
             </a:solidFill>
           </a:ln>
         </p:spPr>
@@ -9022,7 +9083,7 @@
             <a:r>
               <a:rPr lang="en-US" sz="750" dirty="0">
                 <a:solidFill>
-                  <a:srgbClr val="15202A"/>
+                  <a:srgbClr val="FFFFFF"/>
                 </a:solidFill>
                 <a:latin typeface="Calibri" pitchFamily="34" charset="0"/>
                 <a:ea typeface="Calibri" pitchFamily="34" charset="-122"/>
@@ -9036,26 +9097,26 @@
       </p:sp>
       <p:sp>
         <p:nvSpPr>
-          <p:cNvPr id="151" name="Text 149"/>
-          <p:cNvSpPr/>
-          <p:nvPr/>
-        </p:nvSpPr>
-        <p:spPr>
-          <a:xfrm>
-            <a:off x="8917327" y="2149822"/>
-            <a:ext cx="1263963" cy="479418"/>
+          <p:cNvPr id="152" name="Text 150"/>
+          <p:cNvSpPr/>
+          <p:nvPr/>
+        </p:nvSpPr>
+        <p:spPr>
+          <a:xfrm>
+            <a:off x="8917327" y="2312450"/>
+            <a:ext cx="1263963" cy="471558"/>
           </a:xfrm>
           <a:prstGeom prst="roundRect">
             <a:avLst>
-              <a:gd name="adj" fmla="val 11444"/>
+              <a:gd name="adj" fmla="val 11635"/>
             </a:avLst>
           </a:prstGeom>
           <a:solidFill>
-            <a:srgbClr val="E3EEF1"/>
+            <a:srgbClr val="E1002A"/>
           </a:solidFill>
           <a:ln w="12700">
             <a:solidFill>
-              <a:srgbClr val="0E6A86"/>
+              <a:srgbClr val="E1002A"/>
             </a:solidFill>
           </a:ln>
         </p:spPr>
@@ -9069,7 +9130,7 @@
             <a:r>
               <a:rPr lang="en-US" sz="900" b="1" dirty="0">
                 <a:solidFill>
-                  <a:srgbClr val="15202A"/>
+                  <a:srgbClr val="FFFFFF"/>
                 </a:solidFill>
                 <a:latin typeface="Calibri" pitchFamily="34" charset="0"/>
                 <a:ea typeface="Calibri" pitchFamily="34" charset="-122"/>
@@ -9083,26 +9144,26 @@
       </p:sp>
       <p:sp>
         <p:nvSpPr>
-          <p:cNvPr id="152" name="Text 150"/>
-          <p:cNvSpPr/>
-          <p:nvPr/>
-        </p:nvSpPr>
-        <p:spPr>
-          <a:xfrm>
-            <a:off x="9085856" y="2887388"/>
-            <a:ext cx="1095435" cy="405661"/>
+          <p:cNvPr id="153" name="Text 151"/>
+          <p:cNvSpPr/>
+          <p:nvPr/>
+        </p:nvSpPr>
+        <p:spPr>
+          <a:xfrm>
+            <a:off x="9085856" y="3037924"/>
+            <a:ext cx="1095435" cy="399011"/>
           </a:xfrm>
           <a:prstGeom prst="roundRect">
             <a:avLst>
-              <a:gd name="adj" fmla="val 13525"/>
+              <a:gd name="adj" fmla="val 13750"/>
             </a:avLst>
           </a:prstGeom>
           <a:solidFill>
-            <a:srgbClr val="FFFFFF"/>
+            <a:srgbClr val="9E3200"/>
           </a:solidFill>
           <a:ln w="12700">
             <a:solidFill>
-              <a:srgbClr val="9AA6AD"/>
+              <a:srgbClr val="9E3200"/>
             </a:solidFill>
           </a:ln>
         </p:spPr>
@@ -9116,7 +9177,7 @@
             <a:r>
               <a:rPr lang="en-US" sz="750" dirty="0">
                 <a:solidFill>
-                  <a:srgbClr val="15202A"/>
+                  <a:srgbClr val="FFFFFF"/>
                 </a:solidFill>
                 <a:latin typeface="Calibri" pitchFamily="34" charset="0"/>
                 <a:ea typeface="Calibri" pitchFamily="34" charset="-122"/>
@@ -9133,7 +9194,7 @@
             <a:r>
               <a:rPr lang="en-US" sz="750" dirty="0">
                 <a:solidFill>
-                  <a:srgbClr val="15202A"/>
+                  <a:srgbClr val="FFFFFF"/>
                 </a:solidFill>
                 <a:latin typeface="Calibri" pitchFamily="34" charset="0"/>
                 <a:ea typeface="Calibri" pitchFamily="34" charset="-122"/>
@@ -9147,26 +9208,26 @@
       </p:sp>
       <p:sp>
         <p:nvSpPr>
-          <p:cNvPr id="153" name="Text 151"/>
-          <p:cNvSpPr/>
-          <p:nvPr/>
-        </p:nvSpPr>
-        <p:spPr>
-          <a:xfrm>
-            <a:off x="9085856" y="3385245"/>
-            <a:ext cx="1095435" cy="405661"/>
+          <p:cNvPr id="154" name="Text 152"/>
+          <p:cNvSpPr/>
+          <p:nvPr/>
+        </p:nvSpPr>
+        <p:spPr>
+          <a:xfrm>
+            <a:off x="9085856" y="3527619"/>
+            <a:ext cx="1095435" cy="399011"/>
           </a:xfrm>
           <a:prstGeom prst="roundRect">
             <a:avLst>
-              <a:gd name="adj" fmla="val 13525"/>
+              <a:gd name="adj" fmla="val 13750"/>
             </a:avLst>
           </a:prstGeom>
           <a:solidFill>
-            <a:srgbClr val="FFFFFF"/>
+            <a:srgbClr val="9E3200"/>
           </a:solidFill>
           <a:ln w="12700">
             <a:solidFill>
-              <a:srgbClr val="9AA6AD"/>
+              <a:srgbClr val="9E3200"/>
             </a:solidFill>
           </a:ln>
         </p:spPr>
@@ -9180,7 +9241,7 @@
             <a:r>
               <a:rPr lang="en-US" sz="750" dirty="0">
                 <a:solidFill>
-                  <a:srgbClr val="15202A"/>
+                  <a:srgbClr val="FFFFFF"/>
                 </a:solidFill>
                 <a:latin typeface="Calibri" pitchFamily="34" charset="0"/>
                 <a:ea typeface="Calibri" pitchFamily="34" charset="-122"/>
@@ -9197,7 +9258,7 @@
             <a:r>
               <a:rPr lang="en-US" sz="750" dirty="0">
                 <a:solidFill>
-                  <a:srgbClr val="15202A"/>
+                  <a:srgbClr val="FFFFFF"/>
                 </a:solidFill>
                 <a:latin typeface="Calibri" pitchFamily="34" charset="0"/>
                 <a:ea typeface="Calibri" pitchFamily="34" charset="-122"/>
@@ -9211,26 +9272,26 @@
       </p:sp>
       <p:sp>
         <p:nvSpPr>
-          <p:cNvPr id="154" name="Text 152"/>
-          <p:cNvSpPr/>
-          <p:nvPr/>
-        </p:nvSpPr>
-        <p:spPr>
-          <a:xfrm>
-            <a:off x="9085856" y="3883102"/>
-            <a:ext cx="1095435" cy="405661"/>
+          <p:cNvPr id="155" name="Text 153"/>
+          <p:cNvSpPr/>
+          <p:nvPr/>
+        </p:nvSpPr>
+        <p:spPr>
+          <a:xfrm>
+            <a:off x="9085856" y="4017314"/>
+            <a:ext cx="1095435" cy="399011"/>
           </a:xfrm>
           <a:prstGeom prst="roundRect">
             <a:avLst>
-              <a:gd name="adj" fmla="val 13525"/>
+              <a:gd name="adj" fmla="val 13750"/>
             </a:avLst>
           </a:prstGeom>
           <a:solidFill>
-            <a:srgbClr val="FFFFFF"/>
+            <a:srgbClr val="9E3200"/>
           </a:solidFill>
           <a:ln w="12700">
             <a:solidFill>
-              <a:srgbClr val="9AA6AD"/>
+              <a:srgbClr val="9E3200"/>
             </a:solidFill>
           </a:ln>
         </p:spPr>
@@ -9244,7 +9305,7 @@
             <a:r>
               <a:rPr lang="en-US" sz="750" dirty="0">
                 <a:solidFill>
-                  <a:srgbClr val="15202A"/>
+                  <a:srgbClr val="FFFFFF"/>
                 </a:solidFill>
                 <a:latin typeface="Calibri" pitchFamily="34" charset="0"/>
                 <a:ea typeface="Calibri" pitchFamily="34" charset="-122"/>
@@ -9261,7 +9322,7 @@
             <a:r>
               <a:rPr lang="en-US" sz="750" dirty="0">
                 <a:solidFill>
-                  <a:srgbClr val="15202A"/>
+                  <a:srgbClr val="FFFFFF"/>
                 </a:solidFill>
                 <a:latin typeface="Calibri" pitchFamily="34" charset="0"/>
                 <a:ea typeface="Calibri" pitchFamily="34" charset="-122"/>
@@ -9275,26 +9336,26 @@
       </p:sp>
       <p:sp>
         <p:nvSpPr>
-          <p:cNvPr id="155" name="Text 153"/>
-          <p:cNvSpPr/>
-          <p:nvPr/>
-        </p:nvSpPr>
-        <p:spPr>
-          <a:xfrm>
-            <a:off x="9085856" y="4380958"/>
-            <a:ext cx="1095435" cy="405661"/>
+          <p:cNvPr id="156" name="Text 154"/>
+          <p:cNvSpPr/>
+          <p:nvPr/>
+        </p:nvSpPr>
+        <p:spPr>
+          <a:xfrm>
+            <a:off x="9085856" y="4507010"/>
+            <a:ext cx="1095435" cy="399011"/>
           </a:xfrm>
           <a:prstGeom prst="roundRect">
             <a:avLst>
-              <a:gd name="adj" fmla="val 13525"/>
+              <a:gd name="adj" fmla="val 13750"/>
             </a:avLst>
           </a:prstGeom>
           <a:solidFill>
-            <a:srgbClr val="FFFFFF"/>
+            <a:srgbClr val="9E3200"/>
           </a:solidFill>
           <a:ln w="12700">
             <a:solidFill>
-              <a:srgbClr val="9AA6AD"/>
+              <a:srgbClr val="9E3200"/>
             </a:solidFill>
           </a:ln>
         </p:spPr>
@@ -9308,7 +9369,7 @@
             <a:r>
               <a:rPr lang="en-US" sz="750" dirty="0">
                 <a:solidFill>
-                  <a:srgbClr val="15202A"/>
+                  <a:srgbClr val="FFFFFF"/>
                 </a:solidFill>
                 <a:latin typeface="Calibri" pitchFamily="34" charset="0"/>
                 <a:ea typeface="Calibri" pitchFamily="34" charset="-122"/>
@@ -9325,7 +9386,7 @@
             <a:r>
               <a:rPr lang="en-US" sz="750" dirty="0">
                 <a:solidFill>
-                  <a:srgbClr val="15202A"/>
+                  <a:srgbClr val="FFFFFF"/>
                 </a:solidFill>
                 <a:latin typeface="Calibri" pitchFamily="34" charset="0"/>
                 <a:ea typeface="Calibri" pitchFamily="34" charset="-122"/>
@@ -9339,26 +9400,26 @@
       </p:sp>
       <p:sp>
         <p:nvSpPr>
-          <p:cNvPr id="156" name="Text 154"/>
-          <p:cNvSpPr/>
-          <p:nvPr/>
-        </p:nvSpPr>
-        <p:spPr>
-          <a:xfrm>
-            <a:off x="9085856" y="4878815"/>
-            <a:ext cx="1095435" cy="405661"/>
+          <p:cNvPr id="157" name="Text 155"/>
+          <p:cNvSpPr/>
+          <p:nvPr/>
+        </p:nvSpPr>
+        <p:spPr>
+          <a:xfrm>
+            <a:off x="9085856" y="4996705"/>
+            <a:ext cx="1095435" cy="399011"/>
           </a:xfrm>
           <a:prstGeom prst="roundRect">
             <a:avLst>
-              <a:gd name="adj" fmla="val 13525"/>
+              <a:gd name="adj" fmla="val 13750"/>
             </a:avLst>
           </a:prstGeom>
           <a:solidFill>
-            <a:srgbClr val="FFFFFF"/>
+            <a:srgbClr val="9E3200"/>
           </a:solidFill>
           <a:ln w="12700">
             <a:solidFill>
-              <a:srgbClr val="9AA6AD"/>
+              <a:srgbClr val="9E3200"/>
             </a:solidFill>
           </a:ln>
         </p:spPr>
@@ -9372,7 +9433,7 @@
             <a:r>
               <a:rPr lang="en-US" sz="750" dirty="0">
                 <a:solidFill>
-                  <a:srgbClr val="15202A"/>
+                  <a:srgbClr val="FFFFFF"/>
                 </a:solidFill>
                 <a:latin typeface="Calibri" pitchFamily="34" charset="0"/>
                 <a:ea typeface="Calibri" pitchFamily="34" charset="-122"/>
@@ -9389,7 +9450,7 @@
             <a:r>
               <a:rPr lang="en-US" sz="750" dirty="0">
                 <a:solidFill>
-                  <a:srgbClr val="15202A"/>
+                  <a:srgbClr val="FFFFFF"/>
                 </a:solidFill>
                 <a:latin typeface="Calibri" pitchFamily="34" charset="0"/>
                 <a:ea typeface="Calibri" pitchFamily="34" charset="-122"/>
@@ -9403,26 +9464,26 @@
       </p:sp>
       <p:sp>
         <p:nvSpPr>
-          <p:cNvPr id="157" name="Text 155"/>
-          <p:cNvSpPr/>
-          <p:nvPr/>
-        </p:nvSpPr>
-        <p:spPr>
-          <a:xfrm>
-            <a:off x="9085856" y="5376672"/>
-            <a:ext cx="1095435" cy="405661"/>
+          <p:cNvPr id="158" name="Text 156"/>
+          <p:cNvSpPr/>
+          <p:nvPr/>
+        </p:nvSpPr>
+        <p:spPr>
+          <a:xfrm>
+            <a:off x="9085856" y="5486400"/>
+            <a:ext cx="1095435" cy="399011"/>
           </a:xfrm>
           <a:prstGeom prst="roundRect">
             <a:avLst>
-              <a:gd name="adj" fmla="val 13525"/>
+              <a:gd name="adj" fmla="val 13750"/>
             </a:avLst>
           </a:prstGeom>
           <a:solidFill>
-            <a:srgbClr val="FFFFFF"/>
+            <a:srgbClr val="9E3200"/>
           </a:solidFill>
           <a:ln w="12700">
             <a:solidFill>
-              <a:srgbClr val="9AA6AD"/>
+              <a:srgbClr val="9E3200"/>
             </a:solidFill>
           </a:ln>
         </p:spPr>
@@ -9436,7 +9497,7 @@
             <a:r>
               <a:rPr lang="en-US" sz="750" dirty="0">
                 <a:solidFill>
-                  <a:srgbClr val="15202A"/>
+                  <a:srgbClr val="FFFFFF"/>
                 </a:solidFill>
                 <a:latin typeface="Calibri" pitchFamily="34" charset="0"/>
                 <a:ea typeface="Calibri" pitchFamily="34" charset="-122"/>
@@ -9453,7 +9514,7 @@
             <a:r>
               <a:rPr lang="en-US" sz="750" dirty="0">
                 <a:solidFill>
-                  <a:srgbClr val="15202A"/>
+                  <a:srgbClr val="FFFFFF"/>
                 </a:solidFill>
                 <a:latin typeface="Calibri" pitchFamily="34" charset="0"/>
                 <a:ea typeface="Calibri" pitchFamily="34" charset="-122"/>
@@ -9467,26 +9528,26 @@
       </p:sp>
       <p:sp>
         <p:nvSpPr>
-          <p:cNvPr id="158" name="Text 156"/>
-          <p:cNvSpPr/>
-          <p:nvPr/>
-        </p:nvSpPr>
-        <p:spPr>
-          <a:xfrm>
-            <a:off x="10299260" y="2149822"/>
-            <a:ext cx="1263963" cy="479418"/>
+          <p:cNvPr id="159" name="Text 157"/>
+          <p:cNvSpPr/>
+          <p:nvPr/>
+        </p:nvSpPr>
+        <p:spPr>
+          <a:xfrm>
+            <a:off x="10299260" y="2312450"/>
+            <a:ext cx="1263963" cy="471558"/>
           </a:xfrm>
           <a:prstGeom prst="roundRect">
             <a:avLst>
-              <a:gd name="adj" fmla="val 11444"/>
+              <a:gd name="adj" fmla="val 11635"/>
             </a:avLst>
           </a:prstGeom>
           <a:solidFill>
-            <a:srgbClr val="E3EEF1"/>
+            <a:srgbClr val="E1002A"/>
           </a:solidFill>
           <a:ln w="12700">
             <a:solidFill>
-              <a:srgbClr val="0E6A86"/>
+              <a:srgbClr val="E1002A"/>
             </a:solidFill>
           </a:ln>
         </p:spPr>
@@ -9500,7 +9561,7 @@
             <a:r>
               <a:rPr lang="en-US" sz="900" b="1" dirty="0">
                 <a:solidFill>
-                  <a:srgbClr val="15202A"/>
+                  <a:srgbClr val="FFFFFF"/>
                 </a:solidFill>
                 <a:latin typeface="Calibri" pitchFamily="34" charset="0"/>
                 <a:ea typeface="Calibri" pitchFamily="34" charset="-122"/>
@@ -9517,7 +9578,7 @@
             <a:r>
               <a:rPr lang="en-US" sz="900" b="1" dirty="0">
                 <a:solidFill>
-                  <a:srgbClr val="15202A"/>
+                  <a:srgbClr val="FFFFFF"/>
                 </a:solidFill>
                 <a:latin typeface="Calibri" pitchFamily="34" charset="0"/>
                 <a:ea typeface="Calibri" pitchFamily="34" charset="-122"/>
@@ -9531,26 +9592,26 @@
       </p:sp>
       <p:sp>
         <p:nvSpPr>
-          <p:cNvPr id="159" name="Text 157"/>
-          <p:cNvSpPr/>
-          <p:nvPr/>
-        </p:nvSpPr>
-        <p:spPr>
-          <a:xfrm>
-            <a:off x="10467789" y="2887388"/>
-            <a:ext cx="1095435" cy="405661"/>
+          <p:cNvPr id="160" name="Text 158"/>
+          <p:cNvSpPr/>
+          <p:nvPr/>
+        </p:nvSpPr>
+        <p:spPr>
+          <a:xfrm>
+            <a:off x="10467789" y="3037924"/>
+            <a:ext cx="1095435" cy="399011"/>
           </a:xfrm>
           <a:prstGeom prst="roundRect">
             <a:avLst>
-              <a:gd name="adj" fmla="val 13525"/>
+              <a:gd name="adj" fmla="val 13750"/>
             </a:avLst>
           </a:prstGeom>
           <a:solidFill>
-            <a:srgbClr val="FFFFFF"/>
+            <a:srgbClr val="9E3200"/>
           </a:solidFill>
           <a:ln w="12700">
             <a:solidFill>
-              <a:srgbClr val="9AA6AD"/>
+              <a:srgbClr val="9E3200"/>
             </a:solidFill>
           </a:ln>
         </p:spPr>
@@ -9564,7 +9625,7 @@
             <a:r>
               <a:rPr lang="en-US" sz="750" dirty="0">
                 <a:solidFill>
-                  <a:srgbClr val="15202A"/>
+                  <a:srgbClr val="FFFFFF"/>
                 </a:solidFill>
                 <a:latin typeface="Calibri" pitchFamily="34" charset="0"/>
                 <a:ea typeface="Calibri" pitchFamily="34" charset="-122"/>
@@ -9581,7 +9642,7 @@
             <a:r>
               <a:rPr lang="en-US" sz="750" dirty="0">
                 <a:solidFill>
-                  <a:srgbClr val="15202A"/>
+                  <a:srgbClr val="FFFFFF"/>
                 </a:solidFill>
                 <a:latin typeface="Calibri" pitchFamily="34" charset="0"/>
                 <a:ea typeface="Calibri" pitchFamily="34" charset="-122"/>
@@ -9595,26 +9656,26 @@
       </p:sp>
       <p:sp>
         <p:nvSpPr>
-          <p:cNvPr id="160" name="Text 158"/>
-          <p:cNvSpPr/>
-          <p:nvPr/>
-        </p:nvSpPr>
-        <p:spPr>
-          <a:xfrm>
-            <a:off x="10467789" y="3385245"/>
-            <a:ext cx="1095435" cy="405661"/>
+          <p:cNvPr id="161" name="Text 159"/>
+          <p:cNvSpPr/>
+          <p:nvPr/>
+        </p:nvSpPr>
+        <p:spPr>
+          <a:xfrm>
+            <a:off x="10467789" y="3527619"/>
+            <a:ext cx="1095435" cy="399011"/>
           </a:xfrm>
           <a:prstGeom prst="roundRect">
             <a:avLst>
-              <a:gd name="adj" fmla="val 13525"/>
+              <a:gd name="adj" fmla="val 13750"/>
             </a:avLst>
           </a:prstGeom>
           <a:solidFill>
-            <a:srgbClr val="FFFFFF"/>
+            <a:srgbClr val="9E3200"/>
           </a:solidFill>
           <a:ln w="12700">
             <a:solidFill>
-              <a:srgbClr val="9AA6AD"/>
+              <a:srgbClr val="9E3200"/>
             </a:solidFill>
           </a:ln>
         </p:spPr>
@@ -9628,7 +9689,7 @@
             <a:r>
               <a:rPr lang="en-US" sz="750" dirty="0">
                 <a:solidFill>
-                  <a:srgbClr val="15202A"/>
+                  <a:srgbClr val="FFFFFF"/>
                 </a:solidFill>
                 <a:latin typeface="Calibri" pitchFamily="34" charset="0"/>
                 <a:ea typeface="Calibri" pitchFamily="34" charset="-122"/>
@@ -9642,26 +9703,26 @@
       </p:sp>
       <p:sp>
         <p:nvSpPr>
-          <p:cNvPr id="161" name="Text 159"/>
-          <p:cNvSpPr/>
-          <p:nvPr/>
-        </p:nvSpPr>
-        <p:spPr>
-          <a:xfrm>
-            <a:off x="10467789" y="3883102"/>
-            <a:ext cx="1095435" cy="405661"/>
+          <p:cNvPr id="162" name="Text 160"/>
+          <p:cNvSpPr/>
+          <p:nvPr/>
+        </p:nvSpPr>
+        <p:spPr>
+          <a:xfrm>
+            <a:off x="10467789" y="4017314"/>
+            <a:ext cx="1095435" cy="399011"/>
           </a:xfrm>
           <a:prstGeom prst="roundRect">
             <a:avLst>
-              <a:gd name="adj" fmla="val 13525"/>
+              <a:gd name="adj" fmla="val 13750"/>
             </a:avLst>
           </a:prstGeom>
           <a:solidFill>
-            <a:srgbClr val="FFFFFF"/>
+            <a:srgbClr val="9E3200"/>
           </a:solidFill>
           <a:ln w="12700">
             <a:solidFill>
-              <a:srgbClr val="9AA6AD"/>
+              <a:srgbClr val="9E3200"/>
             </a:solidFill>
           </a:ln>
         </p:spPr>
@@ -9675,7 +9736,7 @@
             <a:r>
               <a:rPr lang="en-US" sz="750" dirty="0">
                 <a:solidFill>
-                  <a:srgbClr val="15202A"/>
+                  <a:srgbClr val="FFFFFF"/>
                 </a:solidFill>
                 <a:latin typeface="Calibri" pitchFamily="34" charset="0"/>
                 <a:ea typeface="Calibri" pitchFamily="34" charset="-122"/>
@@ -9689,26 +9750,26 @@
       </p:sp>
       <p:sp>
         <p:nvSpPr>
-          <p:cNvPr id="162" name="Text 160"/>
-          <p:cNvSpPr/>
-          <p:nvPr/>
-        </p:nvSpPr>
-        <p:spPr>
-          <a:xfrm>
-            <a:off x="10467789" y="4380958"/>
-            <a:ext cx="1095435" cy="405661"/>
+          <p:cNvPr id="163" name="Text 161"/>
+          <p:cNvSpPr/>
+          <p:nvPr/>
+        </p:nvSpPr>
+        <p:spPr>
+          <a:xfrm>
+            <a:off x="10467789" y="4507010"/>
+            <a:ext cx="1095435" cy="399011"/>
           </a:xfrm>
           <a:prstGeom prst="roundRect">
             <a:avLst>
-              <a:gd name="adj" fmla="val 13525"/>
+              <a:gd name="adj" fmla="val 13750"/>
             </a:avLst>
           </a:prstGeom>
           <a:solidFill>
-            <a:srgbClr val="FFFFFF"/>
+            <a:srgbClr val="9E3200"/>
           </a:solidFill>
           <a:ln w="12700">
             <a:solidFill>
-              <a:srgbClr val="9AA6AD"/>
+              <a:srgbClr val="9E3200"/>
             </a:solidFill>
           </a:ln>
         </p:spPr>
@@ -9722,7 +9783,7 @@
             <a:r>
               <a:rPr lang="en-US" sz="750" dirty="0">
                 <a:solidFill>
-                  <a:srgbClr val="15202A"/>
+                  <a:srgbClr val="FFFFFF"/>
                 </a:solidFill>
                 <a:latin typeface="Calibri" pitchFamily="34" charset="0"/>
                 <a:ea typeface="Calibri" pitchFamily="34" charset="-122"/>
@@ -9739,7 +9800,7 @@
             <a:r>
               <a:rPr lang="en-US" sz="750" dirty="0">
                 <a:solidFill>
-                  <a:srgbClr val="15202A"/>
+                  <a:srgbClr val="FFFFFF"/>
                 </a:solidFill>
                 <a:latin typeface="Calibri" pitchFamily="34" charset="0"/>
                 <a:ea typeface="Calibri" pitchFamily="34" charset="-122"/>
